--- a/assignments/VoltNet_Review1.pptx
+++ b/assignments/VoltNet_Review1.pptx
@@ -4,9 +4,6 @@
   <p:sldMasterIdLst>
     <p:sldMasterId id="2147483648" r:id="rId1"/>
   </p:sldMasterIdLst>
-  <p:notesMasterIdLst>
-    <p:notesMasterId r:id="rId14"/>
-  </p:notesMasterIdLst>
   <p:sldIdLst>
     <p:sldId id="256" r:id="rId2"/>
     <p:sldId id="257" r:id="rId3"/>
@@ -21,6 +18,9 @@
     <p:sldId id="266" r:id="rId12"/>
     <p:sldId id="267" r:id="rId13"/>
   </p:sldIdLst>
+  <p:notesMasterIdLst>
+    <p:notesMasterId r:id="rId14"/>
+  </p:notesMasterIdLst>
   <p:sldSz cx="12192000" cy="6858000"/>
   <p:notesSz cx="6858000" cy="12192000"/>
   <p:defaultTextStyle>
@@ -115,11 +115,6 @@
       </a:defRPr>
     </a:lvl9pPr>
   </p:defaultTextStyle>
-  <p:extLst>
-    <p:ext uri="{EFAFB233-063F-42B5-8137-9DF3F51BA10A}">
-      <p15:sldGuideLst xmlns:p15="http://schemas.microsoft.com/office/powerpoint/2012/main"/>
-    </p:ext>
-  </p:extLst>
 </p:presentation>
 </file>
 
@@ -145,10 +140,234 @@
           <a:chExt cx="0" cy="0"/>
         </a:xfrm>
       </p:grpSpPr>
+      <p:sp>
+        <p:nvSpPr>
+          <p:cNvPr id="2" name="Header Placeholder 1"/>
+          <p:cNvSpPr>
+            <a:spLocks noGrp="1"/>
+          </p:cNvSpPr>
+          <p:nvPr>
+            <p:ph type="hdr" sz="quarter"/>
+          </p:nvPr>
+        </p:nvSpPr>
+        <p:spPr>
+          <a:xfrm>
+            <a:off x="0" y="0"/>
+            <a:ext cx="2971800" cy="458788"/>
+          </a:xfrm>
+          <a:prstGeom prst="rect">
+            <a:avLst/>
+          </a:prstGeom>
+        </p:spPr>
+        <p:txBody>
+          <a:bodyPr vert="horz" lIns="91440" tIns="45720" rIns="91440" bIns="45720" rtlCol="0"/>
+          <a:lstStyle>
+            <a:lvl1pPr algn="l">
+              <a:defRPr sz="1200"/>
+            </a:lvl1pPr>
+          </a:lstStyle>
+          <a:p>
+            <a:endParaRPr lang="en-US"/>
+          </a:p>
+        </p:txBody>
+      </p:sp>
+      <p:sp>
+        <p:nvSpPr>
+          <p:cNvPr id="3" name="Date Placeholder 2"/>
+          <p:cNvSpPr>
+            <a:spLocks noGrp="1"/>
+          </p:cNvSpPr>
+          <p:nvPr>
+            <p:ph type="dt" idx="1"/>
+          </p:nvPr>
+        </p:nvSpPr>
+        <p:spPr>
+          <a:xfrm>
+            <a:off x="3884613" y="0"/>
+            <a:ext cx="2971800" cy="458788"/>
+          </a:xfrm>
+          <a:prstGeom prst="rect">
+            <a:avLst/>
+          </a:prstGeom>
+        </p:spPr>
+        <p:txBody>
+          <a:bodyPr vert="horz" lIns="91440" tIns="45720" rIns="91440" bIns="45720" rtlCol="0"/>
+          <a:lstStyle>
+            <a:lvl1pPr algn="r">
+              <a:defRPr sz="1200"/>
+            </a:lvl1pPr>
+          </a:lstStyle>
+          <a:p>
+            <a:fld id="{5282F153-3F37-0F45-9E97-73ACFA13230C}" type="datetimeFigureOut">
+              <a:rPr lang="en-US"/>
+              <a:t>7/23/19</a:t>
+            </a:fld>
+            <a:endParaRPr lang="en-US"/>
+          </a:p>
+        </p:txBody>
+      </p:sp>
+      <p:sp>
+        <p:nvSpPr>
+          <p:cNvPr id="4" name="Slide Image Placeholder 3"/>
+          <p:cNvSpPr>
+            <a:spLocks noGrp="1" noRot="1" noChangeAspect="1"/>
+          </p:cNvSpPr>
+          <p:nvPr>
+            <p:ph type="sldImg" idx="2"/>
+          </p:nvPr>
+        </p:nvSpPr>
+        <p:spPr>
+          <a:xfrm>
+            <a:off x="685800" y="1143000"/>
+            <a:ext cx="5486400" cy="3086100"/>
+          </a:xfrm>
+          <a:prstGeom prst="rect">
+            <a:avLst/>
+          </a:prstGeom>
+          <a:noFill/>
+          <a:ln w="12700">
+            <a:solidFill>
+              <a:prstClr val="black"/>
+            </a:solidFill>
+          </a:ln>
+        </p:spPr>
+        <p:txBody>
+          <a:bodyPr vert="horz" lIns="91440" tIns="45720" rIns="91440" bIns="45720" rtlCol="0" anchor="ctr"/>
+          <a:lstStyle/>
+          <a:p>
+            <a:endParaRPr lang="en-US"/>
+          </a:p>
+        </p:txBody>
+      </p:sp>
+      <p:sp>
+        <p:nvSpPr>
+          <p:cNvPr id="5" name="Notes Placeholder 4"/>
+          <p:cNvSpPr>
+            <a:spLocks noGrp="1"/>
+          </p:cNvSpPr>
+          <p:nvPr>
+            <p:ph type="body" sz="quarter" idx="3"/>
+          </p:nvPr>
+        </p:nvSpPr>
+        <p:spPr>
+          <a:xfrm>
+            <a:off x="685800" y="4400550"/>
+            <a:ext cx="5486400" cy="3600450"/>
+          </a:xfrm>
+          <a:prstGeom prst="rect">
+            <a:avLst/>
+          </a:prstGeom>
+        </p:spPr>
+        <p:txBody>
+          <a:bodyPr vert="horz" lIns="91440" tIns="45720" rIns="91440" bIns="45720" rtlCol="0"/>
+          <a:lstStyle/>
+          <a:p>
+            <a:pPr lvl="0"/>
+            <a:r>
+              <a:rPr lang="en-US"/>
+              <a:t>Click to edit Master text styles</a:t>
+            </a:r>
+          </a:p>
+          <a:p>
+            <a:pPr lvl="1"/>
+            <a:r>
+              <a:rPr lang="en-US"/>
+              <a:t>Second level</a:t>
+            </a:r>
+          </a:p>
+          <a:p>
+            <a:pPr lvl="2"/>
+            <a:r>
+              <a:rPr lang="en-US"/>
+              <a:t>Third level</a:t>
+            </a:r>
+          </a:p>
+          <a:p>
+            <a:pPr lvl="3"/>
+            <a:r>
+              <a:rPr lang="en-US"/>
+              <a:t>Fourth level</a:t>
+            </a:r>
+          </a:p>
+          <a:p>
+            <a:pPr lvl="4"/>
+            <a:r>
+              <a:rPr lang="en-US"/>
+              <a:t>Fifth level</a:t>
+            </a:r>
+          </a:p>
+        </p:txBody>
+      </p:sp>
+      <p:sp>
+        <p:nvSpPr>
+          <p:cNvPr id="6" name="Footer Placeholder 5"/>
+          <p:cNvSpPr>
+            <a:spLocks noGrp="1"/>
+          </p:cNvSpPr>
+          <p:nvPr>
+            <p:ph type="ftr" sz="quarter" idx="4"/>
+          </p:nvPr>
+        </p:nvSpPr>
+        <p:spPr>
+          <a:xfrm>
+            <a:off x="0" y="8685213"/>
+            <a:ext cx="2971800" cy="458787"/>
+          </a:xfrm>
+          <a:prstGeom prst="rect">
+            <a:avLst/>
+          </a:prstGeom>
+        </p:spPr>
+        <p:txBody>
+          <a:bodyPr vert="horz" lIns="91440" tIns="45720" rIns="91440" bIns="45720" rtlCol="0" anchor="b"/>
+          <a:lstStyle>
+            <a:lvl1pPr algn="l">
+              <a:defRPr sz="1200"/>
+            </a:lvl1pPr>
+          </a:lstStyle>
+          <a:p>
+            <a:endParaRPr lang="en-US"/>
+          </a:p>
+        </p:txBody>
+      </p:sp>
+      <p:sp>
+        <p:nvSpPr>
+          <p:cNvPr id="7" name="Slide Number Placeholder 6"/>
+          <p:cNvSpPr>
+            <a:spLocks noGrp="1"/>
+          </p:cNvSpPr>
+          <p:nvPr>
+            <p:ph type="sldNum" sz="quarter" idx="5"/>
+          </p:nvPr>
+        </p:nvSpPr>
+        <p:spPr>
+          <a:xfrm>
+            <a:off x="3884613" y="8685213"/>
+            <a:ext cx="2971800" cy="458787"/>
+          </a:xfrm>
+          <a:prstGeom prst="rect">
+            <a:avLst/>
+          </a:prstGeom>
+        </p:spPr>
+        <p:txBody>
+          <a:bodyPr vert="horz" lIns="91440" tIns="45720" rIns="91440" bIns="45720" rtlCol="0" anchor="b"/>
+          <a:lstStyle>
+            <a:lvl1pPr algn="r">
+              <a:defRPr sz="1200"/>
+            </a:lvl1pPr>
+          </a:lstStyle>
+          <a:p>
+            <a:fld id="{CE5E9CC1-C706-0F49-92D6-E571CC5EEA8F}" type="slidenum">
+              <a:rPr lang="en-US"/>
+              <a:t>‹#›</a:t>
+            </a:fld>
+            <a:endParaRPr lang="en-US"/>
+          </a:p>
+        </p:txBody>
+      </p:sp>
     </p:spTree>
     <p:extLst>
       <p:ext uri="{BB962C8B-B14F-4D97-AF65-F5344CB8AC3E}">
-        <p14:creationId xmlns:p14="http://schemas.microsoft.com/office/powerpoint/2010/main" val="3834395687"/>
+        <p14:creationId xmlns:p14="http://schemas.microsoft.com/office/powerpoint/2010/main" val="1024086991"/>
       </p:ext>
     </p:extLst>
   </p:cSld>
@@ -292,6 +511,10 @@
           <a:bodyPr/>
           <a:lstStyle/>
           <a:p>
+            <a:r>
+              <a:rPr lang="en-US" dirty="0"/>
+              <a:t/>
+            </a:r>
             <a:endParaRPr lang="en-US" dirty="0"/>
           </a:p>
         </p:txBody>
@@ -376,6 +599,10 @@
           <a:bodyPr/>
           <a:lstStyle/>
           <a:p>
+            <a:r>
+              <a:rPr lang="en-US" dirty="0"/>
+              <a:t/>
+            </a:r>
             <a:endParaRPr lang="en-US" dirty="0"/>
           </a:p>
         </p:txBody>
@@ -460,6 +687,10 @@
           <a:bodyPr/>
           <a:lstStyle/>
           <a:p>
+            <a:r>
+              <a:rPr lang="en-US" dirty="0"/>
+              <a:t/>
+            </a:r>
             <a:endParaRPr lang="en-US" dirty="0"/>
           </a:p>
         </p:txBody>
@@ -544,6 +775,10 @@
           <a:bodyPr/>
           <a:lstStyle/>
           <a:p>
+            <a:r>
+              <a:rPr lang="en-US" dirty="0"/>
+              <a:t/>
+            </a:r>
             <a:endParaRPr lang="en-US" dirty="0"/>
           </a:p>
         </p:txBody>
@@ -628,6 +863,10 @@
           <a:bodyPr/>
           <a:lstStyle/>
           <a:p>
+            <a:r>
+              <a:rPr lang="en-US" dirty="0"/>
+              <a:t/>
+            </a:r>
             <a:endParaRPr lang="en-US" dirty="0"/>
           </a:p>
         </p:txBody>
@@ -712,6 +951,10 @@
           <a:bodyPr/>
           <a:lstStyle/>
           <a:p>
+            <a:r>
+              <a:rPr lang="en-US" dirty="0"/>
+              <a:t/>
+            </a:r>
             <a:endParaRPr lang="en-US" dirty="0"/>
           </a:p>
         </p:txBody>
@@ -796,6 +1039,10 @@
           <a:bodyPr/>
           <a:lstStyle/>
           <a:p>
+            <a:r>
+              <a:rPr lang="en-US" dirty="0"/>
+              <a:t/>
+            </a:r>
             <a:endParaRPr lang="en-US" dirty="0"/>
           </a:p>
         </p:txBody>
@@ -880,6 +1127,10 @@
           <a:bodyPr/>
           <a:lstStyle/>
           <a:p>
+            <a:r>
+              <a:rPr lang="en-US" dirty="0"/>
+              <a:t/>
+            </a:r>
             <a:endParaRPr lang="en-US" dirty="0"/>
           </a:p>
         </p:txBody>
@@ -964,6 +1215,10 @@
           <a:bodyPr/>
           <a:lstStyle/>
           <a:p>
+            <a:r>
+              <a:rPr lang="en-US" dirty="0"/>
+              <a:t/>
+            </a:r>
             <a:endParaRPr lang="en-US" dirty="0"/>
           </a:p>
         </p:txBody>
@@ -1048,6 +1303,10 @@
           <a:bodyPr/>
           <a:lstStyle/>
           <a:p>
+            <a:r>
+              <a:rPr lang="en-US" dirty="0"/>
+              <a:t/>
+            </a:r>
             <a:endParaRPr lang="en-US" dirty="0"/>
           </a:p>
         </p:txBody>
@@ -1132,6 +1391,10 @@
           <a:bodyPr/>
           <a:lstStyle/>
           <a:p>
+            <a:r>
+              <a:rPr lang="en-US" dirty="0"/>
+              <a:t/>
+            </a:r>
             <a:endParaRPr lang="en-US" dirty="0"/>
           </a:p>
         </p:txBody>
@@ -1216,6 +1479,10 @@
           <a:bodyPr/>
           <a:lstStyle/>
           <a:p>
+            <a:r>
+              <a:rPr lang="en-US" dirty="0"/>
+              <a:t/>
+            </a:r>
             <a:endParaRPr lang="en-US" dirty="0"/>
           </a:p>
         </p:txBody>
@@ -1289,11 +1556,6 @@
 <file path=ppt/slideMasters/slideMaster1.xml><?xml version="1.0" encoding="utf-8"?>
 <p:sldMaster xmlns:a="http://schemas.openxmlformats.org/drawingml/2006/main" xmlns:r="http://schemas.openxmlformats.org/officeDocument/2006/relationships" xmlns:p="http://schemas.openxmlformats.org/presentationml/2006/main">
   <p:cSld>
-    <p:bg>
-      <p:bgRef idx="1001">
-        <a:schemeClr val="bg1"/>
-      </p:bgRef>
-    </p:bg>
     <p:spTree>
       <p:nvGrpSpPr>
         <p:cNvPr id="1" name=""/>
@@ -1576,7 +1838,6 @@
         <a:solidFill>
           <a:srgbClr val="0A2647"/>
         </a:solidFill>
-        <a:effectLst/>
       </p:bgPr>
     </p:bg>
     <p:spTree>
@@ -1812,11 +2073,11 @@
           <a:bodyPr wrap="square" lIns="0" tIns="0" rIns="0" bIns="0" rtlCol="0" anchor="ctr"/>
           <a:lstStyle/>
           <a:p>
-            <a:pPr marL="0" indent="0">
-              <a:buNone/>
-            </a:pPr>
-            <a:r>
-              <a:rPr lang="en-US" sz="1300" b="1" kern="0" spc="220" dirty="0">
+            <a:pPr indent="0" marL="0">
+              <a:buNone/>
+            </a:pPr>
+            <a:r>
+              <a:rPr lang="en-US" sz="1300" b="1" spc="220" kern="0" dirty="0">
                 <a:solidFill>
                   <a:srgbClr val="00D9A0"/>
                 </a:solidFill>
@@ -1851,7 +2112,7 @@
           <a:bodyPr wrap="square" lIns="0" tIns="0" rIns="0" bIns="0" rtlCol="0" anchor="ctr"/>
           <a:lstStyle/>
           <a:p>
-            <a:pPr marL="0" indent="0">
+            <a:pPr indent="0" marL="0">
               <a:buNone/>
             </a:pPr>
             <a:r>
@@ -1890,7 +2151,7 @@
           <a:bodyPr wrap="square" lIns="0" tIns="0" rIns="0" bIns="0" rtlCol="0" anchor="ctr"/>
           <a:lstStyle/>
           <a:p>
-            <a:pPr marL="0" indent="0">
+            <a:pPr indent="0" marL="0">
               <a:lnSpc>
                 <a:spcPct val="120000"/>
               </a:lnSpc>
@@ -1910,7 +2171,7 @@
             <a:endParaRPr lang="en-US" sz="1800" dirty="0"/>
           </a:p>
           <a:p>
-            <a:pPr marL="0" indent="0">
+            <a:pPr indent="0" marL="0">
               <a:lnSpc>
                 <a:spcPct val="120000"/>
               </a:lnSpc>
@@ -1975,7 +2236,7 @@
           <a:bodyPr wrap="square" lIns="0" tIns="0" rIns="0" bIns="0" rtlCol="0" anchor="ctr"/>
           <a:lstStyle/>
           <a:p>
-            <a:pPr marL="0" indent="0">
+            <a:pPr indent="0" marL="0">
               <a:buNone/>
             </a:pPr>
             <a:r>
@@ -2014,7 +2275,7 @@
           <a:bodyPr wrap="square" lIns="0" tIns="0" rIns="0" bIns="0" rtlCol="0" anchor="ctr"/>
           <a:lstStyle/>
           <a:p>
-            <a:pPr marL="0" indent="0">
+            <a:pPr indent="0" marL="0">
               <a:buNone/>
             </a:pPr>
             <a:r>
@@ -2053,7 +2314,7 @@
           <a:bodyPr wrap="square" lIns="0" tIns="0" rIns="0" bIns="0" rtlCol="0" anchor="ctr"/>
           <a:lstStyle/>
           <a:p>
-            <a:pPr marL="0" indent="0">
+            <a:pPr indent="0" marL="0">
               <a:buNone/>
             </a:pPr>
             <a:r>
@@ -2092,7 +2353,7 @@
           <a:bodyPr wrap="square" lIns="0" tIns="0" rIns="0" bIns="0" rtlCol="0" anchor="ctr"/>
           <a:lstStyle/>
           <a:p>
-            <a:pPr marL="0" indent="0">
+            <a:pPr indent="0" marL="0">
               <a:buNone/>
             </a:pPr>
             <a:r>
@@ -2131,7 +2392,7 @@
           <a:bodyPr wrap="square" lIns="0" tIns="0" rIns="0" bIns="0" rtlCol="0" anchor="ctr"/>
           <a:lstStyle/>
           <a:p>
-            <a:pPr marL="0" indent="0">
+            <a:pPr indent="0" marL="0">
               <a:buNone/>
             </a:pPr>
             <a:r>
@@ -2170,7 +2431,7 @@
           <a:bodyPr wrap="square" lIns="0" tIns="0" rIns="0" bIns="0" rtlCol="0" anchor="ctr"/>
           <a:lstStyle/>
           <a:p>
-            <a:pPr marL="0" indent="0">
+            <a:pPr indent="0" marL="0">
               <a:buNone/>
             </a:pPr>
             <a:r>
@@ -2209,7 +2470,7 @@
           <a:bodyPr wrap="square" rtlCol="0" anchor="ctr"/>
           <a:lstStyle/>
           <a:p>
-            <a:pPr marL="0" indent="0" algn="l">
+            <a:pPr algn="l" indent="0" marL="0">
               <a:buNone/>
             </a:pPr>
             <a:r>
@@ -2248,7 +2509,7 @@
           <a:bodyPr wrap="square" rtlCol="0" anchor="ctr"/>
           <a:lstStyle/>
           <a:p>
-            <a:pPr marL="0" indent="0" algn="r">
+            <a:pPr algn="r" indent="0" marL="0">
               <a:buNone/>
             </a:pPr>
             <a:r>
@@ -2263,107 +2524,6 @@
               <a:t>Slide 0</a:t>
             </a:r>
             <a:endParaRPr lang="en-US" sz="900" dirty="0"/>
-          </a:p>
-        </p:txBody>
-      </p:sp>
-      <p:sp>
-        <p:nvSpPr>
-          <p:cNvPr id="23" name="Text 17">
-            <a:extLst>
-              <a:ext uri="{FF2B5EF4-FFF2-40B4-BE49-F238E27FC236}">
-                <a16:creationId xmlns:a16="http://schemas.microsoft.com/office/drawing/2014/main" id="{7FBAE37E-FFC0-5CA2-B9FF-0115D5F73832}"/>
-              </a:ext>
-            </a:extLst>
-          </p:cNvPr>
-          <p:cNvSpPr/>
-          <p:nvPr/>
-        </p:nvSpPr>
-        <p:spPr>
-          <a:xfrm>
-            <a:off x="502920" y="5404104"/>
-            <a:ext cx="2103120" cy="292608"/>
-          </a:xfrm>
-          <a:prstGeom prst="rect">
-            <a:avLst/>
-          </a:prstGeom>
-          <a:noFill/>
-          <a:ln/>
-        </p:spPr>
-        <p:txBody>
-          <a:bodyPr wrap="square" lIns="0" tIns="0" rIns="0" bIns="0" rtlCol="0" anchor="ctr"/>
-          <a:lstStyle/>
-          <a:p>
-            <a:pPr marL="0" indent="0">
-              <a:buNone/>
-            </a:pPr>
-            <a:r>
-              <a:rPr lang="en-US" sz="1000" b="1" dirty="0">
-                <a:solidFill>
-                  <a:srgbClr val="00B4D8"/>
-                </a:solidFill>
-                <a:latin typeface="Calibri" pitchFamily="34" charset="0"/>
-                <a:ea typeface="Calibri" pitchFamily="34" charset="-122"/>
-                <a:cs typeface="Calibri" pitchFamily="34" charset="-120"/>
-              </a:rPr>
-              <a:t>PRESENTER</a:t>
-            </a:r>
-            <a:endParaRPr lang="en-US" sz="1000" dirty="0"/>
-          </a:p>
-        </p:txBody>
-      </p:sp>
-      <p:sp>
-        <p:nvSpPr>
-          <p:cNvPr id="24" name="Text 18">
-            <a:extLst>
-              <a:ext uri="{FF2B5EF4-FFF2-40B4-BE49-F238E27FC236}">
-                <a16:creationId xmlns:a16="http://schemas.microsoft.com/office/drawing/2014/main" id="{AFA93EA0-F856-0F2A-A0A5-47D04FB3A5BB}"/>
-              </a:ext>
-            </a:extLst>
-          </p:cNvPr>
-          <p:cNvSpPr/>
-          <p:nvPr/>
-        </p:nvSpPr>
-        <p:spPr>
-          <a:xfrm>
-            <a:off x="2697480" y="5397171"/>
-            <a:ext cx="8046720" cy="292608"/>
-          </a:xfrm>
-          <a:prstGeom prst="rect">
-            <a:avLst/>
-          </a:prstGeom>
-          <a:noFill/>
-          <a:ln/>
-        </p:spPr>
-        <p:txBody>
-          <a:bodyPr wrap="square" lIns="0" tIns="0" rIns="0" bIns="0" rtlCol="0" anchor="ctr"/>
-          <a:lstStyle/>
-          <a:p>
-            <a:pPr marL="0" indent="0">
-              <a:buNone/>
-            </a:pPr>
-            <a:r>
-              <a:rPr lang="en-US" sz="1200" dirty="0">
-                <a:solidFill>
-                  <a:srgbClr val="FFFFFF"/>
-                </a:solidFill>
-                <a:latin typeface="Calibri" pitchFamily="34" charset="0"/>
-                <a:ea typeface="Calibri" pitchFamily="34" charset="-122"/>
-                <a:cs typeface="Calibri" pitchFamily="34" charset="-120"/>
-              </a:rPr>
-              <a:t>Shreyan Nayak </a:t>
-            </a:r>
-            <a:r>
-              <a:rPr lang="en-US" sz="1200" i="1" dirty="0">
-                <a:solidFill>
-                  <a:srgbClr val="FFFFFF"/>
-                </a:solidFill>
-                <a:latin typeface="Calibri" pitchFamily="34" charset="0"/>
-                <a:ea typeface="Calibri" pitchFamily="34" charset="-122"/>
-                <a:cs typeface="Calibri" pitchFamily="34" charset="-120"/>
-              </a:rPr>
-              <a:t>23BKT0039</a:t>
-            </a:r>
-            <a:endParaRPr lang="en-US" sz="1200" dirty="0"/>
           </a:p>
         </p:txBody>
       </p:sp>
@@ -2383,7 +2543,6 @@
         <a:solidFill>
           <a:srgbClr val="FFFFFF"/>
         </a:solidFill>
-        <a:effectLst/>
       </p:bgPr>
     </p:bg>
     <p:spTree>
@@ -2421,11 +2580,11 @@
           <a:bodyPr wrap="square" lIns="0" tIns="0" rIns="0" bIns="0" rtlCol="0" anchor="ctr"/>
           <a:lstStyle/>
           <a:p>
-            <a:pPr marL="0" indent="0">
-              <a:buNone/>
-            </a:pPr>
-            <a:r>
-              <a:rPr lang="en-US" sz="1100" b="1" kern="0" spc="150" dirty="0">
+            <a:pPr indent="0" marL="0">
+              <a:buNone/>
+            </a:pPr>
+            <a:r>
+              <a:rPr lang="en-US" sz="1100" b="1" spc="150" kern="0" dirty="0">
                 <a:solidFill>
                   <a:srgbClr val="2C74B3"/>
                 </a:solidFill>
@@ -2460,7 +2619,7 @@
           <a:bodyPr wrap="square" lIns="0" tIns="0" rIns="0" bIns="0" rtlCol="0" anchor="ctr"/>
           <a:lstStyle/>
           <a:p>
-            <a:pPr marL="0" indent="0">
+            <a:pPr indent="0" marL="0">
               <a:buNone/>
             </a:pPr>
             <a:r>
@@ -2490,7 +2649,9 @@
             <a:ext cx="11183112" cy="914400"/>
           </a:xfrm>
           <a:prstGeom prst="rect">
-            <a:avLst/>
+            <a:avLst>
+              <a:gd name="adj" fmla="val 8000"/>
+            </a:avLst>
           </a:prstGeom>
           <a:solidFill>
             <a:srgbClr val="F8FAFC"/>
@@ -2515,7 +2676,9 @@
             <a:ext cx="1005840" cy="640080"/>
           </a:xfrm>
           <a:prstGeom prst="rect">
-            <a:avLst/>
+            <a:avLst>
+              <a:gd name="adj" fmla="val 7143"/>
+            </a:avLst>
           </a:prstGeom>
           <a:solidFill>
             <a:srgbClr val="0A2647"/>
@@ -2544,7 +2707,7 @@
           <a:bodyPr wrap="square" lIns="0" tIns="0" rIns="0" bIns="0" rtlCol="0" anchor="ctr"/>
           <a:lstStyle/>
           <a:p>
-            <a:pPr marL="0" indent="0" algn="ctr">
+            <a:pPr algn="ctr" indent="0" marL="0">
               <a:buNone/>
             </a:pPr>
             <a:r>
@@ -2583,7 +2746,7 @@
           <a:bodyPr wrap="square" lIns="0" tIns="0" rIns="0" bIns="0" rtlCol="0" anchor="ctr"/>
           <a:lstStyle/>
           <a:p>
-            <a:pPr marL="0" indent="0">
+            <a:pPr indent="0" marL="0">
               <a:buNone/>
             </a:pPr>
             <a:r>
@@ -2622,7 +2785,7 @@
           <a:bodyPr wrap="square" lIns="0" tIns="0" rIns="0" bIns="0" rtlCol="0" anchor="ctr"/>
           <a:lstStyle/>
           <a:p>
-            <a:pPr marL="0" indent="0" algn="r">
+            <a:pPr algn="r" indent="0" marL="0">
               <a:buNone/>
             </a:pPr>
             <a:r>
@@ -2661,7 +2824,7 @@
           <a:bodyPr wrap="square" lIns="0" tIns="0" rIns="0" bIns="0" rtlCol="0" anchor="ctr"/>
           <a:lstStyle/>
           <a:p>
-            <a:pPr marL="0" indent="0">
+            <a:pPr indent="0" marL="0">
               <a:lnSpc>
                 <a:spcPct val="115000"/>
               </a:lnSpc>
@@ -2694,7 +2857,9 @@
             <a:ext cx="11183112" cy="914400"/>
           </a:xfrm>
           <a:prstGeom prst="rect">
-            <a:avLst/>
+            <a:avLst>
+              <a:gd name="adj" fmla="val 8000"/>
+            </a:avLst>
           </a:prstGeom>
           <a:solidFill>
             <a:srgbClr val="F8FAFC"/>
@@ -2719,7 +2884,9 @@
             <a:ext cx="1005840" cy="640080"/>
           </a:xfrm>
           <a:prstGeom prst="rect">
-            <a:avLst/>
+            <a:avLst>
+              <a:gd name="adj" fmla="val 7143"/>
+            </a:avLst>
           </a:prstGeom>
           <a:solidFill>
             <a:srgbClr val="2C74B3"/>
@@ -2748,7 +2915,7 @@
           <a:bodyPr wrap="square" lIns="0" tIns="0" rIns="0" bIns="0" rtlCol="0" anchor="ctr"/>
           <a:lstStyle/>
           <a:p>
-            <a:pPr marL="0" indent="0" algn="ctr">
+            <a:pPr algn="ctr" indent="0" marL="0">
               <a:buNone/>
             </a:pPr>
             <a:r>
@@ -2787,7 +2954,7 @@
           <a:bodyPr wrap="square" lIns="0" tIns="0" rIns="0" bIns="0" rtlCol="0" anchor="ctr"/>
           <a:lstStyle/>
           <a:p>
-            <a:pPr marL="0" indent="0">
+            <a:pPr indent="0" marL="0">
               <a:buNone/>
             </a:pPr>
             <a:r>
@@ -2826,7 +2993,7 @@
           <a:bodyPr wrap="square" lIns="0" tIns="0" rIns="0" bIns="0" rtlCol="0" anchor="ctr"/>
           <a:lstStyle/>
           <a:p>
-            <a:pPr marL="0" indent="0" algn="r">
+            <a:pPr algn="r" indent="0" marL="0">
               <a:buNone/>
             </a:pPr>
             <a:r>
@@ -2865,7 +3032,7 @@
           <a:bodyPr wrap="square" lIns="0" tIns="0" rIns="0" bIns="0" rtlCol="0" anchor="ctr"/>
           <a:lstStyle/>
           <a:p>
-            <a:pPr marL="0" indent="0">
+            <a:pPr indent="0" marL="0">
               <a:lnSpc>
                 <a:spcPct val="115000"/>
               </a:lnSpc>
@@ -2898,7 +3065,9 @@
             <a:ext cx="11183112" cy="914400"/>
           </a:xfrm>
           <a:prstGeom prst="rect">
-            <a:avLst/>
+            <a:avLst>
+              <a:gd name="adj" fmla="val 8000"/>
+            </a:avLst>
           </a:prstGeom>
           <a:solidFill>
             <a:srgbClr val="F8FAFC"/>
@@ -2923,7 +3092,9 @@
             <a:ext cx="1005840" cy="640080"/>
           </a:xfrm>
           <a:prstGeom prst="rect">
-            <a:avLst/>
+            <a:avLst>
+              <a:gd name="adj" fmla="val 7143"/>
+            </a:avLst>
           </a:prstGeom>
           <a:solidFill>
             <a:srgbClr val="0D9488"/>
@@ -2952,7 +3123,7 @@
           <a:bodyPr wrap="square" lIns="0" tIns="0" rIns="0" bIns="0" rtlCol="0" anchor="ctr"/>
           <a:lstStyle/>
           <a:p>
-            <a:pPr marL="0" indent="0" algn="ctr">
+            <a:pPr algn="ctr" indent="0" marL="0">
               <a:buNone/>
             </a:pPr>
             <a:r>
@@ -2991,7 +3162,7 @@
           <a:bodyPr wrap="square" lIns="0" tIns="0" rIns="0" bIns="0" rtlCol="0" anchor="ctr"/>
           <a:lstStyle/>
           <a:p>
-            <a:pPr marL="0" indent="0">
+            <a:pPr indent="0" marL="0">
               <a:buNone/>
             </a:pPr>
             <a:r>
@@ -3030,7 +3201,7 @@
           <a:bodyPr wrap="square" lIns="0" tIns="0" rIns="0" bIns="0" rtlCol="0" anchor="ctr"/>
           <a:lstStyle/>
           <a:p>
-            <a:pPr marL="0" indent="0" algn="r">
+            <a:pPr algn="r" indent="0" marL="0">
               <a:buNone/>
             </a:pPr>
             <a:r>
@@ -3069,7 +3240,7 @@
           <a:bodyPr wrap="square" lIns="0" tIns="0" rIns="0" bIns="0" rtlCol="0" anchor="ctr"/>
           <a:lstStyle/>
           <a:p>
-            <a:pPr marL="0" indent="0">
+            <a:pPr indent="0" marL="0">
               <a:lnSpc>
                 <a:spcPct val="115000"/>
               </a:lnSpc>
@@ -3102,7 +3273,9 @@
             <a:ext cx="11183112" cy="914400"/>
           </a:xfrm>
           <a:prstGeom prst="rect">
-            <a:avLst/>
+            <a:avLst>
+              <a:gd name="adj" fmla="val 8000"/>
+            </a:avLst>
           </a:prstGeom>
           <a:solidFill>
             <a:srgbClr val="F8FAFC"/>
@@ -3127,7 +3300,9 @@
             <a:ext cx="1005840" cy="640080"/>
           </a:xfrm>
           <a:prstGeom prst="rect">
-            <a:avLst/>
+            <a:avLst>
+              <a:gd name="adj" fmla="val 7143"/>
+            </a:avLst>
           </a:prstGeom>
           <a:solidFill>
             <a:srgbClr val="475569"/>
@@ -3156,7 +3331,7 @@
           <a:bodyPr wrap="square" lIns="0" tIns="0" rIns="0" bIns="0" rtlCol="0" anchor="ctr"/>
           <a:lstStyle/>
           <a:p>
-            <a:pPr marL="0" indent="0" algn="ctr">
+            <a:pPr algn="ctr" indent="0" marL="0">
               <a:buNone/>
             </a:pPr>
             <a:r>
@@ -3195,7 +3370,7 @@
           <a:bodyPr wrap="square" lIns="0" tIns="0" rIns="0" bIns="0" rtlCol="0" anchor="ctr"/>
           <a:lstStyle/>
           <a:p>
-            <a:pPr marL="0" indent="0">
+            <a:pPr indent="0" marL="0">
               <a:buNone/>
             </a:pPr>
             <a:r>
@@ -3234,7 +3409,7 @@
           <a:bodyPr wrap="square" lIns="0" tIns="0" rIns="0" bIns="0" rtlCol="0" anchor="ctr"/>
           <a:lstStyle/>
           <a:p>
-            <a:pPr marL="0" indent="0" algn="r">
+            <a:pPr algn="r" indent="0" marL="0">
               <a:buNone/>
             </a:pPr>
             <a:r>
@@ -3273,7 +3448,7 @@
           <a:bodyPr wrap="square" lIns="0" tIns="0" rIns="0" bIns="0" rtlCol="0" anchor="ctr"/>
           <a:lstStyle/>
           <a:p>
-            <a:pPr marL="0" indent="0">
+            <a:pPr indent="0" marL="0">
               <a:lnSpc>
                 <a:spcPct val="115000"/>
               </a:lnSpc>
@@ -3306,7 +3481,9 @@
             <a:ext cx="11183112" cy="914400"/>
           </a:xfrm>
           <a:prstGeom prst="rect">
-            <a:avLst/>
+            <a:avLst>
+              <a:gd name="adj" fmla="val 8000"/>
+            </a:avLst>
           </a:prstGeom>
           <a:solidFill>
             <a:srgbClr val="F8FAFC"/>
@@ -3331,7 +3508,9 @@
             <a:ext cx="1005840" cy="640080"/>
           </a:xfrm>
           <a:prstGeom prst="rect">
-            <a:avLst/>
+            <a:avLst>
+              <a:gd name="adj" fmla="val 7143"/>
+            </a:avLst>
           </a:prstGeom>
           <a:solidFill>
             <a:srgbClr val="133B5C"/>
@@ -3360,7 +3539,7 @@
           <a:bodyPr wrap="square" lIns="0" tIns="0" rIns="0" bIns="0" rtlCol="0" anchor="ctr"/>
           <a:lstStyle/>
           <a:p>
-            <a:pPr marL="0" indent="0" algn="ctr">
+            <a:pPr algn="ctr" indent="0" marL="0">
               <a:buNone/>
             </a:pPr>
             <a:r>
@@ -3399,7 +3578,7 @@
           <a:bodyPr wrap="square" lIns="0" tIns="0" rIns="0" bIns="0" rtlCol="0" anchor="ctr"/>
           <a:lstStyle/>
           <a:p>
-            <a:pPr marL="0" indent="0">
+            <a:pPr indent="0" marL="0">
               <a:buNone/>
             </a:pPr>
             <a:r>
@@ -3438,7 +3617,7 @@
           <a:bodyPr wrap="square" lIns="0" tIns="0" rIns="0" bIns="0" rtlCol="0" anchor="ctr"/>
           <a:lstStyle/>
           <a:p>
-            <a:pPr marL="0" indent="0" algn="r">
+            <a:pPr algn="r" indent="0" marL="0">
               <a:buNone/>
             </a:pPr>
             <a:r>
@@ -3477,7 +3656,7 @@
           <a:bodyPr wrap="square" lIns="0" tIns="0" rIns="0" bIns="0" rtlCol="0" anchor="ctr"/>
           <a:lstStyle/>
           <a:p>
-            <a:pPr marL="0" indent="0">
+            <a:pPr indent="0" marL="0">
               <a:lnSpc>
                 <a:spcPct val="115000"/>
               </a:lnSpc>
@@ -3519,7 +3698,7 @@
           <a:bodyPr wrap="square" rtlCol="0" anchor="ctr"/>
           <a:lstStyle/>
           <a:p>
-            <a:pPr marL="0" indent="0" algn="l">
+            <a:pPr algn="l" indent="0" marL="0">
               <a:buNone/>
             </a:pPr>
             <a:r>
@@ -3558,7 +3737,7 @@
           <a:bodyPr wrap="square" rtlCol="0" anchor="ctr"/>
           <a:lstStyle/>
           <a:p>
-            <a:pPr marL="0" indent="0" algn="r">
+            <a:pPr algn="r" indent="0" marL="0">
               <a:buNone/>
             </a:pPr>
             <a:r>
@@ -3592,7 +3771,6 @@
         <a:solidFill>
           <a:srgbClr val="FFFFFF"/>
         </a:solidFill>
-        <a:effectLst/>
       </p:bgPr>
     </p:bg>
     <p:spTree>
@@ -3630,11 +3808,11 @@
           <a:bodyPr wrap="square" lIns="0" tIns="0" rIns="0" bIns="0" rtlCol="0" anchor="ctr"/>
           <a:lstStyle/>
           <a:p>
-            <a:pPr marL="0" indent="0">
-              <a:buNone/>
-            </a:pPr>
-            <a:r>
-              <a:rPr lang="en-US" sz="1100" b="1" kern="0" spc="150" dirty="0">
+            <a:pPr indent="0" marL="0">
+              <a:buNone/>
+            </a:pPr>
+            <a:r>
+              <a:rPr lang="en-US" sz="1100" b="1" spc="150" kern="0" dirty="0">
                 <a:solidFill>
                   <a:srgbClr val="2C74B3"/>
                 </a:solidFill>
@@ -3669,7 +3847,7 @@
           <a:bodyPr wrap="square" lIns="0" tIns="0" rIns="0" bIns="0" rtlCol="0" anchor="ctr"/>
           <a:lstStyle/>
           <a:p>
-            <a:pPr marL="0" indent="0">
+            <a:pPr indent="0" marL="0">
               <a:buNone/>
             </a:pPr>
             <a:r>
@@ -3699,7 +3877,9 @@
             <a:ext cx="6217920" cy="4846320"/>
           </a:xfrm>
           <a:prstGeom prst="rect">
-            <a:avLst/>
+            <a:avLst>
+              <a:gd name="adj" fmla="val 1509"/>
+            </a:avLst>
           </a:prstGeom>
           <a:solidFill>
             <a:srgbClr val="F8FAFC"/>
@@ -3733,7 +3913,7 @@
           <a:bodyPr wrap="square" lIns="0" tIns="0" rIns="0" bIns="0" rtlCol="0" anchor="ctr"/>
           <a:lstStyle/>
           <a:p>
-            <a:pPr marL="0" indent="0">
+            <a:pPr indent="0" marL="0">
               <a:buNone/>
             </a:pPr>
             <a:r>
@@ -3772,7 +3952,7 @@
           <a:bodyPr wrap="square" lIns="0" tIns="0" rIns="0" bIns="0" rtlCol="0" anchor="ctr"/>
           <a:lstStyle/>
           <a:p>
-            <a:pPr marL="0" indent="0">
+            <a:pPr indent="0" marL="0">
               <a:buNone/>
             </a:pPr>
             <a:r>
@@ -3831,7 +4011,7 @@
           <a:bodyPr wrap="square" lIns="0" tIns="0" rIns="0" bIns="0" rtlCol="0" anchor="ctr"/>
           <a:lstStyle/>
           <a:p>
-            <a:pPr marL="0" indent="0" algn="ctr">
+            <a:pPr algn="ctr" indent="0" marL="0">
               <a:buNone/>
             </a:pPr>
             <a:r>
@@ -3870,7 +4050,7 @@
           <a:bodyPr wrap="square" lIns="0" tIns="0" rIns="0" bIns="0" rtlCol="0" anchor="ctr"/>
           <a:lstStyle/>
           <a:p>
-            <a:pPr marL="0" indent="0">
+            <a:pPr indent="0" marL="0">
               <a:buNone/>
             </a:pPr>
             <a:r>
@@ -3909,7 +4089,7 @@
           <a:bodyPr wrap="square" lIns="0" tIns="0" rIns="0" bIns="0" rtlCol="0" anchor="ctr"/>
           <a:lstStyle/>
           <a:p>
-            <a:pPr marL="0" indent="0">
+            <a:pPr indent="0" marL="0">
               <a:buNone/>
             </a:pPr>
             <a:r>
@@ -3968,7 +4148,7 @@
           <a:bodyPr wrap="square" lIns="0" tIns="0" rIns="0" bIns="0" rtlCol="0" anchor="ctr"/>
           <a:lstStyle/>
           <a:p>
-            <a:pPr marL="0" indent="0" algn="ctr">
+            <a:pPr algn="ctr" indent="0" marL="0">
               <a:buNone/>
             </a:pPr>
             <a:r>
@@ -4007,7 +4187,7 @@
           <a:bodyPr wrap="square" lIns="0" tIns="0" rIns="0" bIns="0" rtlCol="0" anchor="ctr"/>
           <a:lstStyle/>
           <a:p>
-            <a:pPr marL="0" indent="0">
+            <a:pPr indent="0" marL="0">
               <a:buNone/>
             </a:pPr>
             <a:r>
@@ -4046,7 +4226,7 @@
           <a:bodyPr wrap="square" lIns="0" tIns="0" rIns="0" bIns="0" rtlCol="0" anchor="ctr"/>
           <a:lstStyle/>
           <a:p>
-            <a:pPr marL="0" indent="0">
+            <a:pPr indent="0" marL="0">
               <a:buNone/>
             </a:pPr>
             <a:r>
@@ -4105,7 +4285,7 @@
           <a:bodyPr wrap="square" lIns="0" tIns="0" rIns="0" bIns="0" rtlCol="0" anchor="ctr"/>
           <a:lstStyle/>
           <a:p>
-            <a:pPr marL="0" indent="0" algn="ctr">
+            <a:pPr algn="ctr" indent="0" marL="0">
               <a:buNone/>
             </a:pPr>
             <a:r>
@@ -4144,7 +4324,7 @@
           <a:bodyPr wrap="square" lIns="0" tIns="0" rIns="0" bIns="0" rtlCol="0" anchor="ctr"/>
           <a:lstStyle/>
           <a:p>
-            <a:pPr marL="0" indent="0">
+            <a:pPr indent="0" marL="0">
               <a:buNone/>
             </a:pPr>
             <a:r>
@@ -4183,7 +4363,7 @@
           <a:bodyPr wrap="square" lIns="0" tIns="0" rIns="0" bIns="0" rtlCol="0" anchor="ctr"/>
           <a:lstStyle/>
           <a:p>
-            <a:pPr marL="0" indent="0">
+            <a:pPr indent="0" marL="0">
               <a:buNone/>
             </a:pPr>
             <a:r>
@@ -4242,7 +4422,7 @@
           <a:bodyPr wrap="square" lIns="0" tIns="0" rIns="0" bIns="0" rtlCol="0" anchor="ctr"/>
           <a:lstStyle/>
           <a:p>
-            <a:pPr marL="0" indent="0" algn="ctr">
+            <a:pPr algn="ctr" indent="0" marL="0">
               <a:buNone/>
             </a:pPr>
             <a:r>
@@ -4281,7 +4461,7 @@
           <a:bodyPr wrap="square" lIns="0" tIns="0" rIns="0" bIns="0" rtlCol="0" anchor="ctr"/>
           <a:lstStyle/>
           <a:p>
-            <a:pPr marL="0" indent="0">
+            <a:pPr indent="0" marL="0">
               <a:buNone/>
             </a:pPr>
             <a:r>
@@ -4320,7 +4500,7 @@
           <a:bodyPr wrap="square" lIns="0" tIns="0" rIns="0" bIns="0" rtlCol="0" anchor="ctr"/>
           <a:lstStyle/>
           <a:p>
-            <a:pPr marL="0" indent="0">
+            <a:pPr indent="0" marL="0">
               <a:buNone/>
             </a:pPr>
             <a:r>
@@ -4379,7 +4559,7 @@
           <a:bodyPr wrap="square" lIns="0" tIns="0" rIns="0" bIns="0" rtlCol="0" anchor="ctr"/>
           <a:lstStyle/>
           <a:p>
-            <a:pPr marL="0" indent="0" algn="ctr">
+            <a:pPr algn="ctr" indent="0" marL="0">
               <a:buNone/>
             </a:pPr>
             <a:r>
@@ -4418,7 +4598,7 @@
           <a:bodyPr wrap="square" lIns="0" tIns="0" rIns="0" bIns="0" rtlCol="0" anchor="ctr"/>
           <a:lstStyle/>
           <a:p>
-            <a:pPr marL="0" indent="0">
+            <a:pPr indent="0" marL="0">
               <a:buNone/>
             </a:pPr>
             <a:r>
@@ -4457,7 +4637,7 @@
           <a:bodyPr wrap="square" lIns="0" tIns="0" rIns="0" bIns="0" rtlCol="0" anchor="ctr"/>
           <a:lstStyle/>
           <a:p>
-            <a:pPr marL="0" indent="0">
+            <a:pPr indent="0" marL="0">
               <a:buNone/>
             </a:pPr>
             <a:r>
@@ -4516,7 +4696,7 @@
           <a:bodyPr wrap="square" lIns="0" tIns="0" rIns="0" bIns="0" rtlCol="0" anchor="ctr"/>
           <a:lstStyle/>
           <a:p>
-            <a:pPr marL="0" indent="0" algn="ctr">
+            <a:pPr algn="ctr" indent="0" marL="0">
               <a:buNone/>
             </a:pPr>
             <a:r>
@@ -4555,7 +4735,7 @@
           <a:bodyPr wrap="square" lIns="0" tIns="0" rIns="0" bIns="0" rtlCol="0" anchor="ctr"/>
           <a:lstStyle/>
           <a:p>
-            <a:pPr marL="0" indent="0">
+            <a:pPr indent="0" marL="0">
               <a:buNone/>
             </a:pPr>
             <a:r>
@@ -4594,7 +4774,7 @@
           <a:bodyPr wrap="square" lIns="0" tIns="0" rIns="0" bIns="0" rtlCol="0" anchor="ctr"/>
           <a:lstStyle/>
           <a:p>
-            <a:pPr marL="0" indent="0">
+            <a:pPr indent="0" marL="0">
               <a:buNone/>
             </a:pPr>
             <a:r>
@@ -4624,7 +4804,9 @@
             <a:ext cx="4690872" cy="4846320"/>
           </a:xfrm>
           <a:prstGeom prst="rect">
-            <a:avLst/>
+            <a:avLst>
+              <a:gd name="adj" fmla="val 1559"/>
+            </a:avLst>
           </a:prstGeom>
           <a:solidFill>
             <a:srgbClr val="0A2647"/>
@@ -4653,7 +4835,7 @@
           <a:bodyPr wrap="square" lIns="0" tIns="0" rIns="0" bIns="0" rtlCol="0" anchor="ctr"/>
           <a:lstStyle/>
           <a:p>
-            <a:pPr marL="0" indent="0">
+            <a:pPr indent="0" marL="0">
               <a:buNone/>
             </a:pPr>
             <a:r>
@@ -4692,7 +4874,7 @@
           <a:bodyPr wrap="square" lIns="0" tIns="0" rIns="0" bIns="0" rtlCol="0" anchor="ctr"/>
           <a:lstStyle/>
           <a:p>
-            <a:pPr marL="0" indent="0">
+            <a:pPr indent="0" marL="0">
               <a:buNone/>
             </a:pPr>
             <a:r>
@@ -4722,7 +4904,9 @@
             <a:ext cx="4233672" cy="841248"/>
           </a:xfrm>
           <a:prstGeom prst="rect">
-            <a:avLst/>
+            <a:avLst>
+              <a:gd name="adj" fmla="val 8696"/>
+            </a:avLst>
           </a:prstGeom>
           <a:solidFill>
             <a:srgbClr val="133B5C"/>
@@ -4756,7 +4940,7 @@
           <a:bodyPr wrap="square" lIns="0" tIns="0" rIns="0" bIns="0" rtlCol="0" anchor="ctr"/>
           <a:lstStyle/>
           <a:p>
-            <a:pPr marL="0" indent="0">
+            <a:pPr indent="0" marL="0">
               <a:buNone/>
             </a:pPr>
             <a:r>
@@ -4795,7 +4979,7 @@
           <a:bodyPr wrap="square" lIns="0" tIns="0" rIns="0" bIns="0" rtlCol="0" anchor="ctr"/>
           <a:lstStyle/>
           <a:p>
-            <a:pPr marL="0" indent="0" algn="r">
+            <a:pPr algn="r" indent="0" marL="0">
               <a:buNone/>
             </a:pPr>
             <a:r>
@@ -4834,7 +5018,7 @@
           <a:bodyPr wrap="square" lIns="0" tIns="0" rIns="0" bIns="0" rtlCol="0" anchor="ctr"/>
           <a:lstStyle/>
           <a:p>
-            <a:pPr marL="0" indent="0">
+            <a:pPr indent="0" marL="0">
               <a:lnSpc>
                 <a:spcPct val="110000"/>
               </a:lnSpc>
@@ -4867,7 +5051,9 @@
             <a:ext cx="4233672" cy="841248"/>
           </a:xfrm>
           <a:prstGeom prst="rect">
-            <a:avLst/>
+            <a:avLst>
+              <a:gd name="adj" fmla="val 8696"/>
+            </a:avLst>
           </a:prstGeom>
           <a:solidFill>
             <a:srgbClr val="133B5C"/>
@@ -4901,7 +5087,7 @@
           <a:bodyPr wrap="square" lIns="0" tIns="0" rIns="0" bIns="0" rtlCol="0" anchor="ctr"/>
           <a:lstStyle/>
           <a:p>
-            <a:pPr marL="0" indent="0">
+            <a:pPr indent="0" marL="0">
               <a:buNone/>
             </a:pPr>
             <a:r>
@@ -4940,7 +5126,7 @@
           <a:bodyPr wrap="square" lIns="0" tIns="0" rIns="0" bIns="0" rtlCol="0" anchor="ctr"/>
           <a:lstStyle/>
           <a:p>
-            <a:pPr marL="0" indent="0" algn="r">
+            <a:pPr algn="r" indent="0" marL="0">
               <a:buNone/>
             </a:pPr>
             <a:r>
@@ -4979,7 +5165,7 @@
           <a:bodyPr wrap="square" lIns="0" tIns="0" rIns="0" bIns="0" rtlCol="0" anchor="ctr"/>
           <a:lstStyle/>
           <a:p>
-            <a:pPr marL="0" indent="0">
+            <a:pPr indent="0" marL="0">
               <a:lnSpc>
                 <a:spcPct val="110000"/>
               </a:lnSpc>
@@ -5012,7 +5198,9 @@
             <a:ext cx="4233672" cy="841248"/>
           </a:xfrm>
           <a:prstGeom prst="rect">
-            <a:avLst/>
+            <a:avLst>
+              <a:gd name="adj" fmla="val 8696"/>
+            </a:avLst>
           </a:prstGeom>
           <a:solidFill>
             <a:srgbClr val="133B5C"/>
@@ -5046,7 +5234,7 @@
           <a:bodyPr wrap="square" lIns="0" tIns="0" rIns="0" bIns="0" rtlCol="0" anchor="ctr"/>
           <a:lstStyle/>
           <a:p>
-            <a:pPr marL="0" indent="0">
+            <a:pPr indent="0" marL="0">
               <a:buNone/>
             </a:pPr>
             <a:r>
@@ -5085,7 +5273,7 @@
           <a:bodyPr wrap="square" lIns="0" tIns="0" rIns="0" bIns="0" rtlCol="0" anchor="ctr"/>
           <a:lstStyle/>
           <a:p>
-            <a:pPr marL="0" indent="0" algn="r">
+            <a:pPr algn="r" indent="0" marL="0">
               <a:buNone/>
             </a:pPr>
             <a:r>
@@ -5124,7 +5312,7 @@
           <a:bodyPr wrap="square" lIns="0" tIns="0" rIns="0" bIns="0" rtlCol="0" anchor="ctr"/>
           <a:lstStyle/>
           <a:p>
-            <a:pPr marL="0" indent="0">
+            <a:pPr indent="0" marL="0">
               <a:lnSpc>
                 <a:spcPct val="110000"/>
               </a:lnSpc>
@@ -5157,7 +5345,9 @@
             <a:ext cx="4233672" cy="841248"/>
           </a:xfrm>
           <a:prstGeom prst="rect">
-            <a:avLst/>
+            <a:avLst>
+              <a:gd name="adj" fmla="val 8696"/>
+            </a:avLst>
           </a:prstGeom>
           <a:solidFill>
             <a:srgbClr val="133B5C"/>
@@ -5191,7 +5381,7 @@
           <a:bodyPr wrap="square" lIns="0" tIns="0" rIns="0" bIns="0" rtlCol="0" anchor="ctr"/>
           <a:lstStyle/>
           <a:p>
-            <a:pPr marL="0" indent="0">
+            <a:pPr indent="0" marL="0">
               <a:buNone/>
             </a:pPr>
             <a:r>
@@ -5230,7 +5420,7 @@
           <a:bodyPr wrap="square" lIns="0" tIns="0" rIns="0" bIns="0" rtlCol="0" anchor="ctr"/>
           <a:lstStyle/>
           <a:p>
-            <a:pPr marL="0" indent="0" algn="r">
+            <a:pPr algn="r" indent="0" marL="0">
               <a:buNone/>
             </a:pPr>
             <a:r>
@@ -5269,7 +5459,7 @@
           <a:bodyPr wrap="square" lIns="0" tIns="0" rIns="0" bIns="0" rtlCol="0" anchor="ctr"/>
           <a:lstStyle/>
           <a:p>
-            <a:pPr marL="0" indent="0">
+            <a:pPr indent="0" marL="0">
               <a:lnSpc>
                 <a:spcPct val="110000"/>
               </a:lnSpc>
@@ -5311,7 +5501,7 @@
           <a:bodyPr wrap="square" rtlCol="0" anchor="ctr"/>
           <a:lstStyle/>
           <a:p>
-            <a:pPr marL="0" indent="0" algn="l">
+            <a:pPr algn="l" indent="0" marL="0">
               <a:buNone/>
             </a:pPr>
             <a:r>
@@ -5350,7 +5540,7 @@
           <a:bodyPr wrap="square" rtlCol="0" anchor="ctr"/>
           <a:lstStyle/>
           <a:p>
-            <a:pPr marL="0" indent="0" algn="r">
+            <a:pPr algn="r" indent="0" marL="0">
               <a:buNone/>
             </a:pPr>
             <a:r>
@@ -5384,7 +5574,6 @@
         <a:solidFill>
           <a:srgbClr val="FFFFFF"/>
         </a:solidFill>
-        <a:effectLst/>
       </p:bgPr>
     </p:bg>
     <p:spTree>
@@ -5422,11 +5611,11 @@
           <a:bodyPr wrap="square" lIns="0" tIns="0" rIns="0" bIns="0" rtlCol="0" anchor="ctr"/>
           <a:lstStyle/>
           <a:p>
-            <a:pPr marL="0" indent="0">
-              <a:buNone/>
-            </a:pPr>
-            <a:r>
-              <a:rPr lang="en-US" sz="1100" b="1" kern="0" spc="150" dirty="0">
+            <a:pPr indent="0" marL="0">
+              <a:buNone/>
+            </a:pPr>
+            <a:r>
+              <a:rPr lang="en-US" sz="1100" b="1" spc="150" kern="0" dirty="0">
                 <a:solidFill>
                   <a:srgbClr val="2C74B3"/>
                 </a:solidFill>
@@ -5461,7 +5650,7 @@
           <a:bodyPr wrap="square" lIns="0" tIns="0" rIns="0" bIns="0" rtlCol="0" anchor="ctr"/>
           <a:lstStyle/>
           <a:p>
-            <a:pPr marL="0" indent="0">
+            <a:pPr indent="0" marL="0">
               <a:buNone/>
             </a:pPr>
             <a:r>
@@ -5502,41 +5691,11 @@
             <a:tbl>
               <a:tblPr/>
               <a:tblGrid>
-                <a:gridCol w="2011680">
-                  <a:extLst>
-                    <a:ext uri="{9D8B030D-6E8A-4147-A177-3AD203B41FA5}">
-                      <a16:colId xmlns:a16="http://schemas.microsoft.com/office/drawing/2014/main" val="20000"/>
-                    </a:ext>
-                  </a:extLst>
-                </a:gridCol>
-                <a:gridCol w="2926080">
-                  <a:extLst>
-                    <a:ext uri="{9D8B030D-6E8A-4147-A177-3AD203B41FA5}">
-                      <a16:colId xmlns:a16="http://schemas.microsoft.com/office/drawing/2014/main" val="20001"/>
-                    </a:ext>
-                  </a:extLst>
-                </a:gridCol>
-                <a:gridCol w="2103120">
-                  <a:extLst>
-                    <a:ext uri="{9D8B030D-6E8A-4147-A177-3AD203B41FA5}">
-                      <a16:colId xmlns:a16="http://schemas.microsoft.com/office/drawing/2014/main" val="20002"/>
-                    </a:ext>
-                  </a:extLst>
-                </a:gridCol>
-                <a:gridCol w="2834640">
-                  <a:extLst>
-                    <a:ext uri="{9D8B030D-6E8A-4147-A177-3AD203B41FA5}">
-                      <a16:colId xmlns:a16="http://schemas.microsoft.com/office/drawing/2014/main" val="20003"/>
-                    </a:ext>
-                  </a:extLst>
-                </a:gridCol>
-                <a:gridCol w="1307592">
-                  <a:extLst>
-                    <a:ext uri="{9D8B030D-6E8A-4147-A177-3AD203B41FA5}">
-                      <a16:colId xmlns:a16="http://schemas.microsoft.com/office/drawing/2014/main" val="20004"/>
-                    </a:ext>
-                  </a:extLst>
-                </a:gridCol>
+                <a:gridCol w="2011680"/>
+                <a:gridCol w="2926080"/>
+                <a:gridCol w="2103120"/>
+                <a:gridCol w="2834640"/>
+                <a:gridCol w="1307592"/>
               </a:tblGrid>
               <a:tr h="426720">
                 <a:tc>
@@ -5544,7 +5703,7 @@
                     <a:bodyPr/>
                     <a:lstStyle/>
                     <a:p>
-                      <a:pPr marL="0" indent="0">
+                      <a:pPr indent="0" marL="0">
                         <a:buNone/>
                       </a:pPr>
                       <a:r>
@@ -5605,7 +5764,7 @@
                     <a:bodyPr/>
                     <a:lstStyle/>
                     <a:p>
-                      <a:pPr marL="0" indent="0">
+                      <a:pPr indent="0" marL="0">
                         <a:buNone/>
                       </a:pPr>
                       <a:r>
@@ -5666,7 +5825,7 @@
                     <a:bodyPr/>
                     <a:lstStyle/>
                     <a:p>
-                      <a:pPr marL="0" indent="0">
+                      <a:pPr indent="0" marL="0">
                         <a:buNone/>
                       </a:pPr>
                       <a:r>
@@ -5727,7 +5886,7 @@
                     <a:bodyPr/>
                     <a:lstStyle/>
                     <a:p>
-                      <a:pPr marL="0" indent="0">
+                      <a:pPr indent="0" marL="0">
                         <a:buNone/>
                       </a:pPr>
                       <a:r>
@@ -5788,7 +5947,7 @@
                     <a:bodyPr/>
                     <a:lstStyle/>
                     <a:p>
-                      <a:pPr marL="0" indent="0" algn="ctr">
+                      <a:pPr algn="ctr" indent="0" marL="0">
                         <a:buNone/>
                       </a:pPr>
                       <a:r>
@@ -5844,11 +6003,6 @@
                     </a:solidFill>
                   </a:tcPr>
                 </a:tc>
-                <a:extLst>
-                  <a:ext uri="{0D108BD9-81ED-4DB2-BD59-A6C34878D82A}">
-                    <a16:rowId xmlns:a16="http://schemas.microsoft.com/office/drawing/2014/main" val="10000"/>
-                  </a:ext>
-                </a:extLst>
               </a:tr>
               <a:tr h="426720">
                 <a:tc>
@@ -5856,7 +6010,7 @@
                     <a:bodyPr/>
                     <a:lstStyle/>
                     <a:p>
-                      <a:pPr marL="0" indent="0">
+                      <a:pPr indent="0" marL="0">
                         <a:buNone/>
                       </a:pPr>
                       <a:r>
@@ -5914,7 +6068,7 @@
                     <a:bodyPr/>
                     <a:lstStyle/>
                     <a:p>
-                      <a:pPr marL="0" indent="0">
+                      <a:pPr indent="0" marL="0">
                         <a:buNone/>
                       </a:pPr>
                       <a:r>
@@ -5972,7 +6126,7 @@
                     <a:bodyPr/>
                     <a:lstStyle/>
                     <a:p>
-                      <a:pPr marL="0" indent="0">
+                      <a:pPr indent="0" marL="0">
                         <a:buNone/>
                       </a:pPr>
                       <a:r>
@@ -6030,7 +6184,7 @@
                     <a:bodyPr/>
                     <a:lstStyle/>
                     <a:p>
-                      <a:pPr marL="0" indent="0">
+                      <a:pPr indent="0" marL="0">
                         <a:buNone/>
                       </a:pPr>
                       <a:r>
@@ -6088,7 +6242,7 @@
                     <a:bodyPr/>
                     <a:lstStyle/>
                     <a:p>
-                      <a:pPr marL="0" indent="0" algn="ctr">
+                      <a:pPr algn="ctr" indent="0" marL="0">
                         <a:buNone/>
                       </a:pPr>
                       <a:r>
@@ -6141,11 +6295,6 @@
                     </a:lnB>
                   </a:tcPr>
                 </a:tc>
-                <a:extLst>
-                  <a:ext uri="{0D108BD9-81ED-4DB2-BD59-A6C34878D82A}">
-                    <a16:rowId xmlns:a16="http://schemas.microsoft.com/office/drawing/2014/main" val="10001"/>
-                  </a:ext>
-                </a:extLst>
               </a:tr>
               <a:tr h="426720">
                 <a:tc>
@@ -6153,7 +6302,7 @@
                     <a:bodyPr/>
                     <a:lstStyle/>
                     <a:p>
-                      <a:pPr marL="0" indent="0">
+                      <a:pPr indent="0" marL="0">
                         <a:buNone/>
                       </a:pPr>
                       <a:r>
@@ -6211,7 +6360,7 @@
                     <a:bodyPr/>
                     <a:lstStyle/>
                     <a:p>
-                      <a:pPr marL="0" indent="0">
+                      <a:pPr indent="0" marL="0">
                         <a:buNone/>
                       </a:pPr>
                       <a:r>
@@ -6269,7 +6418,7 @@
                     <a:bodyPr/>
                     <a:lstStyle/>
                     <a:p>
-                      <a:pPr marL="0" indent="0">
+                      <a:pPr indent="0" marL="0">
                         <a:buNone/>
                       </a:pPr>
                       <a:r>
@@ -6327,7 +6476,7 @@
                     <a:bodyPr/>
                     <a:lstStyle/>
                     <a:p>
-                      <a:pPr marL="0" indent="0">
+                      <a:pPr indent="0" marL="0">
                         <a:buNone/>
                       </a:pPr>
                       <a:r>
@@ -6385,7 +6534,7 @@
                     <a:bodyPr/>
                     <a:lstStyle/>
                     <a:p>
-                      <a:pPr marL="0" indent="0" algn="ctr">
+                      <a:pPr algn="ctr" indent="0" marL="0">
                         <a:buNone/>
                       </a:pPr>
                       <a:r>
@@ -6438,11 +6587,6 @@
                     </a:lnB>
                   </a:tcPr>
                 </a:tc>
-                <a:extLst>
-                  <a:ext uri="{0D108BD9-81ED-4DB2-BD59-A6C34878D82A}">
-                    <a16:rowId xmlns:a16="http://schemas.microsoft.com/office/drawing/2014/main" val="10002"/>
-                  </a:ext>
-                </a:extLst>
               </a:tr>
               <a:tr h="426720">
                 <a:tc>
@@ -6450,7 +6594,7 @@
                     <a:bodyPr/>
                     <a:lstStyle/>
                     <a:p>
-                      <a:pPr marL="0" indent="0">
+                      <a:pPr indent="0" marL="0">
                         <a:buNone/>
                       </a:pPr>
                       <a:r>
@@ -6508,7 +6652,7 @@
                     <a:bodyPr/>
                     <a:lstStyle/>
                     <a:p>
-                      <a:pPr marL="0" indent="0">
+                      <a:pPr indent="0" marL="0">
                         <a:buNone/>
                       </a:pPr>
                       <a:r>
@@ -6566,7 +6710,7 @@
                     <a:bodyPr/>
                     <a:lstStyle/>
                     <a:p>
-                      <a:pPr marL="0" indent="0">
+                      <a:pPr indent="0" marL="0">
                         <a:buNone/>
                       </a:pPr>
                       <a:r>
@@ -6624,7 +6768,7 @@
                     <a:bodyPr/>
                     <a:lstStyle/>
                     <a:p>
-                      <a:pPr marL="0" indent="0">
+                      <a:pPr indent="0" marL="0">
                         <a:buNone/>
                       </a:pPr>
                       <a:r>
@@ -6682,7 +6826,7 @@
                     <a:bodyPr/>
                     <a:lstStyle/>
                     <a:p>
-                      <a:pPr marL="0" indent="0" algn="ctr">
+                      <a:pPr algn="ctr" indent="0" marL="0">
                         <a:buNone/>
                       </a:pPr>
                       <a:r>
@@ -6735,11 +6879,6 @@
                     </a:lnB>
                   </a:tcPr>
                 </a:tc>
-                <a:extLst>
-                  <a:ext uri="{0D108BD9-81ED-4DB2-BD59-A6C34878D82A}">
-                    <a16:rowId xmlns:a16="http://schemas.microsoft.com/office/drawing/2014/main" val="10003"/>
-                  </a:ext>
-                </a:extLst>
               </a:tr>
               <a:tr h="426720">
                 <a:tc>
@@ -6747,7 +6886,7 @@
                     <a:bodyPr/>
                     <a:lstStyle/>
                     <a:p>
-                      <a:pPr marL="0" indent="0">
+                      <a:pPr indent="0" marL="0">
                         <a:buNone/>
                       </a:pPr>
                       <a:r>
@@ -6805,7 +6944,7 @@
                     <a:bodyPr/>
                     <a:lstStyle/>
                     <a:p>
-                      <a:pPr marL="0" indent="0">
+                      <a:pPr indent="0" marL="0">
                         <a:buNone/>
                       </a:pPr>
                       <a:r>
@@ -6863,7 +7002,7 @@
                     <a:bodyPr/>
                     <a:lstStyle/>
                     <a:p>
-                      <a:pPr marL="0" indent="0">
+                      <a:pPr indent="0" marL="0">
                         <a:buNone/>
                       </a:pPr>
                       <a:r>
@@ -6921,7 +7060,7 @@
                     <a:bodyPr/>
                     <a:lstStyle/>
                     <a:p>
-                      <a:pPr marL="0" indent="0">
+                      <a:pPr indent="0" marL="0">
                         <a:buNone/>
                       </a:pPr>
                       <a:r>
@@ -6979,7 +7118,7 @@
                     <a:bodyPr/>
                     <a:lstStyle/>
                     <a:p>
-                      <a:pPr marL="0" indent="0" algn="ctr">
+                      <a:pPr algn="ctr" indent="0" marL="0">
                         <a:buNone/>
                       </a:pPr>
                       <a:r>
@@ -7032,11 +7171,6 @@
                     </a:lnB>
                   </a:tcPr>
                 </a:tc>
-                <a:extLst>
-                  <a:ext uri="{0D108BD9-81ED-4DB2-BD59-A6C34878D82A}">
-                    <a16:rowId xmlns:a16="http://schemas.microsoft.com/office/drawing/2014/main" val="10004"/>
-                  </a:ext>
-                </a:extLst>
               </a:tr>
               <a:tr h="426720">
                 <a:tc>
@@ -7044,7 +7178,7 @@
                     <a:bodyPr/>
                     <a:lstStyle/>
                     <a:p>
-                      <a:pPr marL="0" indent="0">
+                      <a:pPr indent="0" marL="0">
                         <a:buNone/>
                       </a:pPr>
                       <a:r>
@@ -7102,7 +7236,7 @@
                     <a:bodyPr/>
                     <a:lstStyle/>
                     <a:p>
-                      <a:pPr marL="0" indent="0">
+                      <a:pPr indent="0" marL="0">
                         <a:buNone/>
                       </a:pPr>
                       <a:r>
@@ -7160,7 +7294,7 @@
                     <a:bodyPr/>
                     <a:lstStyle/>
                     <a:p>
-                      <a:pPr marL="0" indent="0">
+                      <a:pPr indent="0" marL="0">
                         <a:buNone/>
                       </a:pPr>
                       <a:r>
@@ -7218,7 +7352,7 @@
                     <a:bodyPr/>
                     <a:lstStyle/>
                     <a:p>
-                      <a:pPr marL="0" indent="0">
+                      <a:pPr indent="0" marL="0">
                         <a:buNone/>
                       </a:pPr>
                       <a:r>
@@ -7276,7 +7410,7 @@
                     <a:bodyPr/>
                     <a:lstStyle/>
                     <a:p>
-                      <a:pPr marL="0" indent="0" algn="ctr">
+                      <a:pPr algn="ctr" indent="0" marL="0">
                         <a:buNone/>
                       </a:pPr>
                       <a:r>
@@ -7329,11 +7463,6 @@
                     </a:lnB>
                   </a:tcPr>
                 </a:tc>
-                <a:extLst>
-                  <a:ext uri="{0D108BD9-81ED-4DB2-BD59-A6C34878D82A}">
-                    <a16:rowId xmlns:a16="http://schemas.microsoft.com/office/drawing/2014/main" val="10005"/>
-                  </a:ext>
-                </a:extLst>
               </a:tr>
             </a:tbl>
           </a:graphicData>
@@ -7351,7 +7480,9 @@
             <a:ext cx="5431536" cy="2240280"/>
           </a:xfrm>
           <a:prstGeom prst="rect">
-            <a:avLst/>
+            <a:avLst>
+              <a:gd name="adj" fmla="val 3265"/>
+            </a:avLst>
           </a:prstGeom>
           <a:solidFill>
             <a:srgbClr val="0A2647"/>
@@ -7380,7 +7511,7 @@
           <a:bodyPr wrap="square" lIns="0" tIns="0" rIns="0" bIns="0" rtlCol="0" anchor="ctr"/>
           <a:lstStyle/>
           <a:p>
-            <a:pPr marL="0" indent="0">
+            <a:pPr indent="0" marL="0">
               <a:buNone/>
             </a:pPr>
             <a:r>
@@ -7419,7 +7550,7 @@
           <a:bodyPr wrap="square" lIns="0" tIns="0" rIns="0" bIns="0" rtlCol="0" anchor="ctr"/>
           <a:lstStyle/>
           <a:p>
-            <a:pPr marL="0" indent="0">
+            <a:pPr indent="0" marL="0">
               <a:buNone/>
             </a:pPr>
             <a:r>
@@ -7458,7 +7589,7 @@
           <a:bodyPr wrap="square" lIns="0" tIns="0" rIns="0" bIns="0" rtlCol="0" anchor="ctr"/>
           <a:lstStyle/>
           <a:p>
-            <a:pPr marL="0" indent="0">
+            <a:pPr indent="0" marL="0">
               <a:buNone/>
             </a:pPr>
             <a:r>
@@ -7497,7 +7628,7 @@
           <a:bodyPr wrap="square" lIns="0" tIns="0" rIns="0" bIns="0" rtlCol="0" anchor="ctr"/>
           <a:lstStyle/>
           <a:p>
-            <a:pPr marL="0" indent="0">
+            <a:pPr indent="0" marL="0">
               <a:buNone/>
             </a:pPr>
             <a:r>
@@ -7536,7 +7667,7 @@
           <a:bodyPr wrap="square" lIns="0" tIns="0" rIns="0" bIns="0" rtlCol="0" anchor="ctr"/>
           <a:lstStyle/>
           <a:p>
-            <a:pPr marL="0" indent="0">
+            <a:pPr indent="0" marL="0">
               <a:buNone/>
             </a:pPr>
             <a:r>
@@ -7575,7 +7706,7 @@
           <a:bodyPr wrap="square" lIns="0" tIns="0" rIns="0" bIns="0" rtlCol="0" anchor="ctr"/>
           <a:lstStyle/>
           <a:p>
-            <a:pPr marL="0" indent="0">
+            <a:pPr indent="0" marL="0">
               <a:buNone/>
             </a:pPr>
             <a:r>
@@ -7614,7 +7745,7 @@
           <a:bodyPr wrap="square" lIns="0" tIns="0" rIns="0" bIns="0" rtlCol="0" anchor="ctr"/>
           <a:lstStyle/>
           <a:p>
-            <a:pPr marL="0" indent="0">
+            <a:pPr indent="0" marL="0">
               <a:buNone/>
             </a:pPr>
             <a:r>
@@ -7634,7 +7765,7 @@
       </p:sp>
       <p:sp>
         <p:nvSpPr>
-          <p:cNvPr id="4" name="Text 10"/>
+          <p:cNvPr id="13" name="Text 10"/>
           <p:cNvSpPr/>
           <p:nvPr/>
         </p:nvSpPr>
@@ -7653,7 +7784,7 @@
           <a:bodyPr wrap="square" lIns="0" tIns="0" rIns="0" bIns="0" rtlCol="0" anchor="ctr"/>
           <a:lstStyle/>
           <a:p>
-            <a:pPr marL="0" indent="0">
+            <a:pPr indent="0" marL="0">
               <a:buNone/>
             </a:pPr>
             <a:r>
@@ -7692,7 +7823,7 @@
           <a:bodyPr wrap="square" lIns="0" tIns="0" rIns="0" bIns="0" rtlCol="0" anchor="ctr"/>
           <a:lstStyle/>
           <a:p>
-            <a:pPr marL="0" indent="0">
+            <a:pPr indent="0" marL="0">
               <a:buNone/>
             </a:pPr>
             <a:r>
@@ -7722,7 +7853,9 @@
             <a:ext cx="5431536" cy="2240280"/>
           </a:xfrm>
           <a:prstGeom prst="rect">
-            <a:avLst/>
+            <a:avLst>
+              <a:gd name="adj" fmla="val 3265"/>
+            </a:avLst>
           </a:prstGeom>
           <a:solidFill>
             <a:srgbClr val="F8FAFC"/>
@@ -7756,7 +7889,7 @@
           <a:bodyPr wrap="square" lIns="0" tIns="0" rIns="0" bIns="0" rtlCol="0" anchor="ctr"/>
           <a:lstStyle/>
           <a:p>
-            <a:pPr marL="0" indent="0">
+            <a:pPr indent="0" marL="0">
               <a:buNone/>
             </a:pPr>
             <a:r>
@@ -7795,7 +7928,7 @@
           <a:bodyPr wrap="square" lIns="0" tIns="0" rIns="0" bIns="0" rtlCol="0" anchor="ctr"/>
           <a:lstStyle/>
           <a:p>
-            <a:pPr marL="0" indent="0">
+            <a:pPr indent="0" marL="0">
               <a:buNone/>
             </a:pPr>
             <a:r>
@@ -7834,7 +7967,7 @@
           <a:bodyPr wrap="square" lIns="0" tIns="0" rIns="0" bIns="0" rtlCol="0" anchor="ctr"/>
           <a:lstStyle/>
           <a:p>
-            <a:pPr marL="0" indent="0">
+            <a:pPr indent="0" marL="0">
               <a:lnSpc>
                 <a:spcPct val="115000"/>
               </a:lnSpc>
@@ -7876,7 +8009,7 @@
           <a:bodyPr wrap="square" lIns="0" tIns="0" rIns="0" bIns="0" rtlCol="0" anchor="ctr"/>
           <a:lstStyle/>
           <a:p>
-            <a:pPr marL="0" indent="0">
+            <a:pPr indent="0" marL="0">
               <a:buNone/>
             </a:pPr>
             <a:r>
@@ -7915,7 +8048,7 @@
           <a:bodyPr wrap="square" lIns="0" tIns="0" rIns="0" bIns="0" rtlCol="0" anchor="ctr"/>
           <a:lstStyle/>
           <a:p>
-            <a:pPr marL="0" indent="0">
+            <a:pPr indent="0" marL="0">
               <a:lnSpc>
                 <a:spcPct val="115000"/>
               </a:lnSpc>
@@ -7957,7 +8090,7 @@
           <a:bodyPr wrap="square" rtlCol="0" anchor="ctr"/>
           <a:lstStyle/>
           <a:p>
-            <a:pPr marL="0" indent="0" algn="l">
+            <a:pPr algn="l" indent="0" marL="0">
               <a:buNone/>
             </a:pPr>
             <a:r>
@@ -7996,7 +8129,7 @@
           <a:bodyPr wrap="square" rtlCol="0" anchor="ctr"/>
           <a:lstStyle/>
           <a:p>
-            <a:pPr marL="0" indent="0" algn="r">
+            <a:pPr algn="r" indent="0" marL="0">
               <a:buNone/>
             </a:pPr>
             <a:r>
@@ -8030,7 +8163,6 @@
         <a:solidFill>
           <a:srgbClr val="FFFFFF"/>
         </a:solidFill>
-        <a:effectLst/>
       </p:bgPr>
     </p:bg>
     <p:spTree>
@@ -8068,11 +8200,11 @@
           <a:bodyPr wrap="square" lIns="0" tIns="0" rIns="0" bIns="0" rtlCol="0" anchor="ctr"/>
           <a:lstStyle/>
           <a:p>
-            <a:pPr marL="0" indent="0">
-              <a:buNone/>
-            </a:pPr>
-            <a:r>
-              <a:rPr lang="en-US" sz="1100" b="1" kern="0" spc="150" dirty="0">
+            <a:pPr indent="0" marL="0">
+              <a:buNone/>
+            </a:pPr>
+            <a:r>
+              <a:rPr lang="en-US" sz="1100" b="1" spc="150" kern="0" dirty="0">
                 <a:solidFill>
                   <a:srgbClr val="2C74B3"/>
                 </a:solidFill>
@@ -8107,7 +8239,7 @@
           <a:bodyPr wrap="square" lIns="0" tIns="0" rIns="0" bIns="0" rtlCol="0" anchor="ctr"/>
           <a:lstStyle/>
           <a:p>
-            <a:pPr marL="0" indent="0">
+            <a:pPr indent="0" marL="0">
               <a:buNone/>
             </a:pPr>
             <a:r>
@@ -8137,7 +8269,9 @@
             <a:ext cx="3575304" cy="4800600"/>
           </a:xfrm>
           <a:prstGeom prst="rect">
-            <a:avLst/>
+            <a:avLst>
+              <a:gd name="adj" fmla="val 2046"/>
+            </a:avLst>
           </a:prstGeom>
           <a:solidFill>
             <a:srgbClr val="F8FAFC"/>
@@ -8171,7 +8305,7 @@
           <a:bodyPr wrap="square" lIns="0" tIns="0" rIns="0" bIns="0" rtlCol="0" anchor="ctr"/>
           <a:lstStyle/>
           <a:p>
-            <a:pPr marL="0" indent="0">
+            <a:pPr indent="0" marL="0">
               <a:buNone/>
             </a:pPr>
             <a:r>
@@ -8210,7 +8344,7 @@
           <a:bodyPr wrap="square" lIns="0" tIns="0" rIns="0" bIns="0" rtlCol="0" anchor="ctr"/>
           <a:lstStyle/>
           <a:p>
-            <a:pPr marL="0" indent="0" algn="r">
+            <a:pPr algn="r" indent="0" marL="0">
               <a:buNone/>
             </a:pPr>
             <a:r>
@@ -8249,7 +8383,7 @@
           <a:bodyPr wrap="square" lIns="0" tIns="0" rIns="0" bIns="0" rtlCol="0" anchor="ctr"/>
           <a:lstStyle/>
           <a:p>
-            <a:pPr marL="0" indent="0">
+            <a:pPr indent="0" marL="0">
               <a:buNone/>
             </a:pPr>
             <a:r>
@@ -8311,7 +8445,7 @@
           <a:bodyPr wrap="square" lIns="0" tIns="0" rIns="0" bIns="0" rtlCol="0" anchor="ctr"/>
           <a:lstStyle/>
           <a:p>
-            <a:pPr marL="0" indent="0">
+            <a:pPr indent="0" marL="0">
               <a:buNone/>
             </a:pPr>
             <a:r>
@@ -8350,7 +8484,7 @@
           <a:bodyPr wrap="square" lIns="0" tIns="0" rIns="0" bIns="0" rtlCol="0" anchor="ctr"/>
           <a:lstStyle/>
           <a:p>
-            <a:pPr marL="0" indent="0">
+            <a:pPr indent="0" marL="0">
               <a:lnSpc>
                 <a:spcPct val="115000"/>
               </a:lnSpc>
@@ -8392,7 +8526,7 @@
           <a:bodyPr wrap="square" lIns="0" tIns="0" rIns="0" bIns="0" rtlCol="0" anchor="ctr"/>
           <a:lstStyle/>
           <a:p>
-            <a:pPr marL="0" indent="0">
+            <a:pPr indent="0" marL="0">
               <a:buNone/>
             </a:pPr>
             <a:r>
@@ -8431,7 +8565,7 @@
           <a:bodyPr wrap="square" lIns="0" tIns="0" rIns="0" bIns="0" rtlCol="0" anchor="ctr"/>
           <a:lstStyle/>
           <a:p>
-            <a:pPr marL="0" indent="0">
+            <a:pPr indent="0" marL="0">
               <a:lnSpc>
                 <a:spcPct val="115000"/>
               </a:lnSpc>
@@ -8473,7 +8607,7 @@
           <a:bodyPr wrap="square" lIns="0" tIns="0" rIns="0" bIns="0" rtlCol="0" anchor="ctr"/>
           <a:lstStyle/>
           <a:p>
-            <a:pPr marL="0" indent="0">
+            <a:pPr indent="0" marL="0">
               <a:buNone/>
             </a:pPr>
             <a:r>
@@ -8512,7 +8646,7 @@
           <a:bodyPr wrap="square" lIns="0" tIns="0" rIns="0" bIns="0" rtlCol="0" anchor="ctr"/>
           <a:lstStyle/>
           <a:p>
-            <a:pPr marL="0" indent="0">
+            <a:pPr indent="0" marL="0">
               <a:lnSpc>
                 <a:spcPct val="115000"/>
               </a:lnSpc>
@@ -8545,7 +8679,9 @@
             <a:ext cx="3575304" cy="4800600"/>
           </a:xfrm>
           <a:prstGeom prst="rect">
-            <a:avLst/>
+            <a:avLst>
+              <a:gd name="adj" fmla="val 2046"/>
+            </a:avLst>
           </a:prstGeom>
           <a:solidFill>
             <a:srgbClr val="F8FAFC"/>
@@ -8579,7 +8715,7 @@
           <a:bodyPr wrap="square" lIns="0" tIns="0" rIns="0" bIns="0" rtlCol="0" anchor="ctr"/>
           <a:lstStyle/>
           <a:p>
-            <a:pPr marL="0" indent="0">
+            <a:pPr indent="0" marL="0">
               <a:buNone/>
             </a:pPr>
             <a:r>
@@ -8618,7 +8754,7 @@
           <a:bodyPr wrap="square" lIns="0" tIns="0" rIns="0" bIns="0" rtlCol="0" anchor="ctr"/>
           <a:lstStyle/>
           <a:p>
-            <a:pPr marL="0" indent="0" algn="r">
+            <a:pPr algn="r" indent="0" marL="0">
               <a:buNone/>
             </a:pPr>
             <a:r>
@@ -8657,7 +8793,7 @@
           <a:bodyPr wrap="square" lIns="0" tIns="0" rIns="0" bIns="0" rtlCol="0" anchor="ctr"/>
           <a:lstStyle/>
           <a:p>
-            <a:pPr marL="0" indent="0">
+            <a:pPr indent="0" marL="0">
               <a:buNone/>
             </a:pPr>
             <a:r>
@@ -8719,7 +8855,7 @@
           <a:bodyPr wrap="square" lIns="0" tIns="0" rIns="0" bIns="0" rtlCol="0" anchor="ctr"/>
           <a:lstStyle/>
           <a:p>
-            <a:pPr marL="0" indent="0">
+            <a:pPr indent="0" marL="0">
               <a:buNone/>
             </a:pPr>
             <a:r>
@@ -8758,7 +8894,7 @@
           <a:bodyPr wrap="square" lIns="0" tIns="0" rIns="0" bIns="0" rtlCol="0" anchor="ctr"/>
           <a:lstStyle/>
           <a:p>
-            <a:pPr marL="0" indent="0">
+            <a:pPr indent="0" marL="0">
               <a:lnSpc>
                 <a:spcPct val="115000"/>
               </a:lnSpc>
@@ -8800,7 +8936,7 @@
           <a:bodyPr wrap="square" lIns="0" tIns="0" rIns="0" bIns="0" rtlCol="0" anchor="ctr"/>
           <a:lstStyle/>
           <a:p>
-            <a:pPr marL="0" indent="0">
+            <a:pPr indent="0" marL="0">
               <a:buNone/>
             </a:pPr>
             <a:r>
@@ -8839,7 +8975,7 @@
           <a:bodyPr wrap="square" lIns="0" tIns="0" rIns="0" bIns="0" rtlCol="0" anchor="ctr"/>
           <a:lstStyle/>
           <a:p>
-            <a:pPr marL="0" indent="0">
+            <a:pPr indent="0" marL="0">
               <a:lnSpc>
                 <a:spcPct val="115000"/>
               </a:lnSpc>
@@ -8881,7 +9017,7 @@
           <a:bodyPr wrap="square" lIns="0" tIns="0" rIns="0" bIns="0" rtlCol="0" anchor="ctr"/>
           <a:lstStyle/>
           <a:p>
-            <a:pPr marL="0" indent="0">
+            <a:pPr indent="0" marL="0">
               <a:buNone/>
             </a:pPr>
             <a:r>
@@ -8920,7 +9056,7 @@
           <a:bodyPr wrap="square" lIns="0" tIns="0" rIns="0" bIns="0" rtlCol="0" anchor="ctr"/>
           <a:lstStyle/>
           <a:p>
-            <a:pPr marL="0" indent="0">
+            <a:pPr indent="0" marL="0">
               <a:lnSpc>
                 <a:spcPct val="115000"/>
               </a:lnSpc>
@@ -8953,7 +9089,9 @@
             <a:ext cx="3575304" cy="4800600"/>
           </a:xfrm>
           <a:prstGeom prst="rect">
-            <a:avLst/>
+            <a:avLst>
+              <a:gd name="adj" fmla="val 2046"/>
+            </a:avLst>
           </a:prstGeom>
           <a:solidFill>
             <a:srgbClr val="F8FAFC"/>
@@ -8987,7 +9125,7 @@
           <a:bodyPr wrap="square" lIns="0" tIns="0" rIns="0" bIns="0" rtlCol="0" anchor="ctr"/>
           <a:lstStyle/>
           <a:p>
-            <a:pPr marL="0" indent="0">
+            <a:pPr indent="0" marL="0">
               <a:buNone/>
             </a:pPr>
             <a:r>
@@ -9026,7 +9164,7 @@
           <a:bodyPr wrap="square" lIns="0" tIns="0" rIns="0" bIns="0" rtlCol="0" anchor="ctr"/>
           <a:lstStyle/>
           <a:p>
-            <a:pPr marL="0" indent="0" algn="r">
+            <a:pPr algn="r" indent="0" marL="0">
               <a:buNone/>
             </a:pPr>
             <a:r>
@@ -9065,7 +9203,7 @@
           <a:bodyPr wrap="square" lIns="0" tIns="0" rIns="0" bIns="0" rtlCol="0" anchor="ctr"/>
           <a:lstStyle/>
           <a:p>
-            <a:pPr marL="0" indent="0">
+            <a:pPr indent="0" marL="0">
               <a:buNone/>
             </a:pPr>
             <a:r>
@@ -9127,7 +9265,7 @@
           <a:bodyPr wrap="square" lIns="0" tIns="0" rIns="0" bIns="0" rtlCol="0" anchor="ctr"/>
           <a:lstStyle/>
           <a:p>
-            <a:pPr marL="0" indent="0">
+            <a:pPr indent="0" marL="0">
               <a:buNone/>
             </a:pPr>
             <a:r>
@@ -9166,7 +9304,7 @@
           <a:bodyPr wrap="square" lIns="0" tIns="0" rIns="0" bIns="0" rtlCol="0" anchor="ctr"/>
           <a:lstStyle/>
           <a:p>
-            <a:pPr marL="0" indent="0">
+            <a:pPr indent="0" marL="0">
               <a:lnSpc>
                 <a:spcPct val="115000"/>
               </a:lnSpc>
@@ -9208,7 +9346,7 @@
           <a:bodyPr wrap="square" lIns="0" tIns="0" rIns="0" bIns="0" rtlCol="0" anchor="ctr"/>
           <a:lstStyle/>
           <a:p>
-            <a:pPr marL="0" indent="0">
+            <a:pPr indent="0" marL="0">
               <a:buNone/>
             </a:pPr>
             <a:r>
@@ -9247,7 +9385,7 @@
           <a:bodyPr wrap="square" lIns="0" tIns="0" rIns="0" bIns="0" rtlCol="0" anchor="ctr"/>
           <a:lstStyle/>
           <a:p>
-            <a:pPr marL="0" indent="0">
+            <a:pPr indent="0" marL="0">
               <a:lnSpc>
                 <a:spcPct val="115000"/>
               </a:lnSpc>
@@ -9289,7 +9427,7 @@
           <a:bodyPr wrap="square" lIns="0" tIns="0" rIns="0" bIns="0" rtlCol="0" anchor="ctr"/>
           <a:lstStyle/>
           <a:p>
-            <a:pPr marL="0" indent="0">
+            <a:pPr indent="0" marL="0">
               <a:buNone/>
             </a:pPr>
             <a:r>
@@ -9328,7 +9466,7 @@
           <a:bodyPr wrap="square" lIns="0" tIns="0" rIns="0" bIns="0" rtlCol="0" anchor="ctr"/>
           <a:lstStyle/>
           <a:p>
-            <a:pPr marL="0" indent="0">
+            <a:pPr indent="0" marL="0">
               <a:lnSpc>
                 <a:spcPct val="115000"/>
               </a:lnSpc>
@@ -9370,7 +9508,7 @@
           <a:bodyPr wrap="square" rtlCol="0" anchor="ctr"/>
           <a:lstStyle/>
           <a:p>
-            <a:pPr marL="0" indent="0" algn="l">
+            <a:pPr algn="l" indent="0" marL="0">
               <a:buNone/>
             </a:pPr>
             <a:r>
@@ -9409,7 +9547,7 @@
           <a:bodyPr wrap="square" rtlCol="0" anchor="ctr"/>
           <a:lstStyle/>
           <a:p>
-            <a:pPr marL="0" indent="0" algn="r">
+            <a:pPr algn="r" indent="0" marL="0">
               <a:buNone/>
             </a:pPr>
             <a:r>
@@ -9443,7 +9581,6 @@
         <a:solidFill>
           <a:srgbClr val="FFFFFF"/>
         </a:solidFill>
-        <a:effectLst/>
       </p:bgPr>
     </p:bg>
     <p:spTree>
@@ -9481,11 +9618,11 @@
           <a:bodyPr wrap="square" lIns="0" tIns="0" rIns="0" bIns="0" rtlCol="0" anchor="ctr"/>
           <a:lstStyle/>
           <a:p>
-            <a:pPr marL="0" indent="0">
-              <a:buNone/>
-            </a:pPr>
-            <a:r>
-              <a:rPr lang="en-US" sz="1100" b="1" kern="0" spc="150" dirty="0">
+            <a:pPr indent="0" marL="0">
+              <a:buNone/>
+            </a:pPr>
+            <a:r>
+              <a:rPr lang="en-US" sz="1100" b="1" spc="150" kern="0" dirty="0">
                 <a:solidFill>
                   <a:srgbClr val="2C74B3"/>
                 </a:solidFill>
@@ -9520,7 +9657,7 @@
           <a:bodyPr wrap="square" lIns="0" tIns="0" rIns="0" bIns="0" rtlCol="0" anchor="ctr"/>
           <a:lstStyle/>
           <a:p>
-            <a:pPr marL="0" indent="0">
+            <a:pPr indent="0" marL="0">
               <a:buNone/>
             </a:pPr>
             <a:r>
@@ -9550,7 +9687,9 @@
             <a:ext cx="11183112" cy="914400"/>
           </a:xfrm>
           <a:prstGeom prst="rect">
-            <a:avLst/>
+            <a:avLst>
+              <a:gd name="adj" fmla="val 8000"/>
+            </a:avLst>
           </a:prstGeom>
           <a:solidFill>
             <a:srgbClr val="0A2647"/>
@@ -9579,7 +9718,7 @@
           <a:bodyPr wrap="square" lIns="0" tIns="0" rIns="0" bIns="0" rtlCol="0" anchor="ctr"/>
           <a:lstStyle/>
           <a:p>
-            <a:pPr marL="0" indent="0">
+            <a:pPr indent="0" marL="0">
               <a:buNone/>
             </a:pPr>
             <a:r>
@@ -9618,7 +9757,7 @@
           <a:bodyPr wrap="square" lIns="0" tIns="0" rIns="0" bIns="0" rtlCol="0" anchor="ctr"/>
           <a:lstStyle/>
           <a:p>
-            <a:pPr marL="0" indent="0">
+            <a:pPr indent="0" marL="0">
               <a:lnSpc>
                 <a:spcPct val="115000"/>
               </a:lnSpc>
@@ -9651,7 +9790,9 @@
             <a:ext cx="3575304" cy="3703320"/>
           </a:xfrm>
           <a:prstGeom prst="rect">
-            <a:avLst/>
+            <a:avLst>
+              <a:gd name="adj" fmla="val 2046"/>
+            </a:avLst>
           </a:prstGeom>
           <a:solidFill>
             <a:srgbClr val="F8FAFC"/>
@@ -9685,7 +9826,7 @@
           <a:bodyPr wrap="square" lIns="0" tIns="0" rIns="0" bIns="0" rtlCol="0" anchor="ctr"/>
           <a:lstStyle/>
           <a:p>
-            <a:pPr marL="0" indent="0">
+            <a:pPr indent="0" marL="0">
               <a:buNone/>
             </a:pPr>
             <a:r>
@@ -9724,7 +9865,7 @@
           <a:bodyPr wrap="square" lIns="0" tIns="0" rIns="0" bIns="0" rtlCol="0" anchor="ctr"/>
           <a:lstStyle/>
           <a:p>
-            <a:pPr marL="0" indent="0">
+            <a:pPr indent="0" marL="0">
               <a:buNone/>
             </a:pPr>
             <a:r>
@@ -9763,7 +9904,7 @@
           <a:bodyPr wrap="square" lIns="0" tIns="0" rIns="0" bIns="0" rtlCol="0" anchor="ctr"/>
           <a:lstStyle/>
           <a:p>
-            <a:pPr marL="0" indent="0">
+            <a:pPr indent="0" marL="0">
               <a:lnSpc>
                 <a:spcPct val="120000"/>
               </a:lnSpc>
@@ -9796,7 +9937,9 @@
             <a:ext cx="3118104" cy="594360"/>
           </a:xfrm>
           <a:prstGeom prst="rect">
-            <a:avLst/>
+            <a:avLst>
+              <a:gd name="adj" fmla="val 7692"/>
+            </a:avLst>
           </a:prstGeom>
           <a:solidFill>
             <a:srgbClr val="E0F2FE"/>
@@ -9830,7 +9973,7 @@
           <a:bodyPr wrap="square" lIns="0" tIns="0" rIns="0" bIns="0" rtlCol="0" anchor="ctr"/>
           <a:lstStyle/>
           <a:p>
-            <a:pPr marL="0" indent="0" algn="ctr">
+            <a:pPr algn="ctr" indent="0" marL="0">
               <a:buNone/>
             </a:pPr>
             <a:r>
@@ -9860,7 +10003,9 @@
             <a:ext cx="3575304" cy="3703320"/>
           </a:xfrm>
           <a:prstGeom prst="rect">
-            <a:avLst/>
+            <a:avLst>
+              <a:gd name="adj" fmla="val 2046"/>
+            </a:avLst>
           </a:prstGeom>
           <a:solidFill>
             <a:srgbClr val="F8FAFC"/>
@@ -9894,7 +10039,7 @@
           <a:bodyPr wrap="square" lIns="0" tIns="0" rIns="0" bIns="0" rtlCol="0" anchor="ctr"/>
           <a:lstStyle/>
           <a:p>
-            <a:pPr marL="0" indent="0">
+            <a:pPr indent="0" marL="0">
               <a:buNone/>
             </a:pPr>
             <a:r>
@@ -9933,7 +10078,7 @@
           <a:bodyPr wrap="square" lIns="0" tIns="0" rIns="0" bIns="0" rtlCol="0" anchor="ctr"/>
           <a:lstStyle/>
           <a:p>
-            <a:pPr marL="0" indent="0">
+            <a:pPr indent="0" marL="0">
               <a:buNone/>
             </a:pPr>
             <a:r>
@@ -9972,7 +10117,7 @@
           <a:bodyPr wrap="square" lIns="0" tIns="0" rIns="0" bIns="0" rtlCol="0" anchor="ctr"/>
           <a:lstStyle/>
           <a:p>
-            <a:pPr marL="0" indent="0">
+            <a:pPr indent="0" marL="0">
               <a:lnSpc>
                 <a:spcPct val="120000"/>
               </a:lnSpc>
@@ -10005,7 +10150,9 @@
             <a:ext cx="3118104" cy="594360"/>
           </a:xfrm>
           <a:prstGeom prst="rect">
-            <a:avLst/>
+            <a:avLst>
+              <a:gd name="adj" fmla="val 7692"/>
+            </a:avLst>
           </a:prstGeom>
           <a:solidFill>
             <a:srgbClr val="E0F2FE"/>
@@ -10039,7 +10186,7 @@
           <a:bodyPr wrap="square" lIns="0" tIns="0" rIns="0" bIns="0" rtlCol="0" anchor="ctr"/>
           <a:lstStyle/>
           <a:p>
-            <a:pPr marL="0" indent="0" algn="ctr">
+            <a:pPr algn="ctr" indent="0" marL="0">
               <a:buNone/>
             </a:pPr>
             <a:r>
@@ -10069,7 +10216,9 @@
             <a:ext cx="3575304" cy="3703320"/>
           </a:xfrm>
           <a:prstGeom prst="rect">
-            <a:avLst/>
+            <a:avLst>
+              <a:gd name="adj" fmla="val 2046"/>
+            </a:avLst>
           </a:prstGeom>
           <a:solidFill>
             <a:srgbClr val="F8FAFC"/>
@@ -10103,7 +10252,7 @@
           <a:bodyPr wrap="square" lIns="0" tIns="0" rIns="0" bIns="0" rtlCol="0" anchor="ctr"/>
           <a:lstStyle/>
           <a:p>
-            <a:pPr marL="0" indent="0">
+            <a:pPr indent="0" marL="0">
               <a:buNone/>
             </a:pPr>
             <a:r>
@@ -10142,7 +10291,7 @@
           <a:bodyPr wrap="square" lIns="0" tIns="0" rIns="0" bIns="0" rtlCol="0" anchor="ctr"/>
           <a:lstStyle/>
           <a:p>
-            <a:pPr marL="0" indent="0">
+            <a:pPr indent="0" marL="0">
               <a:buNone/>
             </a:pPr>
             <a:r>
@@ -10181,7 +10330,7 @@
           <a:bodyPr wrap="square" lIns="0" tIns="0" rIns="0" bIns="0" rtlCol="0" anchor="ctr"/>
           <a:lstStyle/>
           <a:p>
-            <a:pPr marL="0" indent="0">
+            <a:pPr indent="0" marL="0">
               <a:lnSpc>
                 <a:spcPct val="120000"/>
               </a:lnSpc>
@@ -10214,7 +10363,9 @@
             <a:ext cx="3118104" cy="594360"/>
           </a:xfrm>
           <a:prstGeom prst="rect">
-            <a:avLst/>
+            <a:avLst>
+              <a:gd name="adj" fmla="val 7692"/>
+            </a:avLst>
           </a:prstGeom>
           <a:solidFill>
             <a:srgbClr val="E0F2FE"/>
@@ -10248,7 +10399,7 @@
           <a:bodyPr wrap="square" lIns="0" tIns="0" rIns="0" bIns="0" rtlCol="0" anchor="ctr"/>
           <a:lstStyle/>
           <a:p>
-            <a:pPr marL="0" indent="0" algn="ctr">
+            <a:pPr algn="ctr" indent="0" marL="0">
               <a:buNone/>
             </a:pPr>
             <a:r>
@@ -10287,7 +10438,7 @@
           <a:bodyPr wrap="square" rtlCol="0" anchor="ctr"/>
           <a:lstStyle/>
           <a:p>
-            <a:pPr marL="0" indent="0" algn="l">
+            <a:pPr algn="l" indent="0" marL="0">
               <a:buNone/>
             </a:pPr>
             <a:r>
@@ -10326,7 +10477,7 @@
           <a:bodyPr wrap="square" rtlCol="0" anchor="ctr"/>
           <a:lstStyle/>
           <a:p>
-            <a:pPr marL="0" indent="0" algn="r">
+            <a:pPr algn="r" indent="0" marL="0">
               <a:buNone/>
             </a:pPr>
             <a:r>
@@ -10360,7 +10511,6 @@
         <a:solidFill>
           <a:srgbClr val="FFFFFF"/>
         </a:solidFill>
-        <a:effectLst/>
       </p:bgPr>
     </p:bg>
     <p:spTree>
@@ -10398,11 +10548,11 @@
           <a:bodyPr wrap="square" lIns="0" tIns="0" rIns="0" bIns="0" rtlCol="0" anchor="ctr"/>
           <a:lstStyle/>
           <a:p>
-            <a:pPr marL="0" indent="0">
-              <a:buNone/>
-            </a:pPr>
-            <a:r>
-              <a:rPr lang="en-US" sz="1100" b="1" kern="0" spc="150" dirty="0">
+            <a:pPr indent="0" marL="0">
+              <a:buNone/>
+            </a:pPr>
+            <a:r>
+              <a:rPr lang="en-US" sz="1100" b="1" spc="150" kern="0" dirty="0">
                 <a:solidFill>
                   <a:srgbClr val="2C74B3"/>
                 </a:solidFill>
@@ -10437,7 +10587,7 @@
           <a:bodyPr wrap="square" lIns="0" tIns="0" rIns="0" bIns="0" rtlCol="0" anchor="ctr"/>
           <a:lstStyle/>
           <a:p>
-            <a:pPr marL="0" indent="0">
+            <a:pPr indent="0" marL="0">
               <a:buNone/>
             </a:pPr>
             <a:r>
@@ -10467,7 +10617,9 @@
             <a:ext cx="5431536" cy="2240280"/>
           </a:xfrm>
           <a:prstGeom prst="rect">
-            <a:avLst/>
+            <a:avLst>
+              <a:gd name="adj" fmla="val 3265"/>
+            </a:avLst>
           </a:prstGeom>
           <a:solidFill>
             <a:srgbClr val="FEF2F2"/>
@@ -10501,7 +10653,7 @@
           <a:bodyPr wrap="square" lIns="0" tIns="0" rIns="0" bIns="0" rtlCol="0" anchor="ctr"/>
           <a:lstStyle/>
           <a:p>
-            <a:pPr marL="0" indent="0">
+            <a:pPr indent="0" marL="0">
               <a:buNone/>
             </a:pPr>
             <a:r>
@@ -10540,7 +10692,7 @@
           <a:bodyPr wrap="square" lIns="0" tIns="0" rIns="0" bIns="0" rtlCol="0" anchor="ctr"/>
           <a:lstStyle/>
           <a:p>
-            <a:pPr marL="0" indent="0">
+            <a:pPr indent="0" marL="0">
               <a:buNone/>
             </a:pPr>
             <a:r>
@@ -10579,7 +10731,7 @@
           <a:bodyPr wrap="square" lIns="0" tIns="0" rIns="0" bIns="0" rtlCol="0" anchor="ctr"/>
           <a:lstStyle/>
           <a:p>
-            <a:pPr marL="0" indent="0">
+            <a:pPr indent="0" marL="0">
               <a:lnSpc>
                 <a:spcPct val="115000"/>
               </a:lnSpc>
@@ -10644,7 +10796,7 @@
           <a:bodyPr wrap="square" lIns="0" tIns="0" rIns="0" bIns="0" rtlCol="0" anchor="ctr"/>
           <a:lstStyle/>
           <a:p>
-            <a:pPr marL="0" indent="0">
+            <a:pPr indent="0" marL="0">
               <a:buNone/>
             </a:pPr>
             <a:r>
@@ -10674,7 +10826,9 @@
             <a:ext cx="5431536" cy="2240280"/>
           </a:xfrm>
           <a:prstGeom prst="rect">
-            <a:avLst/>
+            <a:avLst>
+              <a:gd name="adj" fmla="val 3265"/>
+            </a:avLst>
           </a:prstGeom>
           <a:solidFill>
             <a:srgbClr val="FFFBEB"/>
@@ -10708,7 +10862,7 @@
           <a:bodyPr wrap="square" lIns="0" tIns="0" rIns="0" bIns="0" rtlCol="0" anchor="ctr"/>
           <a:lstStyle/>
           <a:p>
-            <a:pPr marL="0" indent="0">
+            <a:pPr indent="0" marL="0">
               <a:buNone/>
             </a:pPr>
             <a:r>
@@ -10747,7 +10901,7 @@
           <a:bodyPr wrap="square" lIns="0" tIns="0" rIns="0" bIns="0" rtlCol="0" anchor="ctr"/>
           <a:lstStyle/>
           <a:p>
-            <a:pPr marL="0" indent="0">
+            <a:pPr indent="0" marL="0">
               <a:buNone/>
             </a:pPr>
             <a:r>
@@ -10786,7 +10940,7 @@
           <a:bodyPr wrap="square" lIns="0" tIns="0" rIns="0" bIns="0" rtlCol="0" anchor="ctr"/>
           <a:lstStyle/>
           <a:p>
-            <a:pPr marL="0" indent="0">
+            <a:pPr indent="0" marL="0">
               <a:lnSpc>
                 <a:spcPct val="115000"/>
               </a:lnSpc>
@@ -10851,7 +11005,7 @@
           <a:bodyPr wrap="square" lIns="0" tIns="0" rIns="0" bIns="0" rtlCol="0" anchor="ctr"/>
           <a:lstStyle/>
           <a:p>
-            <a:pPr marL="0" indent="0">
+            <a:pPr indent="0" marL="0">
               <a:buNone/>
             </a:pPr>
             <a:r>
@@ -10881,7 +11035,9 @@
             <a:ext cx="5431536" cy="2240280"/>
           </a:xfrm>
           <a:prstGeom prst="rect">
-            <a:avLst/>
+            <a:avLst>
+              <a:gd name="adj" fmla="val 3265"/>
+            </a:avLst>
           </a:prstGeom>
           <a:solidFill>
             <a:srgbClr val="EFF6FF"/>
@@ -10915,7 +11071,7 @@
           <a:bodyPr wrap="square" lIns="0" tIns="0" rIns="0" bIns="0" rtlCol="0" anchor="ctr"/>
           <a:lstStyle/>
           <a:p>
-            <a:pPr marL="0" indent="0">
+            <a:pPr indent="0" marL="0">
               <a:buNone/>
             </a:pPr>
             <a:r>
@@ -10954,7 +11110,7 @@
           <a:bodyPr wrap="square" lIns="0" tIns="0" rIns="0" bIns="0" rtlCol="0" anchor="ctr"/>
           <a:lstStyle/>
           <a:p>
-            <a:pPr marL="0" indent="0">
+            <a:pPr indent="0" marL="0">
               <a:buNone/>
             </a:pPr>
             <a:r>
@@ -10993,7 +11149,7 @@
           <a:bodyPr wrap="square" lIns="0" tIns="0" rIns="0" bIns="0" rtlCol="0" anchor="ctr"/>
           <a:lstStyle/>
           <a:p>
-            <a:pPr marL="0" indent="0">
+            <a:pPr indent="0" marL="0">
               <a:lnSpc>
                 <a:spcPct val="115000"/>
               </a:lnSpc>
@@ -11058,7 +11214,7 @@
           <a:bodyPr wrap="square" lIns="0" tIns="0" rIns="0" bIns="0" rtlCol="0" anchor="ctr"/>
           <a:lstStyle/>
           <a:p>
-            <a:pPr marL="0" indent="0">
+            <a:pPr indent="0" marL="0">
               <a:buNone/>
             </a:pPr>
             <a:r>
@@ -11088,7 +11244,9 @@
             <a:ext cx="5431536" cy="2240280"/>
           </a:xfrm>
           <a:prstGeom prst="rect">
-            <a:avLst/>
+            <a:avLst>
+              <a:gd name="adj" fmla="val 3265"/>
+            </a:avLst>
           </a:prstGeom>
           <a:solidFill>
             <a:srgbClr val="F5F3FF"/>
@@ -11122,7 +11280,7 @@
           <a:bodyPr wrap="square" lIns="0" tIns="0" rIns="0" bIns="0" rtlCol="0" anchor="ctr"/>
           <a:lstStyle/>
           <a:p>
-            <a:pPr marL="0" indent="0">
+            <a:pPr indent="0" marL="0">
               <a:buNone/>
             </a:pPr>
             <a:r>
@@ -11161,7 +11319,7 @@
           <a:bodyPr wrap="square" lIns="0" tIns="0" rIns="0" bIns="0" rtlCol="0" anchor="ctr"/>
           <a:lstStyle/>
           <a:p>
-            <a:pPr marL="0" indent="0">
+            <a:pPr indent="0" marL="0">
               <a:buNone/>
             </a:pPr>
             <a:r>
@@ -11200,7 +11358,7 @@
           <a:bodyPr wrap="square" lIns="0" tIns="0" rIns="0" bIns="0" rtlCol="0" anchor="ctr"/>
           <a:lstStyle/>
           <a:p>
-            <a:pPr marL="0" indent="0">
+            <a:pPr indent="0" marL="0">
               <a:lnSpc>
                 <a:spcPct val="115000"/>
               </a:lnSpc>
@@ -11265,7 +11423,7 @@
           <a:bodyPr wrap="square" lIns="0" tIns="0" rIns="0" bIns="0" rtlCol="0" anchor="ctr"/>
           <a:lstStyle/>
           <a:p>
-            <a:pPr marL="0" indent="0">
+            <a:pPr indent="0" marL="0">
               <a:buNone/>
             </a:pPr>
             <a:r>
@@ -11304,7 +11462,7 @@
           <a:bodyPr wrap="square" rtlCol="0" anchor="ctr"/>
           <a:lstStyle/>
           <a:p>
-            <a:pPr marL="0" indent="0" algn="l">
+            <a:pPr algn="l" indent="0" marL="0">
               <a:buNone/>
             </a:pPr>
             <a:r>
@@ -11343,7 +11501,7 @@
           <a:bodyPr wrap="square" rtlCol="0" anchor="ctr"/>
           <a:lstStyle/>
           <a:p>
-            <a:pPr marL="0" indent="0" algn="r">
+            <a:pPr algn="r" indent="0" marL="0">
               <a:buNone/>
             </a:pPr>
             <a:r>
@@ -11377,7 +11535,6 @@
         <a:solidFill>
           <a:srgbClr val="FFFFFF"/>
         </a:solidFill>
-        <a:effectLst/>
       </p:bgPr>
     </p:bg>
     <p:spTree>
@@ -11415,11 +11572,11 @@
           <a:bodyPr wrap="square" lIns="0" tIns="0" rIns="0" bIns="0" rtlCol="0" anchor="ctr"/>
           <a:lstStyle/>
           <a:p>
-            <a:pPr marL="0" indent="0">
-              <a:buNone/>
-            </a:pPr>
-            <a:r>
-              <a:rPr lang="en-US" sz="1100" b="1" kern="0" spc="150" dirty="0">
+            <a:pPr indent="0" marL="0">
+              <a:buNone/>
+            </a:pPr>
+            <a:r>
+              <a:rPr lang="en-US" sz="1100" b="1" spc="150" kern="0" dirty="0">
                 <a:solidFill>
                   <a:srgbClr val="2C74B3"/>
                 </a:solidFill>
@@ -11454,7 +11611,7 @@
           <a:bodyPr wrap="square" lIns="0" tIns="0" rIns="0" bIns="0" rtlCol="0" anchor="ctr"/>
           <a:lstStyle/>
           <a:p>
-            <a:pPr marL="0" indent="0">
+            <a:pPr indent="0" marL="0">
               <a:buNone/>
             </a:pPr>
             <a:r>
@@ -11488,55 +11645,19 @@
         </p:nvGraphicFramePr>
         <p:xfrm>
           <a:off x="502920" y="1280160"/>
-          <a:ext cx="11155680" cy="4937757"/>
+          <a:ext cx="11183112" cy="4937760"/>
         </p:xfrm>
         <a:graphic>
           <a:graphicData uri="http://schemas.openxmlformats.org/drawingml/2006/table">
             <a:tbl>
               <a:tblPr/>
               <a:tblGrid>
-                <a:gridCol w="502920">
-                  <a:extLst>
-                    <a:ext uri="{9D8B030D-6E8A-4147-A177-3AD203B41FA5}">
-                      <a16:colId xmlns:a16="http://schemas.microsoft.com/office/drawing/2014/main" val="20000"/>
-                    </a:ext>
-                  </a:extLst>
-                </a:gridCol>
-                <a:gridCol w="2468880">
-                  <a:extLst>
-                    <a:ext uri="{9D8B030D-6E8A-4147-A177-3AD203B41FA5}">
-                      <a16:colId xmlns:a16="http://schemas.microsoft.com/office/drawing/2014/main" val="20001"/>
-                    </a:ext>
-                  </a:extLst>
-                </a:gridCol>
-                <a:gridCol w="1463040">
-                  <a:extLst>
-                    <a:ext uri="{9D8B030D-6E8A-4147-A177-3AD203B41FA5}">
-                      <a16:colId xmlns:a16="http://schemas.microsoft.com/office/drawing/2014/main" val="20002"/>
-                    </a:ext>
-                  </a:extLst>
-                </a:gridCol>
-                <a:gridCol w="2103120">
-                  <a:extLst>
-                    <a:ext uri="{9D8B030D-6E8A-4147-A177-3AD203B41FA5}">
-                      <a16:colId xmlns:a16="http://schemas.microsoft.com/office/drawing/2014/main" val="20003"/>
-                    </a:ext>
-                  </a:extLst>
-                </a:gridCol>
-                <a:gridCol w="2057400">
-                  <a:extLst>
-                    <a:ext uri="{9D8B030D-6E8A-4147-A177-3AD203B41FA5}">
-                      <a16:colId xmlns:a16="http://schemas.microsoft.com/office/drawing/2014/main" val="20004"/>
-                    </a:ext>
-                  </a:extLst>
-                </a:gridCol>
-                <a:gridCol w="2560320">
-                  <a:extLst>
-                    <a:ext uri="{9D8B030D-6E8A-4147-A177-3AD203B41FA5}">
-                      <a16:colId xmlns:a16="http://schemas.microsoft.com/office/drawing/2014/main" val="20005"/>
-                    </a:ext>
-                  </a:extLst>
-                </a:gridCol>
+                <a:gridCol w="502920"/>
+                <a:gridCol w="2468880"/>
+                <a:gridCol w="1463040"/>
+                <a:gridCol w="2103120"/>
+                <a:gridCol w="2057400"/>
+                <a:gridCol w="2560320"/>
               </a:tblGrid>
               <a:tr h="448887">
                 <a:tc>
@@ -11544,7 +11665,7 @@
                     <a:bodyPr/>
                     <a:lstStyle/>
                     <a:p>
-                      <a:pPr marL="0" indent="0" algn="ctr">
+                      <a:pPr algn="ctr" indent="0" marL="0">
                         <a:buNone/>
                       </a:pPr>
                       <a:r>
@@ -11605,7 +11726,7 @@
                     <a:bodyPr/>
                     <a:lstStyle/>
                     <a:p>
-                      <a:pPr marL="0" indent="0">
+                      <a:pPr indent="0" marL="0">
                         <a:buNone/>
                       </a:pPr>
                       <a:r>
@@ -11666,7 +11787,7 @@
                     <a:bodyPr/>
                     <a:lstStyle/>
                     <a:p>
-                      <a:pPr marL="0" indent="0" algn="ctr">
+                      <a:pPr algn="ctr" indent="0" marL="0">
                         <a:buNone/>
                       </a:pPr>
                       <a:r>
@@ -11727,7 +11848,7 @@
                     <a:bodyPr/>
                     <a:lstStyle/>
                     <a:p>
-                      <a:pPr marL="0" indent="0">
+                      <a:pPr indent="0" marL="0">
                         <a:buNone/>
                       </a:pPr>
                       <a:r>
@@ -11788,7 +11909,7 @@
                     <a:bodyPr/>
                     <a:lstStyle/>
                     <a:p>
-                      <a:pPr marL="0" indent="0">
+                      <a:pPr indent="0" marL="0">
                         <a:buNone/>
                       </a:pPr>
                       <a:r>
@@ -11849,7 +11970,7 @@
                     <a:bodyPr/>
                     <a:lstStyle/>
                     <a:p>
-                      <a:pPr marL="0" indent="0">
+                      <a:pPr indent="0" marL="0">
                         <a:buNone/>
                       </a:pPr>
                       <a:r>
@@ -11905,11 +12026,6 @@
                     </a:solidFill>
                   </a:tcPr>
                 </a:tc>
-                <a:extLst>
-                  <a:ext uri="{0D108BD9-81ED-4DB2-BD59-A6C34878D82A}">
-                    <a16:rowId xmlns:a16="http://schemas.microsoft.com/office/drawing/2014/main" val="10000"/>
-                  </a:ext>
-                </a:extLst>
               </a:tr>
               <a:tr h="448887">
                 <a:tc>
@@ -11917,7 +12033,7 @@
                     <a:bodyPr/>
                     <a:lstStyle/>
                     <a:p>
-                      <a:pPr marL="0" indent="0" algn="ctr">
+                      <a:pPr algn="ctr" indent="0" marL="0">
                         <a:buNone/>
                       </a:pPr>
                       <a:r>
@@ -11978,7 +12094,7 @@
                     <a:bodyPr/>
                     <a:lstStyle/>
                     <a:p>
-                      <a:pPr marL="0" indent="0">
+                      <a:pPr indent="0" marL="0">
                         <a:buNone/>
                       </a:pPr>
                       <a:r>
@@ -12039,7 +12155,7 @@
                     <a:bodyPr/>
                     <a:lstStyle/>
                     <a:p>
-                      <a:pPr marL="0" indent="0" algn="ctr">
+                      <a:pPr algn="ctr" indent="0" marL="0">
                         <a:buNone/>
                       </a:pPr>
                       <a:r>
@@ -12100,7 +12216,7 @@
                     <a:bodyPr/>
                     <a:lstStyle/>
                     <a:p>
-                      <a:pPr marL="0" indent="0">
+                      <a:pPr indent="0" marL="0">
                         <a:buNone/>
                       </a:pPr>
                       <a:r>
@@ -12161,7 +12277,7 @@
                     <a:bodyPr/>
                     <a:lstStyle/>
                     <a:p>
-                      <a:pPr marL="0" indent="0">
+                      <a:pPr indent="0" marL="0">
                         <a:buNone/>
                       </a:pPr>
                       <a:r>
@@ -12222,7 +12338,7 @@
                     <a:bodyPr/>
                     <a:lstStyle/>
                     <a:p>
-                      <a:pPr marL="0" indent="0">
+                      <a:pPr indent="0" marL="0">
                         <a:buNone/>
                       </a:pPr>
                       <a:r>
@@ -12278,11 +12394,6 @@
                     </a:solidFill>
                   </a:tcPr>
                 </a:tc>
-                <a:extLst>
-                  <a:ext uri="{0D108BD9-81ED-4DB2-BD59-A6C34878D82A}">
-                    <a16:rowId xmlns:a16="http://schemas.microsoft.com/office/drawing/2014/main" val="10001"/>
-                  </a:ext>
-                </a:extLst>
               </a:tr>
               <a:tr h="448887">
                 <a:tc>
@@ -12290,7 +12401,7 @@
                     <a:bodyPr/>
                     <a:lstStyle/>
                     <a:p>
-                      <a:pPr marL="0" indent="0" algn="ctr">
+                      <a:pPr algn="ctr" indent="0" marL="0">
                         <a:buNone/>
                       </a:pPr>
                       <a:r>
@@ -12351,7 +12462,7 @@
                     <a:bodyPr/>
                     <a:lstStyle/>
                     <a:p>
-                      <a:pPr marL="0" indent="0">
+                      <a:pPr indent="0" marL="0">
                         <a:buNone/>
                       </a:pPr>
                       <a:r>
@@ -12412,7 +12523,7 @@
                     <a:bodyPr/>
                     <a:lstStyle/>
                     <a:p>
-                      <a:pPr marL="0" indent="0" algn="ctr">
+                      <a:pPr algn="ctr" indent="0" marL="0">
                         <a:buNone/>
                       </a:pPr>
                       <a:r>
@@ -12473,7 +12584,7 @@
                     <a:bodyPr/>
                     <a:lstStyle/>
                     <a:p>
-                      <a:pPr marL="0" indent="0">
+                      <a:pPr indent="0" marL="0">
                         <a:buNone/>
                       </a:pPr>
                       <a:r>
@@ -12534,7 +12645,7 @@
                     <a:bodyPr/>
                     <a:lstStyle/>
                     <a:p>
-                      <a:pPr marL="0" indent="0">
+                      <a:pPr indent="0" marL="0">
                         <a:buNone/>
                       </a:pPr>
                       <a:r>
@@ -12595,7 +12706,7 @@
                     <a:bodyPr/>
                     <a:lstStyle/>
                     <a:p>
-                      <a:pPr marL="0" indent="0">
+                      <a:pPr indent="0" marL="0">
                         <a:buNone/>
                       </a:pPr>
                       <a:r>
@@ -12651,11 +12762,6 @@
                     </a:solidFill>
                   </a:tcPr>
                 </a:tc>
-                <a:extLst>
-                  <a:ext uri="{0D108BD9-81ED-4DB2-BD59-A6C34878D82A}">
-                    <a16:rowId xmlns:a16="http://schemas.microsoft.com/office/drawing/2014/main" val="10002"/>
-                  </a:ext>
-                </a:extLst>
               </a:tr>
               <a:tr h="448887">
                 <a:tc>
@@ -12663,7 +12769,7 @@
                     <a:bodyPr/>
                     <a:lstStyle/>
                     <a:p>
-                      <a:pPr marL="0" indent="0" algn="ctr">
+                      <a:pPr algn="ctr" indent="0" marL="0">
                         <a:buNone/>
                       </a:pPr>
                       <a:r>
@@ -12724,7 +12830,7 @@
                     <a:bodyPr/>
                     <a:lstStyle/>
                     <a:p>
-                      <a:pPr marL="0" indent="0">
+                      <a:pPr indent="0" marL="0">
                         <a:buNone/>
                       </a:pPr>
                       <a:r>
@@ -12785,7 +12891,7 @@
                     <a:bodyPr/>
                     <a:lstStyle/>
                     <a:p>
-                      <a:pPr marL="0" indent="0" algn="ctr">
+                      <a:pPr algn="ctr" indent="0" marL="0">
                         <a:buNone/>
                       </a:pPr>
                       <a:r>
@@ -12846,7 +12952,7 @@
                     <a:bodyPr/>
                     <a:lstStyle/>
                     <a:p>
-                      <a:pPr marL="0" indent="0">
+                      <a:pPr indent="0" marL="0">
                         <a:buNone/>
                       </a:pPr>
                       <a:r>
@@ -12907,7 +13013,7 @@
                     <a:bodyPr/>
                     <a:lstStyle/>
                     <a:p>
-                      <a:pPr marL="0" indent="0">
+                      <a:pPr indent="0" marL="0">
                         <a:buNone/>
                       </a:pPr>
                       <a:r>
@@ -12968,7 +13074,7 @@
                     <a:bodyPr/>
                     <a:lstStyle/>
                     <a:p>
-                      <a:pPr marL="0" indent="0">
+                      <a:pPr indent="0" marL="0">
                         <a:buNone/>
                       </a:pPr>
                       <a:r>
@@ -13024,11 +13130,6 @@
                     </a:solidFill>
                   </a:tcPr>
                 </a:tc>
-                <a:extLst>
-                  <a:ext uri="{0D108BD9-81ED-4DB2-BD59-A6C34878D82A}">
-                    <a16:rowId xmlns:a16="http://schemas.microsoft.com/office/drawing/2014/main" val="10003"/>
-                  </a:ext>
-                </a:extLst>
               </a:tr>
               <a:tr h="448887">
                 <a:tc>
@@ -13036,7 +13137,7 @@
                     <a:bodyPr/>
                     <a:lstStyle/>
                     <a:p>
-                      <a:pPr marL="0" indent="0" algn="ctr">
+                      <a:pPr algn="ctr" indent="0" marL="0">
                         <a:buNone/>
                       </a:pPr>
                       <a:r>
@@ -13097,7 +13198,7 @@
                     <a:bodyPr/>
                     <a:lstStyle/>
                     <a:p>
-                      <a:pPr marL="0" indent="0">
+                      <a:pPr indent="0" marL="0">
                         <a:buNone/>
                       </a:pPr>
                       <a:r>
@@ -13158,7 +13259,7 @@
                     <a:bodyPr/>
                     <a:lstStyle/>
                     <a:p>
-                      <a:pPr marL="0" indent="0" algn="ctr">
+                      <a:pPr algn="ctr" indent="0" marL="0">
                         <a:buNone/>
                       </a:pPr>
                       <a:r>
@@ -13219,7 +13320,7 @@
                     <a:bodyPr/>
                     <a:lstStyle/>
                     <a:p>
-                      <a:pPr marL="0" indent="0">
+                      <a:pPr indent="0" marL="0">
                         <a:buNone/>
                       </a:pPr>
                       <a:r>
@@ -13280,7 +13381,7 @@
                     <a:bodyPr/>
                     <a:lstStyle/>
                     <a:p>
-                      <a:pPr marL="0" indent="0">
+                      <a:pPr indent="0" marL="0">
                         <a:buNone/>
                       </a:pPr>
                       <a:r>
@@ -13341,7 +13442,7 @@
                     <a:bodyPr/>
                     <a:lstStyle/>
                     <a:p>
-                      <a:pPr marL="0" indent="0">
+                      <a:pPr indent="0" marL="0">
                         <a:buNone/>
                       </a:pPr>
                       <a:r>
@@ -13397,11 +13498,6 @@
                     </a:solidFill>
                   </a:tcPr>
                 </a:tc>
-                <a:extLst>
-                  <a:ext uri="{0D108BD9-81ED-4DB2-BD59-A6C34878D82A}">
-                    <a16:rowId xmlns:a16="http://schemas.microsoft.com/office/drawing/2014/main" val="10004"/>
-                  </a:ext>
-                </a:extLst>
               </a:tr>
               <a:tr h="448887">
                 <a:tc>
@@ -13409,7 +13505,7 @@
                     <a:bodyPr/>
                     <a:lstStyle/>
                     <a:p>
-                      <a:pPr marL="0" indent="0" algn="ctr">
+                      <a:pPr algn="ctr" indent="0" marL="0">
                         <a:buNone/>
                       </a:pPr>
                       <a:r>
@@ -13470,7 +13566,7 @@
                     <a:bodyPr/>
                     <a:lstStyle/>
                     <a:p>
-                      <a:pPr marL="0" indent="0">
+                      <a:pPr indent="0" marL="0">
                         <a:buNone/>
                       </a:pPr>
                       <a:r>
@@ -13531,7 +13627,7 @@
                     <a:bodyPr/>
                     <a:lstStyle/>
                     <a:p>
-                      <a:pPr marL="0" indent="0" algn="ctr">
+                      <a:pPr algn="ctr" indent="0" marL="0">
                         <a:buNone/>
                       </a:pPr>
                       <a:r>
@@ -13592,7 +13688,7 @@
                     <a:bodyPr/>
                     <a:lstStyle/>
                     <a:p>
-                      <a:pPr marL="0" indent="0">
+                      <a:pPr indent="0" marL="0">
                         <a:buNone/>
                       </a:pPr>
                       <a:r>
@@ -13653,7 +13749,7 @@
                     <a:bodyPr/>
                     <a:lstStyle/>
                     <a:p>
-                      <a:pPr marL="0" indent="0">
+                      <a:pPr indent="0" marL="0">
                         <a:buNone/>
                       </a:pPr>
                       <a:r>
@@ -13714,7 +13810,7 @@
                     <a:bodyPr/>
                     <a:lstStyle/>
                     <a:p>
-                      <a:pPr marL="0" indent="0">
+                      <a:pPr indent="0" marL="0">
                         <a:buNone/>
                       </a:pPr>
                       <a:r>
@@ -13770,11 +13866,6 @@
                     </a:solidFill>
                   </a:tcPr>
                 </a:tc>
-                <a:extLst>
-                  <a:ext uri="{0D108BD9-81ED-4DB2-BD59-A6C34878D82A}">
-                    <a16:rowId xmlns:a16="http://schemas.microsoft.com/office/drawing/2014/main" val="10005"/>
-                  </a:ext>
-                </a:extLst>
               </a:tr>
               <a:tr h="448887">
                 <a:tc>
@@ -13782,7 +13873,7 @@
                     <a:bodyPr/>
                     <a:lstStyle/>
                     <a:p>
-                      <a:pPr marL="0" indent="0" algn="ctr">
+                      <a:pPr algn="ctr" indent="0" marL="0">
                         <a:buNone/>
                       </a:pPr>
                       <a:r>
@@ -13843,7 +13934,7 @@
                     <a:bodyPr/>
                     <a:lstStyle/>
                     <a:p>
-                      <a:pPr marL="0" indent="0">
+                      <a:pPr indent="0" marL="0">
                         <a:buNone/>
                       </a:pPr>
                       <a:r>
@@ -13904,7 +13995,7 @@
                     <a:bodyPr/>
                     <a:lstStyle/>
                     <a:p>
-                      <a:pPr marL="0" indent="0" algn="ctr">
+                      <a:pPr algn="ctr" indent="0" marL="0">
                         <a:buNone/>
                       </a:pPr>
                       <a:r>
@@ -13965,7 +14056,7 @@
                     <a:bodyPr/>
                     <a:lstStyle/>
                     <a:p>
-                      <a:pPr marL="0" indent="0">
+                      <a:pPr indent="0" marL="0">
                         <a:buNone/>
                       </a:pPr>
                       <a:r>
@@ -14026,7 +14117,7 @@
                     <a:bodyPr/>
                     <a:lstStyle/>
                     <a:p>
-                      <a:pPr marL="0" indent="0">
+                      <a:pPr indent="0" marL="0">
                         <a:buNone/>
                       </a:pPr>
                       <a:r>
@@ -14087,7 +14178,7 @@
                     <a:bodyPr/>
                     <a:lstStyle/>
                     <a:p>
-                      <a:pPr marL="0" indent="0">
+                      <a:pPr indent="0" marL="0">
                         <a:buNone/>
                       </a:pPr>
                       <a:r>
@@ -14143,11 +14234,6 @@
                     </a:solidFill>
                   </a:tcPr>
                 </a:tc>
-                <a:extLst>
-                  <a:ext uri="{0D108BD9-81ED-4DB2-BD59-A6C34878D82A}">
-                    <a16:rowId xmlns:a16="http://schemas.microsoft.com/office/drawing/2014/main" val="10006"/>
-                  </a:ext>
-                </a:extLst>
               </a:tr>
               <a:tr h="448887">
                 <a:tc>
@@ -14155,7 +14241,7 @@
                     <a:bodyPr/>
                     <a:lstStyle/>
                     <a:p>
-                      <a:pPr marL="0" indent="0" algn="ctr">
+                      <a:pPr algn="ctr" indent="0" marL="0">
                         <a:buNone/>
                       </a:pPr>
                       <a:r>
@@ -14216,7 +14302,7 @@
                     <a:bodyPr/>
                     <a:lstStyle/>
                     <a:p>
-                      <a:pPr marL="0" indent="0">
+                      <a:pPr indent="0" marL="0">
                         <a:buNone/>
                       </a:pPr>
                       <a:r>
@@ -14277,7 +14363,7 @@
                     <a:bodyPr/>
                     <a:lstStyle/>
                     <a:p>
-                      <a:pPr marL="0" indent="0" algn="ctr">
+                      <a:pPr algn="ctr" indent="0" marL="0">
                         <a:buNone/>
                       </a:pPr>
                       <a:r>
@@ -14338,7 +14424,7 @@
                     <a:bodyPr/>
                     <a:lstStyle/>
                     <a:p>
-                      <a:pPr marL="0" indent="0">
+                      <a:pPr indent="0" marL="0">
                         <a:buNone/>
                       </a:pPr>
                       <a:r>
@@ -14399,7 +14485,7 @@
                     <a:bodyPr/>
                     <a:lstStyle/>
                     <a:p>
-                      <a:pPr marL="0" indent="0">
+                      <a:pPr indent="0" marL="0">
                         <a:buNone/>
                       </a:pPr>
                       <a:r>
@@ -14460,7 +14546,7 @@
                     <a:bodyPr/>
                     <a:lstStyle/>
                     <a:p>
-                      <a:pPr marL="0" indent="0">
+                      <a:pPr indent="0" marL="0">
                         <a:buNone/>
                       </a:pPr>
                       <a:r>
@@ -14516,11 +14602,6 @@
                     </a:solidFill>
                   </a:tcPr>
                 </a:tc>
-                <a:extLst>
-                  <a:ext uri="{0D108BD9-81ED-4DB2-BD59-A6C34878D82A}">
-                    <a16:rowId xmlns:a16="http://schemas.microsoft.com/office/drawing/2014/main" val="10007"/>
-                  </a:ext>
-                </a:extLst>
               </a:tr>
               <a:tr h="448887">
                 <a:tc>
@@ -14528,7 +14609,7 @@
                     <a:bodyPr/>
                     <a:lstStyle/>
                     <a:p>
-                      <a:pPr marL="0" indent="0" algn="ctr">
+                      <a:pPr algn="ctr" indent="0" marL="0">
                         <a:buNone/>
                       </a:pPr>
                       <a:r>
@@ -14589,7 +14670,7 @@
                     <a:bodyPr/>
                     <a:lstStyle/>
                     <a:p>
-                      <a:pPr marL="0" indent="0">
+                      <a:pPr indent="0" marL="0">
                         <a:buNone/>
                       </a:pPr>
                       <a:r>
@@ -14650,7 +14731,7 @@
                     <a:bodyPr/>
                     <a:lstStyle/>
                     <a:p>
-                      <a:pPr marL="0" indent="0" algn="ctr">
+                      <a:pPr algn="ctr" indent="0" marL="0">
                         <a:buNone/>
                       </a:pPr>
                       <a:r>
@@ -14711,7 +14792,7 @@
                     <a:bodyPr/>
                     <a:lstStyle/>
                     <a:p>
-                      <a:pPr marL="0" indent="0">
+                      <a:pPr indent="0" marL="0">
                         <a:buNone/>
                       </a:pPr>
                       <a:r>
@@ -14772,7 +14853,7 @@
                     <a:bodyPr/>
                     <a:lstStyle/>
                     <a:p>
-                      <a:pPr marL="0" indent="0">
+                      <a:pPr indent="0" marL="0">
                         <a:buNone/>
                       </a:pPr>
                       <a:r>
@@ -14833,7 +14914,7 @@
                     <a:bodyPr/>
                     <a:lstStyle/>
                     <a:p>
-                      <a:pPr marL="0" indent="0">
+                      <a:pPr indent="0" marL="0">
                         <a:buNone/>
                       </a:pPr>
                       <a:r>
@@ -14889,11 +14970,6 @@
                     </a:solidFill>
                   </a:tcPr>
                 </a:tc>
-                <a:extLst>
-                  <a:ext uri="{0D108BD9-81ED-4DB2-BD59-A6C34878D82A}">
-                    <a16:rowId xmlns:a16="http://schemas.microsoft.com/office/drawing/2014/main" val="10008"/>
-                  </a:ext>
-                </a:extLst>
               </a:tr>
               <a:tr h="448887">
                 <a:tc>
@@ -14901,7 +14977,7 @@
                     <a:bodyPr/>
                     <a:lstStyle/>
                     <a:p>
-                      <a:pPr marL="0" indent="0" algn="ctr">
+                      <a:pPr algn="ctr" indent="0" marL="0">
                         <a:buNone/>
                       </a:pPr>
                       <a:r>
@@ -14962,7 +15038,7 @@
                     <a:bodyPr/>
                     <a:lstStyle/>
                     <a:p>
-                      <a:pPr marL="0" indent="0">
+                      <a:pPr indent="0" marL="0">
                         <a:buNone/>
                       </a:pPr>
                       <a:r>
@@ -15023,7 +15099,7 @@
                     <a:bodyPr/>
                     <a:lstStyle/>
                     <a:p>
-                      <a:pPr marL="0" indent="0" algn="ctr">
+                      <a:pPr algn="ctr" indent="0" marL="0">
                         <a:buNone/>
                       </a:pPr>
                       <a:r>
@@ -15084,7 +15160,7 @@
                     <a:bodyPr/>
                     <a:lstStyle/>
                     <a:p>
-                      <a:pPr marL="0" indent="0">
+                      <a:pPr indent="0" marL="0">
                         <a:buNone/>
                       </a:pPr>
                       <a:r>
@@ -15145,7 +15221,7 @@
                     <a:bodyPr/>
                     <a:lstStyle/>
                     <a:p>
-                      <a:pPr marL="0" indent="0">
+                      <a:pPr indent="0" marL="0">
                         <a:buNone/>
                       </a:pPr>
                       <a:r>
@@ -15206,7 +15282,7 @@
                     <a:bodyPr/>
                     <a:lstStyle/>
                     <a:p>
-                      <a:pPr marL="0" indent="0">
+                      <a:pPr indent="0" marL="0">
                         <a:buNone/>
                       </a:pPr>
                       <a:r>
@@ -15262,11 +15338,6 @@
                     </a:solidFill>
                   </a:tcPr>
                 </a:tc>
-                <a:extLst>
-                  <a:ext uri="{0D108BD9-81ED-4DB2-BD59-A6C34878D82A}">
-                    <a16:rowId xmlns:a16="http://schemas.microsoft.com/office/drawing/2014/main" val="10009"/>
-                  </a:ext>
-                </a:extLst>
               </a:tr>
               <a:tr h="448887">
                 <a:tc>
@@ -15274,7 +15345,7 @@
                     <a:bodyPr/>
                     <a:lstStyle/>
                     <a:p>
-                      <a:pPr marL="0" indent="0" algn="ctr">
+                      <a:pPr algn="ctr" indent="0" marL="0">
                         <a:buNone/>
                       </a:pPr>
                       <a:r>
@@ -15335,7 +15406,7 @@
                     <a:bodyPr/>
                     <a:lstStyle/>
                     <a:p>
-                      <a:pPr marL="0" indent="0">
+                      <a:pPr indent="0" marL="0">
                         <a:buNone/>
                       </a:pPr>
                       <a:r>
@@ -15396,7 +15467,7 @@
                     <a:bodyPr/>
                     <a:lstStyle/>
                     <a:p>
-                      <a:pPr marL="0" indent="0" algn="ctr">
+                      <a:pPr algn="ctr" indent="0" marL="0">
                         <a:buNone/>
                       </a:pPr>
                       <a:r>
@@ -15457,7 +15528,7 @@
                     <a:bodyPr/>
                     <a:lstStyle/>
                     <a:p>
-                      <a:pPr marL="0" indent="0">
+                      <a:pPr indent="0" marL="0">
                         <a:buNone/>
                       </a:pPr>
                       <a:r>
@@ -15518,7 +15589,7 @@
                     <a:bodyPr/>
                     <a:lstStyle/>
                     <a:p>
-                      <a:pPr marL="0" indent="0">
+                      <a:pPr indent="0" marL="0">
                         <a:buNone/>
                       </a:pPr>
                       <a:r>
@@ -15579,7 +15650,7 @@
                     <a:bodyPr/>
                     <a:lstStyle/>
                     <a:p>
-                      <a:pPr marL="0" indent="0">
+                      <a:pPr indent="0" marL="0">
                         <a:buNone/>
                       </a:pPr>
                       <a:r>
@@ -15635,11 +15706,6 @@
                     </a:solidFill>
                   </a:tcPr>
                 </a:tc>
-                <a:extLst>
-                  <a:ext uri="{0D108BD9-81ED-4DB2-BD59-A6C34878D82A}">
-                    <a16:rowId xmlns:a16="http://schemas.microsoft.com/office/drawing/2014/main" val="10010"/>
-                  </a:ext>
-                </a:extLst>
               </a:tr>
             </a:tbl>
           </a:graphicData>
@@ -15666,7 +15732,7 @@
           <a:bodyPr wrap="square" rtlCol="0" anchor="ctr"/>
           <a:lstStyle/>
           <a:p>
-            <a:pPr marL="0" indent="0" algn="l">
+            <a:pPr algn="l" indent="0" marL="0">
               <a:buNone/>
             </a:pPr>
             <a:r>
@@ -15686,7 +15752,7 @@
       </p:sp>
       <p:sp>
         <p:nvSpPr>
-          <p:cNvPr id="4" name="Text 3"/>
+          <p:cNvPr id="6" name="Text 3"/>
           <p:cNvSpPr/>
           <p:nvPr/>
         </p:nvSpPr>
@@ -15705,7 +15771,7 @@
           <a:bodyPr wrap="square" rtlCol="0" anchor="ctr"/>
           <a:lstStyle/>
           <a:p>
-            <a:pPr marL="0" indent="0" algn="r">
+            <a:pPr algn="r" indent="0" marL="0">
               <a:buNone/>
             </a:pPr>
             <a:r>
@@ -15739,7 +15805,6 @@
         <a:solidFill>
           <a:srgbClr val="FFFFFF"/>
         </a:solidFill>
-        <a:effectLst/>
       </p:bgPr>
     </p:bg>
     <p:spTree>
@@ -15777,11 +15842,11 @@
           <a:bodyPr wrap="square" lIns="0" tIns="0" rIns="0" bIns="0" rtlCol="0" anchor="ctr"/>
           <a:lstStyle/>
           <a:p>
-            <a:pPr marL="0" indent="0">
-              <a:buNone/>
-            </a:pPr>
-            <a:r>
-              <a:rPr lang="en-US" sz="1100" b="1" kern="0" spc="150" dirty="0">
+            <a:pPr indent="0" marL="0">
+              <a:buNone/>
+            </a:pPr>
+            <a:r>
+              <a:rPr lang="en-US" sz="1100" b="1" spc="150" kern="0" dirty="0">
                 <a:solidFill>
                   <a:srgbClr val="2C74B3"/>
                 </a:solidFill>
@@ -15816,7 +15881,7 @@
           <a:bodyPr wrap="square" lIns="0" tIns="0" rIns="0" bIns="0" rtlCol="0" anchor="ctr"/>
           <a:lstStyle/>
           <a:p>
-            <a:pPr marL="0" indent="0">
+            <a:pPr indent="0" marL="0">
               <a:buNone/>
             </a:pPr>
             <a:r>
@@ -15846,7 +15911,9 @@
             <a:ext cx="11183112" cy="896112"/>
           </a:xfrm>
           <a:prstGeom prst="rect">
-            <a:avLst/>
+            <a:avLst>
+              <a:gd name="adj" fmla="val 8163"/>
+            </a:avLst>
           </a:prstGeom>
           <a:solidFill>
             <a:srgbClr val="F8FAFC"/>
@@ -15871,7 +15938,9 @@
             <a:ext cx="594360" cy="621792"/>
           </a:xfrm>
           <a:prstGeom prst="rect">
-            <a:avLst/>
+            <a:avLst>
+              <a:gd name="adj" fmla="val 7692"/>
+            </a:avLst>
           </a:prstGeom>
           <a:solidFill>
             <a:srgbClr val="0A2647"/>
@@ -15900,7 +15969,7 @@
           <a:bodyPr wrap="square" lIns="0" tIns="0" rIns="0" bIns="0" rtlCol="0" anchor="ctr"/>
           <a:lstStyle/>
           <a:p>
-            <a:pPr marL="0" indent="0" algn="ctr">
+            <a:pPr algn="ctr" indent="0" marL="0">
               <a:buNone/>
             </a:pPr>
             <a:r>
@@ -15939,7 +16008,7 @@
           <a:bodyPr wrap="square" lIns="0" tIns="0" rIns="0" bIns="0" rtlCol="0" anchor="ctr"/>
           <a:lstStyle/>
           <a:p>
-            <a:pPr marL="0" indent="0">
+            <a:pPr indent="0" marL="0">
               <a:buNone/>
             </a:pPr>
             <a:r>
@@ -15978,7 +16047,7 @@
           <a:bodyPr wrap="square" lIns="0" tIns="0" rIns="0" bIns="0" rtlCol="0" anchor="ctr"/>
           <a:lstStyle/>
           <a:p>
-            <a:pPr marL="0" indent="0">
+            <a:pPr indent="0" marL="0">
               <a:lnSpc>
                 <a:spcPct val="110000"/>
               </a:lnSpc>
@@ -16020,7 +16089,7 @@
           <a:bodyPr wrap="square" lIns="0" tIns="0" rIns="0" bIns="0" rtlCol="0" anchor="ctr"/>
           <a:lstStyle/>
           <a:p>
-            <a:pPr marL="0" indent="0">
+            <a:pPr indent="0" marL="0">
               <a:buNone/>
             </a:pPr>
             <a:r>
@@ -16050,7 +16119,9 @@
             <a:ext cx="5102352" cy="713232"/>
           </a:xfrm>
           <a:prstGeom prst="rect">
-            <a:avLst/>
+            <a:avLst>
+              <a:gd name="adj" fmla="val 6410"/>
+            </a:avLst>
           </a:prstGeom>
           <a:solidFill>
             <a:srgbClr val="F0FDF4"/>
@@ -16084,7 +16155,7 @@
           <a:bodyPr wrap="square" lIns="0" tIns="0" rIns="0" bIns="0" rtlCol="0" anchor="ctr"/>
           <a:lstStyle/>
           <a:p>
-            <a:pPr marL="0" indent="0">
+            <a:pPr indent="0" marL="0">
               <a:lnSpc>
                 <a:spcPct val="115000"/>
               </a:lnSpc>
@@ -16117,7 +16188,9 @@
             <a:ext cx="11183112" cy="896112"/>
           </a:xfrm>
           <a:prstGeom prst="rect">
-            <a:avLst/>
+            <a:avLst>
+              <a:gd name="adj" fmla="val 8163"/>
+            </a:avLst>
           </a:prstGeom>
           <a:solidFill>
             <a:srgbClr val="F8FAFC"/>
@@ -16142,7 +16215,9 @@
             <a:ext cx="594360" cy="621792"/>
           </a:xfrm>
           <a:prstGeom prst="rect">
-            <a:avLst/>
+            <a:avLst>
+              <a:gd name="adj" fmla="val 7692"/>
+            </a:avLst>
           </a:prstGeom>
           <a:solidFill>
             <a:srgbClr val="0A2647"/>
@@ -16171,7 +16246,7 @@
           <a:bodyPr wrap="square" lIns="0" tIns="0" rIns="0" bIns="0" rtlCol="0" anchor="ctr"/>
           <a:lstStyle/>
           <a:p>
-            <a:pPr marL="0" indent="0" algn="ctr">
+            <a:pPr algn="ctr" indent="0" marL="0">
               <a:buNone/>
             </a:pPr>
             <a:r>
@@ -16210,7 +16285,7 @@
           <a:bodyPr wrap="square" lIns="0" tIns="0" rIns="0" bIns="0" rtlCol="0" anchor="ctr"/>
           <a:lstStyle/>
           <a:p>
-            <a:pPr marL="0" indent="0">
+            <a:pPr indent="0" marL="0">
               <a:buNone/>
             </a:pPr>
             <a:r>
@@ -16249,7 +16324,7 @@
           <a:bodyPr wrap="square" lIns="0" tIns="0" rIns="0" bIns="0" rtlCol="0" anchor="ctr"/>
           <a:lstStyle/>
           <a:p>
-            <a:pPr marL="0" indent="0">
+            <a:pPr indent="0" marL="0">
               <a:lnSpc>
                 <a:spcPct val="110000"/>
               </a:lnSpc>
@@ -16291,7 +16366,7 @@
           <a:bodyPr wrap="square" lIns="0" tIns="0" rIns="0" bIns="0" rtlCol="0" anchor="ctr"/>
           <a:lstStyle/>
           <a:p>
-            <a:pPr marL="0" indent="0">
+            <a:pPr indent="0" marL="0">
               <a:buNone/>
             </a:pPr>
             <a:r>
@@ -16321,7 +16396,9 @@
             <a:ext cx="5102352" cy="713232"/>
           </a:xfrm>
           <a:prstGeom prst="rect">
-            <a:avLst/>
+            <a:avLst>
+              <a:gd name="adj" fmla="val 6410"/>
+            </a:avLst>
           </a:prstGeom>
           <a:solidFill>
             <a:srgbClr val="F0FDF4"/>
@@ -16355,7 +16432,7 @@
           <a:bodyPr wrap="square" lIns="0" tIns="0" rIns="0" bIns="0" rtlCol="0" anchor="ctr"/>
           <a:lstStyle/>
           <a:p>
-            <a:pPr marL="0" indent="0">
+            <a:pPr indent="0" marL="0">
               <a:lnSpc>
                 <a:spcPct val="115000"/>
               </a:lnSpc>
@@ -16388,7 +16465,9 @@
             <a:ext cx="11183112" cy="896112"/>
           </a:xfrm>
           <a:prstGeom prst="rect">
-            <a:avLst/>
+            <a:avLst>
+              <a:gd name="adj" fmla="val 8163"/>
+            </a:avLst>
           </a:prstGeom>
           <a:solidFill>
             <a:srgbClr val="F8FAFC"/>
@@ -16413,7 +16492,9 @@
             <a:ext cx="594360" cy="621792"/>
           </a:xfrm>
           <a:prstGeom prst="rect">
-            <a:avLst/>
+            <a:avLst>
+              <a:gd name="adj" fmla="val 7692"/>
+            </a:avLst>
           </a:prstGeom>
           <a:solidFill>
             <a:srgbClr val="0A2647"/>
@@ -16442,7 +16523,7 @@
           <a:bodyPr wrap="square" lIns="0" tIns="0" rIns="0" bIns="0" rtlCol="0" anchor="ctr"/>
           <a:lstStyle/>
           <a:p>
-            <a:pPr marL="0" indent="0" algn="ctr">
+            <a:pPr algn="ctr" indent="0" marL="0">
               <a:buNone/>
             </a:pPr>
             <a:r>
@@ -16481,7 +16562,7 @@
           <a:bodyPr wrap="square" lIns="0" tIns="0" rIns="0" bIns="0" rtlCol="0" anchor="ctr"/>
           <a:lstStyle/>
           <a:p>
-            <a:pPr marL="0" indent="0">
+            <a:pPr indent="0" marL="0">
               <a:buNone/>
             </a:pPr>
             <a:r>
@@ -16520,7 +16601,7 @@
           <a:bodyPr wrap="square" lIns="0" tIns="0" rIns="0" bIns="0" rtlCol="0" anchor="ctr"/>
           <a:lstStyle/>
           <a:p>
-            <a:pPr marL="0" indent="0">
+            <a:pPr indent="0" marL="0">
               <a:lnSpc>
                 <a:spcPct val="110000"/>
               </a:lnSpc>
@@ -16562,7 +16643,7 @@
           <a:bodyPr wrap="square" lIns="0" tIns="0" rIns="0" bIns="0" rtlCol="0" anchor="ctr"/>
           <a:lstStyle/>
           <a:p>
-            <a:pPr marL="0" indent="0">
+            <a:pPr indent="0" marL="0">
               <a:buNone/>
             </a:pPr>
             <a:r>
@@ -16592,7 +16673,9 @@
             <a:ext cx="5102352" cy="713232"/>
           </a:xfrm>
           <a:prstGeom prst="rect">
-            <a:avLst/>
+            <a:avLst>
+              <a:gd name="adj" fmla="val 6410"/>
+            </a:avLst>
           </a:prstGeom>
           <a:solidFill>
             <a:srgbClr val="F0FDF4"/>
@@ -16626,7 +16709,7 @@
           <a:bodyPr wrap="square" lIns="0" tIns="0" rIns="0" bIns="0" rtlCol="0" anchor="ctr"/>
           <a:lstStyle/>
           <a:p>
-            <a:pPr marL="0" indent="0">
+            <a:pPr indent="0" marL="0">
               <a:lnSpc>
                 <a:spcPct val="115000"/>
               </a:lnSpc>
@@ -16659,7 +16742,9 @@
             <a:ext cx="11183112" cy="896112"/>
           </a:xfrm>
           <a:prstGeom prst="rect">
-            <a:avLst/>
+            <a:avLst>
+              <a:gd name="adj" fmla="val 8163"/>
+            </a:avLst>
           </a:prstGeom>
           <a:solidFill>
             <a:srgbClr val="F8FAFC"/>
@@ -16684,7 +16769,9 @@
             <a:ext cx="594360" cy="621792"/>
           </a:xfrm>
           <a:prstGeom prst="rect">
-            <a:avLst/>
+            <a:avLst>
+              <a:gd name="adj" fmla="val 7692"/>
+            </a:avLst>
           </a:prstGeom>
           <a:solidFill>
             <a:srgbClr val="0A2647"/>
@@ -16713,7 +16800,7 @@
           <a:bodyPr wrap="square" lIns="0" tIns="0" rIns="0" bIns="0" rtlCol="0" anchor="ctr"/>
           <a:lstStyle/>
           <a:p>
-            <a:pPr marL="0" indent="0" algn="ctr">
+            <a:pPr algn="ctr" indent="0" marL="0">
               <a:buNone/>
             </a:pPr>
             <a:r>
@@ -16752,7 +16839,7 @@
           <a:bodyPr wrap="square" lIns="0" tIns="0" rIns="0" bIns="0" rtlCol="0" anchor="ctr"/>
           <a:lstStyle/>
           <a:p>
-            <a:pPr marL="0" indent="0">
+            <a:pPr indent="0" marL="0">
               <a:buNone/>
             </a:pPr>
             <a:r>
@@ -16791,7 +16878,7 @@
           <a:bodyPr wrap="square" lIns="0" tIns="0" rIns="0" bIns="0" rtlCol="0" anchor="ctr"/>
           <a:lstStyle/>
           <a:p>
-            <a:pPr marL="0" indent="0">
+            <a:pPr indent="0" marL="0">
               <a:lnSpc>
                 <a:spcPct val="110000"/>
               </a:lnSpc>
@@ -16833,7 +16920,7 @@
           <a:bodyPr wrap="square" lIns="0" tIns="0" rIns="0" bIns="0" rtlCol="0" anchor="ctr"/>
           <a:lstStyle/>
           <a:p>
-            <a:pPr marL="0" indent="0">
+            <a:pPr indent="0" marL="0">
               <a:buNone/>
             </a:pPr>
             <a:r>
@@ -16863,7 +16950,9 @@
             <a:ext cx="5102352" cy="713232"/>
           </a:xfrm>
           <a:prstGeom prst="rect">
-            <a:avLst/>
+            <a:avLst>
+              <a:gd name="adj" fmla="val 6410"/>
+            </a:avLst>
           </a:prstGeom>
           <a:solidFill>
             <a:srgbClr val="F0FDF4"/>
@@ -16897,7 +16986,7 @@
           <a:bodyPr wrap="square" lIns="0" tIns="0" rIns="0" bIns="0" rtlCol="0" anchor="ctr"/>
           <a:lstStyle/>
           <a:p>
-            <a:pPr marL="0" indent="0">
+            <a:pPr indent="0" marL="0">
               <a:lnSpc>
                 <a:spcPct val="115000"/>
               </a:lnSpc>
@@ -16930,7 +17019,9 @@
             <a:ext cx="11183112" cy="896112"/>
           </a:xfrm>
           <a:prstGeom prst="rect">
-            <a:avLst/>
+            <a:avLst>
+              <a:gd name="adj" fmla="val 8163"/>
+            </a:avLst>
           </a:prstGeom>
           <a:solidFill>
             <a:srgbClr val="F8FAFC"/>
@@ -16955,7 +17046,9 @@
             <a:ext cx="594360" cy="621792"/>
           </a:xfrm>
           <a:prstGeom prst="rect">
-            <a:avLst/>
+            <a:avLst>
+              <a:gd name="adj" fmla="val 7692"/>
+            </a:avLst>
           </a:prstGeom>
           <a:solidFill>
             <a:srgbClr val="0A2647"/>
@@ -16984,7 +17077,7 @@
           <a:bodyPr wrap="square" lIns="0" tIns="0" rIns="0" bIns="0" rtlCol="0" anchor="ctr"/>
           <a:lstStyle/>
           <a:p>
-            <a:pPr marL="0" indent="0" algn="ctr">
+            <a:pPr algn="ctr" indent="0" marL="0">
               <a:buNone/>
             </a:pPr>
             <a:r>
@@ -17023,7 +17116,7 @@
           <a:bodyPr wrap="square" lIns="0" tIns="0" rIns="0" bIns="0" rtlCol="0" anchor="ctr"/>
           <a:lstStyle/>
           <a:p>
-            <a:pPr marL="0" indent="0">
+            <a:pPr indent="0" marL="0">
               <a:buNone/>
             </a:pPr>
             <a:r>
@@ -17062,7 +17155,7 @@
           <a:bodyPr wrap="square" lIns="0" tIns="0" rIns="0" bIns="0" rtlCol="0" anchor="ctr"/>
           <a:lstStyle/>
           <a:p>
-            <a:pPr marL="0" indent="0">
+            <a:pPr indent="0" marL="0">
               <a:lnSpc>
                 <a:spcPct val="110000"/>
               </a:lnSpc>
@@ -17104,7 +17197,7 @@
           <a:bodyPr wrap="square" lIns="0" tIns="0" rIns="0" bIns="0" rtlCol="0" anchor="ctr"/>
           <a:lstStyle/>
           <a:p>
-            <a:pPr marL="0" indent="0">
+            <a:pPr indent="0" marL="0">
               <a:buNone/>
             </a:pPr>
             <a:r>
@@ -17134,7 +17227,9 @@
             <a:ext cx="5102352" cy="713232"/>
           </a:xfrm>
           <a:prstGeom prst="rect">
-            <a:avLst/>
+            <a:avLst>
+              <a:gd name="adj" fmla="val 6410"/>
+            </a:avLst>
           </a:prstGeom>
           <a:solidFill>
             <a:srgbClr val="F0FDF4"/>
@@ -17168,7 +17263,7 @@
           <a:bodyPr wrap="square" lIns="0" tIns="0" rIns="0" bIns="0" rtlCol="0" anchor="ctr"/>
           <a:lstStyle/>
           <a:p>
-            <a:pPr marL="0" indent="0">
+            <a:pPr indent="0" marL="0">
               <a:lnSpc>
                 <a:spcPct val="115000"/>
               </a:lnSpc>
@@ -17210,7 +17305,7 @@
           <a:bodyPr wrap="square" rtlCol="0" anchor="ctr"/>
           <a:lstStyle/>
           <a:p>
-            <a:pPr marL="0" indent="0" algn="l">
+            <a:pPr algn="l" indent="0" marL="0">
               <a:buNone/>
             </a:pPr>
             <a:r>
@@ -17249,7 +17344,7 @@
           <a:bodyPr wrap="square" rtlCol="0" anchor="ctr"/>
           <a:lstStyle/>
           <a:p>
-            <a:pPr marL="0" indent="0" algn="r">
+            <a:pPr algn="r" indent="0" marL="0">
               <a:buNone/>
             </a:pPr>
             <a:r>
@@ -17283,7 +17378,6 @@
         <a:solidFill>
           <a:srgbClr val="FFFFFF"/>
         </a:solidFill>
-        <a:effectLst/>
       </p:bgPr>
     </p:bg>
     <p:spTree>
@@ -17321,11 +17415,11 @@
           <a:bodyPr wrap="square" lIns="0" tIns="0" rIns="0" bIns="0" rtlCol="0" anchor="ctr"/>
           <a:lstStyle/>
           <a:p>
-            <a:pPr marL="0" indent="0">
-              <a:buNone/>
-            </a:pPr>
-            <a:r>
-              <a:rPr lang="en-US" sz="1100" b="1" kern="0" spc="150" dirty="0">
+            <a:pPr indent="0" marL="0">
+              <a:buNone/>
+            </a:pPr>
+            <a:r>
+              <a:rPr lang="en-US" sz="1100" b="1" spc="150" kern="0" dirty="0">
                 <a:solidFill>
                   <a:srgbClr val="2C74B3"/>
                 </a:solidFill>
@@ -17360,7 +17454,7 @@
           <a:bodyPr wrap="square" lIns="0" tIns="0" rIns="0" bIns="0" rtlCol="0" anchor="ctr"/>
           <a:lstStyle/>
           <a:p>
-            <a:pPr marL="0" indent="0">
+            <a:pPr indent="0" marL="0">
               <a:buNone/>
             </a:pPr>
             <a:r>
@@ -17390,7 +17484,9 @@
             <a:ext cx="11183112" cy="896112"/>
           </a:xfrm>
           <a:prstGeom prst="rect">
-            <a:avLst/>
+            <a:avLst>
+              <a:gd name="adj" fmla="val 8163"/>
+            </a:avLst>
           </a:prstGeom>
           <a:solidFill>
             <a:srgbClr val="F8FAFC"/>
@@ -17415,7 +17511,9 @@
             <a:ext cx="822960" cy="621792"/>
           </a:xfrm>
           <a:prstGeom prst="rect">
-            <a:avLst/>
+            <a:avLst>
+              <a:gd name="adj" fmla="val 7353"/>
+            </a:avLst>
           </a:prstGeom>
           <a:solidFill>
             <a:srgbClr val="133B5C"/>
@@ -17444,7 +17542,7 @@
           <a:bodyPr wrap="square" lIns="0" tIns="0" rIns="0" bIns="0" rtlCol="0" anchor="ctr"/>
           <a:lstStyle/>
           <a:p>
-            <a:pPr marL="0" indent="0" algn="ctr">
+            <a:pPr algn="ctr" indent="0" marL="0">
               <a:buNone/>
             </a:pPr>
             <a:r>
@@ -17483,7 +17581,7 @@
           <a:bodyPr wrap="square" lIns="0" tIns="0" rIns="0" bIns="0" rtlCol="0" anchor="ctr"/>
           <a:lstStyle/>
           <a:p>
-            <a:pPr marL="0" indent="0">
+            <a:pPr indent="0" marL="0">
               <a:buNone/>
             </a:pPr>
             <a:r>
@@ -17522,7 +17620,7 @@
           <a:bodyPr wrap="square" lIns="0" tIns="0" rIns="0" bIns="0" rtlCol="0" anchor="ctr"/>
           <a:lstStyle/>
           <a:p>
-            <a:pPr marL="0" indent="0">
+            <a:pPr indent="0" marL="0">
               <a:lnSpc>
                 <a:spcPct val="115000"/>
               </a:lnSpc>
@@ -17555,7 +17653,9 @@
             <a:ext cx="2999232" cy="621792"/>
           </a:xfrm>
           <a:prstGeom prst="rect">
-            <a:avLst/>
+            <a:avLst>
+              <a:gd name="adj" fmla="val 7353"/>
+            </a:avLst>
           </a:prstGeom>
           <a:solidFill>
             <a:srgbClr val="EFF6FF"/>
@@ -17589,7 +17689,7 @@
           <a:bodyPr wrap="square" lIns="0" tIns="0" rIns="0" bIns="0" rtlCol="0" anchor="ctr"/>
           <a:lstStyle/>
           <a:p>
-            <a:pPr marL="0" indent="0">
+            <a:pPr indent="0" marL="0">
               <a:buNone/>
             </a:pPr>
             <a:r>
@@ -17628,7 +17728,7 @@
           <a:bodyPr wrap="square" lIns="0" tIns="0" rIns="0" bIns="0" rtlCol="0" anchor="ctr"/>
           <a:lstStyle/>
           <a:p>
-            <a:pPr marL="0" indent="0">
+            <a:pPr indent="0" marL="0">
               <a:buNone/>
             </a:pPr>
             <a:r>
@@ -17658,7 +17758,9 @@
             <a:ext cx="11183112" cy="896112"/>
           </a:xfrm>
           <a:prstGeom prst="rect">
-            <a:avLst/>
+            <a:avLst>
+              <a:gd name="adj" fmla="val 8163"/>
+            </a:avLst>
           </a:prstGeom>
           <a:solidFill>
             <a:srgbClr val="F8FAFC"/>
@@ -17683,7 +17785,9 @@
             <a:ext cx="822960" cy="621792"/>
           </a:xfrm>
           <a:prstGeom prst="rect">
-            <a:avLst/>
+            <a:avLst>
+              <a:gd name="adj" fmla="val 7353"/>
+            </a:avLst>
           </a:prstGeom>
           <a:solidFill>
             <a:srgbClr val="133B5C"/>
@@ -17712,7 +17816,7 @@
           <a:bodyPr wrap="square" lIns="0" tIns="0" rIns="0" bIns="0" rtlCol="0" anchor="ctr"/>
           <a:lstStyle/>
           <a:p>
-            <a:pPr marL="0" indent="0" algn="ctr">
+            <a:pPr algn="ctr" indent="0" marL="0">
               <a:buNone/>
             </a:pPr>
             <a:r>
@@ -17751,7 +17855,7 @@
           <a:bodyPr wrap="square" lIns="0" tIns="0" rIns="0" bIns="0" rtlCol="0" anchor="ctr"/>
           <a:lstStyle/>
           <a:p>
-            <a:pPr marL="0" indent="0">
+            <a:pPr indent="0" marL="0">
               <a:buNone/>
             </a:pPr>
             <a:r>
@@ -17790,7 +17894,7 @@
           <a:bodyPr wrap="square" lIns="0" tIns="0" rIns="0" bIns="0" rtlCol="0" anchor="ctr"/>
           <a:lstStyle/>
           <a:p>
-            <a:pPr marL="0" indent="0">
+            <a:pPr indent="0" marL="0">
               <a:lnSpc>
                 <a:spcPct val="115000"/>
               </a:lnSpc>
@@ -17823,7 +17927,9 @@
             <a:ext cx="2999232" cy="621792"/>
           </a:xfrm>
           <a:prstGeom prst="rect">
-            <a:avLst/>
+            <a:avLst>
+              <a:gd name="adj" fmla="val 7353"/>
+            </a:avLst>
           </a:prstGeom>
           <a:solidFill>
             <a:srgbClr val="EFF6FF"/>
@@ -17857,7 +17963,7 @@
           <a:bodyPr wrap="square" lIns="0" tIns="0" rIns="0" bIns="0" rtlCol="0" anchor="ctr"/>
           <a:lstStyle/>
           <a:p>
-            <a:pPr marL="0" indent="0">
+            <a:pPr indent="0" marL="0">
               <a:buNone/>
             </a:pPr>
             <a:r>
@@ -17896,7 +18002,7 @@
           <a:bodyPr wrap="square" lIns="0" tIns="0" rIns="0" bIns="0" rtlCol="0" anchor="ctr"/>
           <a:lstStyle/>
           <a:p>
-            <a:pPr marL="0" indent="0">
+            <a:pPr indent="0" marL="0">
               <a:buNone/>
             </a:pPr>
             <a:r>
@@ -17926,7 +18032,9 @@
             <a:ext cx="11183112" cy="896112"/>
           </a:xfrm>
           <a:prstGeom prst="rect">
-            <a:avLst/>
+            <a:avLst>
+              <a:gd name="adj" fmla="val 8163"/>
+            </a:avLst>
           </a:prstGeom>
           <a:solidFill>
             <a:srgbClr val="F8FAFC"/>
@@ -17951,7 +18059,9 @@
             <a:ext cx="822960" cy="621792"/>
           </a:xfrm>
           <a:prstGeom prst="rect">
-            <a:avLst/>
+            <a:avLst>
+              <a:gd name="adj" fmla="val 7353"/>
+            </a:avLst>
           </a:prstGeom>
           <a:solidFill>
             <a:srgbClr val="133B5C"/>
@@ -17980,7 +18090,7 @@
           <a:bodyPr wrap="square" lIns="0" tIns="0" rIns="0" bIns="0" rtlCol="0" anchor="ctr"/>
           <a:lstStyle/>
           <a:p>
-            <a:pPr marL="0" indent="0" algn="ctr">
+            <a:pPr algn="ctr" indent="0" marL="0">
               <a:buNone/>
             </a:pPr>
             <a:r>
@@ -18019,7 +18129,7 @@
           <a:bodyPr wrap="square" lIns="0" tIns="0" rIns="0" bIns="0" rtlCol="0" anchor="ctr"/>
           <a:lstStyle/>
           <a:p>
-            <a:pPr marL="0" indent="0">
+            <a:pPr indent="0" marL="0">
               <a:buNone/>
             </a:pPr>
             <a:r>
@@ -18058,7 +18168,7 @@
           <a:bodyPr wrap="square" lIns="0" tIns="0" rIns="0" bIns="0" rtlCol="0" anchor="ctr"/>
           <a:lstStyle/>
           <a:p>
-            <a:pPr marL="0" indent="0">
+            <a:pPr indent="0" marL="0">
               <a:lnSpc>
                 <a:spcPct val="115000"/>
               </a:lnSpc>
@@ -18091,7 +18201,9 @@
             <a:ext cx="2999232" cy="621792"/>
           </a:xfrm>
           <a:prstGeom prst="rect">
-            <a:avLst/>
+            <a:avLst>
+              <a:gd name="adj" fmla="val 7353"/>
+            </a:avLst>
           </a:prstGeom>
           <a:solidFill>
             <a:srgbClr val="EFF6FF"/>
@@ -18125,7 +18237,7 @@
           <a:bodyPr wrap="square" lIns="0" tIns="0" rIns="0" bIns="0" rtlCol="0" anchor="ctr"/>
           <a:lstStyle/>
           <a:p>
-            <a:pPr marL="0" indent="0">
+            <a:pPr indent="0" marL="0">
               <a:buNone/>
             </a:pPr>
             <a:r>
@@ -18164,7 +18276,7 @@
           <a:bodyPr wrap="square" lIns="0" tIns="0" rIns="0" bIns="0" rtlCol="0" anchor="ctr"/>
           <a:lstStyle/>
           <a:p>
-            <a:pPr marL="0" indent="0">
+            <a:pPr indent="0" marL="0">
               <a:buNone/>
             </a:pPr>
             <a:r>
@@ -18194,7 +18306,9 @@
             <a:ext cx="11183112" cy="896112"/>
           </a:xfrm>
           <a:prstGeom prst="rect">
-            <a:avLst/>
+            <a:avLst>
+              <a:gd name="adj" fmla="val 8163"/>
+            </a:avLst>
           </a:prstGeom>
           <a:solidFill>
             <a:srgbClr val="F8FAFC"/>
@@ -18219,7 +18333,9 @@
             <a:ext cx="822960" cy="621792"/>
           </a:xfrm>
           <a:prstGeom prst="rect">
-            <a:avLst/>
+            <a:avLst>
+              <a:gd name="adj" fmla="val 7353"/>
+            </a:avLst>
           </a:prstGeom>
           <a:solidFill>
             <a:srgbClr val="133B5C"/>
@@ -18248,7 +18364,7 @@
           <a:bodyPr wrap="square" lIns="0" tIns="0" rIns="0" bIns="0" rtlCol="0" anchor="ctr"/>
           <a:lstStyle/>
           <a:p>
-            <a:pPr marL="0" indent="0" algn="ctr">
+            <a:pPr algn="ctr" indent="0" marL="0">
               <a:buNone/>
             </a:pPr>
             <a:r>
@@ -18287,7 +18403,7 @@
           <a:bodyPr wrap="square" lIns="0" tIns="0" rIns="0" bIns="0" rtlCol="0" anchor="ctr"/>
           <a:lstStyle/>
           <a:p>
-            <a:pPr marL="0" indent="0">
+            <a:pPr indent="0" marL="0">
               <a:buNone/>
             </a:pPr>
             <a:r>
@@ -18326,7 +18442,7 @@
           <a:bodyPr wrap="square" lIns="0" tIns="0" rIns="0" bIns="0" rtlCol="0" anchor="ctr"/>
           <a:lstStyle/>
           <a:p>
-            <a:pPr marL="0" indent="0">
+            <a:pPr indent="0" marL="0">
               <a:lnSpc>
                 <a:spcPct val="115000"/>
               </a:lnSpc>
@@ -18359,7 +18475,9 @@
             <a:ext cx="2999232" cy="621792"/>
           </a:xfrm>
           <a:prstGeom prst="rect">
-            <a:avLst/>
+            <a:avLst>
+              <a:gd name="adj" fmla="val 7353"/>
+            </a:avLst>
           </a:prstGeom>
           <a:solidFill>
             <a:srgbClr val="EFF6FF"/>
@@ -18393,7 +18511,7 @@
           <a:bodyPr wrap="square" lIns="0" tIns="0" rIns="0" bIns="0" rtlCol="0" anchor="ctr"/>
           <a:lstStyle/>
           <a:p>
-            <a:pPr marL="0" indent="0">
+            <a:pPr indent="0" marL="0">
               <a:buNone/>
             </a:pPr>
             <a:r>
@@ -18432,7 +18550,7 @@
           <a:bodyPr wrap="square" lIns="0" tIns="0" rIns="0" bIns="0" rtlCol="0" anchor="ctr"/>
           <a:lstStyle/>
           <a:p>
-            <a:pPr marL="0" indent="0">
+            <a:pPr indent="0" marL="0">
               <a:buNone/>
             </a:pPr>
             <a:r>
@@ -18462,7 +18580,9 @@
             <a:ext cx="11183112" cy="896112"/>
           </a:xfrm>
           <a:prstGeom prst="rect">
-            <a:avLst/>
+            <a:avLst>
+              <a:gd name="adj" fmla="val 8163"/>
+            </a:avLst>
           </a:prstGeom>
           <a:solidFill>
             <a:srgbClr val="F8FAFC"/>
@@ -18487,7 +18607,9 @@
             <a:ext cx="822960" cy="621792"/>
           </a:xfrm>
           <a:prstGeom prst="rect">
-            <a:avLst/>
+            <a:avLst>
+              <a:gd name="adj" fmla="val 7353"/>
+            </a:avLst>
           </a:prstGeom>
           <a:solidFill>
             <a:srgbClr val="133B5C"/>
@@ -18516,7 +18638,7 @@
           <a:bodyPr wrap="square" lIns="0" tIns="0" rIns="0" bIns="0" rtlCol="0" anchor="ctr"/>
           <a:lstStyle/>
           <a:p>
-            <a:pPr marL="0" indent="0" algn="ctr">
+            <a:pPr algn="ctr" indent="0" marL="0">
               <a:buNone/>
             </a:pPr>
             <a:r>
@@ -18555,7 +18677,7 @@
           <a:bodyPr wrap="square" lIns="0" tIns="0" rIns="0" bIns="0" rtlCol="0" anchor="ctr"/>
           <a:lstStyle/>
           <a:p>
-            <a:pPr marL="0" indent="0">
+            <a:pPr indent="0" marL="0">
               <a:buNone/>
             </a:pPr>
             <a:r>
@@ -18594,7 +18716,7 @@
           <a:bodyPr wrap="square" lIns="0" tIns="0" rIns="0" bIns="0" rtlCol="0" anchor="ctr"/>
           <a:lstStyle/>
           <a:p>
-            <a:pPr marL="0" indent="0">
+            <a:pPr indent="0" marL="0">
               <a:lnSpc>
                 <a:spcPct val="115000"/>
               </a:lnSpc>
@@ -18627,7 +18749,9 @@
             <a:ext cx="2999232" cy="621792"/>
           </a:xfrm>
           <a:prstGeom prst="rect">
-            <a:avLst/>
+            <a:avLst>
+              <a:gd name="adj" fmla="val 7353"/>
+            </a:avLst>
           </a:prstGeom>
           <a:solidFill>
             <a:srgbClr val="EFF6FF"/>
@@ -18661,7 +18785,7 @@
           <a:bodyPr wrap="square" lIns="0" tIns="0" rIns="0" bIns="0" rtlCol="0" anchor="ctr"/>
           <a:lstStyle/>
           <a:p>
-            <a:pPr marL="0" indent="0">
+            <a:pPr indent="0" marL="0">
               <a:buNone/>
             </a:pPr>
             <a:r>
@@ -18700,7 +18824,7 @@
           <a:bodyPr wrap="square" lIns="0" tIns="0" rIns="0" bIns="0" rtlCol="0" anchor="ctr"/>
           <a:lstStyle/>
           <a:p>
-            <a:pPr marL="0" indent="0">
+            <a:pPr indent="0" marL="0">
               <a:buNone/>
             </a:pPr>
             <a:r>
@@ -18739,7 +18863,7 @@
           <a:bodyPr wrap="square" rtlCol="0" anchor="ctr"/>
           <a:lstStyle/>
           <a:p>
-            <a:pPr marL="0" indent="0" algn="l">
+            <a:pPr algn="l" indent="0" marL="0">
               <a:buNone/>
             </a:pPr>
             <a:r>
@@ -18778,7 +18902,7 @@
           <a:bodyPr wrap="square" rtlCol="0" anchor="ctr"/>
           <a:lstStyle/>
           <a:p>
-            <a:pPr marL="0" indent="0" algn="r">
+            <a:pPr algn="r" indent="0" marL="0">
               <a:buNone/>
             </a:pPr>
             <a:r>
@@ -18812,7 +18936,6 @@
         <a:solidFill>
           <a:srgbClr val="FFFFFF"/>
         </a:solidFill>
-        <a:effectLst/>
       </p:bgPr>
     </p:bg>
     <p:spTree>
@@ -18850,11 +18973,11 @@
           <a:bodyPr wrap="square" lIns="0" tIns="0" rIns="0" bIns="0" rtlCol="0" anchor="ctr"/>
           <a:lstStyle/>
           <a:p>
-            <a:pPr marL="0" indent="0">
-              <a:buNone/>
-            </a:pPr>
-            <a:r>
-              <a:rPr lang="en-US" sz="1100" b="1" kern="0" spc="150" dirty="0">
+            <a:pPr indent="0" marL="0">
+              <a:buNone/>
+            </a:pPr>
+            <a:r>
+              <a:rPr lang="en-US" sz="1100" b="1" spc="150" kern="0" dirty="0">
                 <a:solidFill>
                   <a:srgbClr val="2C74B3"/>
                 </a:solidFill>
@@ -18889,7 +19012,7 @@
           <a:bodyPr wrap="square" lIns="0" tIns="0" rIns="0" bIns="0" rtlCol="0" anchor="ctr"/>
           <a:lstStyle/>
           <a:p>
-            <a:pPr marL="0" indent="0">
+            <a:pPr indent="0" marL="0">
               <a:buNone/>
             </a:pPr>
             <a:r>
@@ -18919,7 +19042,9 @@
             <a:ext cx="3575304" cy="3840480"/>
           </a:xfrm>
           <a:prstGeom prst="rect">
-            <a:avLst/>
+            <a:avLst>
+              <a:gd name="adj" fmla="val 2046"/>
+            </a:avLst>
           </a:prstGeom>
           <a:solidFill>
             <a:srgbClr val="F8FAFC"/>
@@ -18944,7 +19069,9 @@
             <a:ext cx="3575304" cy="594360"/>
           </a:xfrm>
           <a:prstGeom prst="rect">
-            <a:avLst/>
+            <a:avLst>
+              <a:gd name="adj" fmla="val 7692"/>
+            </a:avLst>
           </a:prstGeom>
           <a:solidFill>
             <a:srgbClr val="0A2647"/>
@@ -18973,7 +19100,7 @@
           <a:bodyPr wrap="square" lIns="0" tIns="0" rIns="0" bIns="0" rtlCol="0" anchor="ctr"/>
           <a:lstStyle/>
           <a:p>
-            <a:pPr marL="0" indent="0">
+            <a:pPr indent="0" marL="0">
               <a:buNone/>
             </a:pPr>
             <a:r>
@@ -19012,7 +19139,7 @@
           <a:bodyPr wrap="square" lIns="0" tIns="0" rIns="0" bIns="0" rtlCol="0" anchor="ctr"/>
           <a:lstStyle/>
           <a:p>
-            <a:pPr marL="0" indent="0">
+            <a:pPr indent="0" marL="0">
               <a:buNone/>
             </a:pPr>
             <a:r>
@@ -19051,7 +19178,7 @@
           <a:bodyPr wrap="square" lIns="0" tIns="0" rIns="0" bIns="0" rtlCol="0" anchor="ctr"/>
           <a:lstStyle/>
           <a:p>
-            <a:pPr marL="0" indent="0">
+            <a:pPr indent="0" marL="0">
               <a:buNone/>
             </a:pPr>
             <a:r>
@@ -19090,7 +19217,7 @@
           <a:bodyPr wrap="square" lIns="0" tIns="0" rIns="0" bIns="0" rtlCol="0" anchor="ctr"/>
           <a:lstStyle/>
           <a:p>
-            <a:pPr marL="0" indent="0">
+            <a:pPr indent="0" marL="0">
               <a:lnSpc>
                 <a:spcPct val="115000"/>
               </a:lnSpc>
@@ -19132,7 +19259,7 @@
           <a:bodyPr wrap="square" lIns="0" tIns="0" rIns="0" bIns="0" rtlCol="0" anchor="ctr"/>
           <a:lstStyle/>
           <a:p>
-            <a:pPr marL="0" indent="0">
+            <a:pPr indent="0" marL="0">
               <a:buNone/>
             </a:pPr>
             <a:r>
@@ -19171,7 +19298,7 @@
           <a:bodyPr wrap="square" lIns="0" tIns="0" rIns="0" bIns="0" rtlCol="0" anchor="ctr"/>
           <a:lstStyle/>
           <a:p>
-            <a:pPr marL="0" indent="0">
+            <a:pPr indent="0" marL="0">
               <a:lnSpc>
                 <a:spcPct val="115000"/>
               </a:lnSpc>
@@ -19213,7 +19340,7 @@
           <a:bodyPr wrap="square" lIns="0" tIns="0" rIns="0" bIns="0" rtlCol="0" anchor="ctr"/>
           <a:lstStyle/>
           <a:p>
-            <a:pPr marL="0" indent="0">
+            <a:pPr indent="0" marL="0">
               <a:buNone/>
             </a:pPr>
             <a:r>
@@ -19252,7 +19379,7 @@
           <a:bodyPr wrap="square" lIns="0" tIns="0" rIns="0" bIns="0" rtlCol="0" anchor="ctr"/>
           <a:lstStyle/>
           <a:p>
-            <a:pPr marL="0" indent="0">
+            <a:pPr indent="0" marL="0">
               <a:lnSpc>
                 <a:spcPct val="115000"/>
               </a:lnSpc>
@@ -19285,7 +19412,9 @@
             <a:ext cx="3575304" cy="3840480"/>
           </a:xfrm>
           <a:prstGeom prst="rect">
-            <a:avLst/>
+            <a:avLst>
+              <a:gd name="adj" fmla="val 2046"/>
+            </a:avLst>
           </a:prstGeom>
           <a:solidFill>
             <a:srgbClr val="F8FAFC"/>
@@ -19310,7 +19439,9 @@
             <a:ext cx="3575304" cy="594360"/>
           </a:xfrm>
           <a:prstGeom prst="rect">
-            <a:avLst/>
+            <a:avLst>
+              <a:gd name="adj" fmla="val 7692"/>
+            </a:avLst>
           </a:prstGeom>
           <a:solidFill>
             <a:srgbClr val="2C74B3"/>
@@ -19339,7 +19470,7 @@
           <a:bodyPr wrap="square" lIns="0" tIns="0" rIns="0" bIns="0" rtlCol="0" anchor="ctr"/>
           <a:lstStyle/>
           <a:p>
-            <a:pPr marL="0" indent="0">
+            <a:pPr indent="0" marL="0">
               <a:buNone/>
             </a:pPr>
             <a:r>
@@ -19378,7 +19509,7 @@
           <a:bodyPr wrap="square" lIns="0" tIns="0" rIns="0" bIns="0" rtlCol="0" anchor="ctr"/>
           <a:lstStyle/>
           <a:p>
-            <a:pPr marL="0" indent="0">
+            <a:pPr indent="0" marL="0">
               <a:buNone/>
             </a:pPr>
             <a:r>
@@ -19417,7 +19548,7 @@
           <a:bodyPr wrap="square" lIns="0" tIns="0" rIns="0" bIns="0" rtlCol="0" anchor="ctr"/>
           <a:lstStyle/>
           <a:p>
-            <a:pPr marL="0" indent="0">
+            <a:pPr indent="0" marL="0">
               <a:buNone/>
             </a:pPr>
             <a:r>
@@ -19456,7 +19587,7 @@
           <a:bodyPr wrap="square" lIns="0" tIns="0" rIns="0" bIns="0" rtlCol="0" anchor="ctr"/>
           <a:lstStyle/>
           <a:p>
-            <a:pPr marL="0" indent="0">
+            <a:pPr indent="0" marL="0">
               <a:lnSpc>
                 <a:spcPct val="115000"/>
               </a:lnSpc>
@@ -19498,7 +19629,7 @@
           <a:bodyPr wrap="square" lIns="0" tIns="0" rIns="0" bIns="0" rtlCol="0" anchor="ctr"/>
           <a:lstStyle/>
           <a:p>
-            <a:pPr marL="0" indent="0">
+            <a:pPr indent="0" marL="0">
               <a:buNone/>
             </a:pPr>
             <a:r>
@@ -19537,7 +19668,7 @@
           <a:bodyPr wrap="square" lIns="0" tIns="0" rIns="0" bIns="0" rtlCol="0" anchor="ctr"/>
           <a:lstStyle/>
           <a:p>
-            <a:pPr marL="0" indent="0">
+            <a:pPr indent="0" marL="0">
               <a:lnSpc>
                 <a:spcPct val="115000"/>
               </a:lnSpc>
@@ -19579,7 +19710,7 @@
           <a:bodyPr wrap="square" lIns="0" tIns="0" rIns="0" bIns="0" rtlCol="0" anchor="ctr"/>
           <a:lstStyle/>
           <a:p>
-            <a:pPr marL="0" indent="0">
+            <a:pPr indent="0" marL="0">
               <a:buNone/>
             </a:pPr>
             <a:r>
@@ -19618,7 +19749,7 @@
           <a:bodyPr wrap="square" lIns="0" tIns="0" rIns="0" bIns="0" rtlCol="0" anchor="ctr"/>
           <a:lstStyle/>
           <a:p>
-            <a:pPr marL="0" indent="0">
+            <a:pPr indent="0" marL="0">
               <a:lnSpc>
                 <a:spcPct val="115000"/>
               </a:lnSpc>
@@ -19651,7 +19782,9 @@
             <a:ext cx="3575304" cy="3840480"/>
           </a:xfrm>
           <a:prstGeom prst="rect">
-            <a:avLst/>
+            <a:avLst>
+              <a:gd name="adj" fmla="val 2046"/>
+            </a:avLst>
           </a:prstGeom>
           <a:solidFill>
             <a:srgbClr val="F8FAFC"/>
@@ -19676,7 +19809,9 @@
             <a:ext cx="3575304" cy="594360"/>
           </a:xfrm>
           <a:prstGeom prst="rect">
-            <a:avLst/>
+            <a:avLst>
+              <a:gd name="adj" fmla="val 7692"/>
+            </a:avLst>
           </a:prstGeom>
           <a:solidFill>
             <a:srgbClr val="0D9488"/>
@@ -19705,7 +19840,7 @@
           <a:bodyPr wrap="square" lIns="0" tIns="0" rIns="0" bIns="0" rtlCol="0" anchor="ctr"/>
           <a:lstStyle/>
           <a:p>
-            <a:pPr marL="0" indent="0">
+            <a:pPr indent="0" marL="0">
               <a:buNone/>
             </a:pPr>
             <a:r>
@@ -19744,7 +19879,7 @@
           <a:bodyPr wrap="square" lIns="0" tIns="0" rIns="0" bIns="0" rtlCol="0" anchor="ctr"/>
           <a:lstStyle/>
           <a:p>
-            <a:pPr marL="0" indent="0">
+            <a:pPr indent="0" marL="0">
               <a:buNone/>
             </a:pPr>
             <a:r>
@@ -19783,7 +19918,7 @@
           <a:bodyPr wrap="square" lIns="0" tIns="0" rIns="0" bIns="0" rtlCol="0" anchor="ctr"/>
           <a:lstStyle/>
           <a:p>
-            <a:pPr marL="0" indent="0">
+            <a:pPr indent="0" marL="0">
               <a:buNone/>
             </a:pPr>
             <a:r>
@@ -19822,7 +19957,7 @@
           <a:bodyPr wrap="square" lIns="0" tIns="0" rIns="0" bIns="0" rtlCol="0" anchor="ctr"/>
           <a:lstStyle/>
           <a:p>
-            <a:pPr marL="0" indent="0">
+            <a:pPr indent="0" marL="0">
               <a:lnSpc>
                 <a:spcPct val="115000"/>
               </a:lnSpc>
@@ -19864,7 +19999,7 @@
           <a:bodyPr wrap="square" lIns="0" tIns="0" rIns="0" bIns="0" rtlCol="0" anchor="ctr"/>
           <a:lstStyle/>
           <a:p>
-            <a:pPr marL="0" indent="0">
+            <a:pPr indent="0" marL="0">
               <a:buNone/>
             </a:pPr>
             <a:r>
@@ -19903,7 +20038,7 @@
           <a:bodyPr wrap="square" lIns="0" tIns="0" rIns="0" bIns="0" rtlCol="0" anchor="ctr"/>
           <a:lstStyle/>
           <a:p>
-            <a:pPr marL="0" indent="0">
+            <a:pPr indent="0" marL="0">
               <a:lnSpc>
                 <a:spcPct val="115000"/>
               </a:lnSpc>
@@ -19945,7 +20080,7 @@
           <a:bodyPr wrap="square" lIns="0" tIns="0" rIns="0" bIns="0" rtlCol="0" anchor="ctr"/>
           <a:lstStyle/>
           <a:p>
-            <a:pPr marL="0" indent="0">
+            <a:pPr indent="0" marL="0">
               <a:buNone/>
             </a:pPr>
             <a:r>
@@ -19984,7 +20119,7 @@
           <a:bodyPr wrap="square" lIns="0" tIns="0" rIns="0" bIns="0" rtlCol="0" anchor="ctr"/>
           <a:lstStyle/>
           <a:p>
-            <a:pPr marL="0" indent="0">
+            <a:pPr indent="0" marL="0">
               <a:lnSpc>
                 <a:spcPct val="115000"/>
               </a:lnSpc>
@@ -20017,7 +20152,9 @@
             <a:ext cx="11183112" cy="868680"/>
           </a:xfrm>
           <a:prstGeom prst="rect">
-            <a:avLst/>
+            <a:avLst>
+              <a:gd name="adj" fmla="val 8421"/>
+            </a:avLst>
           </a:prstGeom>
           <a:solidFill>
             <a:srgbClr val="0A2647"/>
@@ -20046,7 +20183,7 @@
           <a:bodyPr wrap="square" lIns="0" tIns="0" rIns="0" bIns="0" rtlCol="0" anchor="ctr"/>
           <a:lstStyle/>
           <a:p>
-            <a:pPr marL="0" indent="0">
+            <a:pPr indent="0" marL="0">
               <a:buNone/>
             </a:pPr>
             <a:r>
@@ -20085,7 +20222,7 @@
           <a:bodyPr wrap="square" lIns="0" tIns="0" rIns="0" bIns="0" rtlCol="0" anchor="ctr"/>
           <a:lstStyle/>
           <a:p>
-            <a:pPr marL="0" indent="0">
+            <a:pPr indent="0" marL="0">
               <a:buNone/>
             </a:pPr>
             <a:r>
@@ -20124,7 +20261,7 @@
           <a:bodyPr wrap="square" rtlCol="0" anchor="ctr"/>
           <a:lstStyle/>
           <a:p>
-            <a:pPr marL="0" indent="0" algn="l">
+            <a:pPr algn="l" indent="0" marL="0">
               <a:buNone/>
             </a:pPr>
             <a:r>
@@ -20163,7 +20300,7 @@
           <a:bodyPr wrap="square" rtlCol="0" anchor="ctr"/>
           <a:lstStyle/>
           <a:p>
-            <a:pPr marL="0" indent="0" algn="r">
+            <a:pPr algn="r" indent="0" marL="0">
               <a:buNone/>
             </a:pPr>
             <a:r>
@@ -20197,7 +20334,6 @@
         <a:solidFill>
           <a:srgbClr val="FFFFFF"/>
         </a:solidFill>
-        <a:effectLst/>
       </p:bgPr>
     </p:bg>
     <p:spTree>
@@ -20235,11 +20371,11 @@
           <a:bodyPr wrap="square" lIns="0" tIns="0" rIns="0" bIns="0" rtlCol="0" anchor="ctr"/>
           <a:lstStyle/>
           <a:p>
-            <a:pPr marL="0" indent="0">
-              <a:buNone/>
-            </a:pPr>
-            <a:r>
-              <a:rPr lang="en-US" sz="1100" b="1" kern="0" spc="150" dirty="0">
+            <a:pPr indent="0" marL="0">
+              <a:buNone/>
+            </a:pPr>
+            <a:r>
+              <a:rPr lang="en-US" sz="1100" b="1" spc="150" kern="0" dirty="0">
                 <a:solidFill>
                   <a:srgbClr val="2C74B3"/>
                 </a:solidFill>
@@ -20274,7 +20410,7 @@
           <a:bodyPr wrap="square" lIns="0" tIns="0" rIns="0" bIns="0" rtlCol="0" anchor="ctr"/>
           <a:lstStyle/>
           <a:p>
-            <a:pPr marL="0" indent="0">
+            <a:pPr indent="0" marL="0">
               <a:buNone/>
             </a:pPr>
             <a:r>
@@ -20304,7 +20440,9 @@
             <a:ext cx="5408676" cy="4846320"/>
           </a:xfrm>
           <a:prstGeom prst="rect">
-            <a:avLst/>
+            <a:avLst>
+              <a:gd name="adj" fmla="val 1509"/>
+            </a:avLst>
           </a:prstGeom>
           <a:solidFill>
             <a:srgbClr val="F8FAFC"/>
@@ -20338,7 +20476,7 @@
           <a:bodyPr wrap="square" lIns="0" tIns="0" rIns="0" bIns="0" rtlCol="0" anchor="ctr"/>
           <a:lstStyle/>
           <a:p>
-            <a:pPr marL="0" indent="0">
+            <a:pPr indent="0" marL="0">
               <a:buNone/>
             </a:pPr>
             <a:r>
@@ -20377,7 +20515,7 @@
           <a:bodyPr wrap="square" lIns="0" tIns="0" rIns="0" bIns="0" rtlCol="0" anchor="ctr"/>
           <a:lstStyle/>
           <a:p>
-            <a:pPr marL="0" indent="0">
+            <a:pPr indent="0" marL="0">
               <a:buNone/>
             </a:pPr>
             <a:r>
@@ -20416,7 +20554,7 @@
           <a:bodyPr wrap="square" lIns="0" tIns="0" rIns="0" bIns="0" rtlCol="0" anchor="ctr"/>
           <a:lstStyle/>
           <a:p>
-            <a:pPr marL="0" indent="0">
+            <a:pPr indent="0" marL="0">
               <a:buNone/>
             </a:pPr>
             <a:r>
@@ -20455,7 +20593,7 @@
           <a:bodyPr wrap="square" lIns="0" tIns="0" rIns="0" bIns="0" rtlCol="0" anchor="ctr"/>
           <a:lstStyle/>
           <a:p>
-            <a:pPr marL="0" indent="0">
+            <a:pPr indent="0" marL="0">
               <a:lnSpc>
                 <a:spcPct val="115000"/>
               </a:lnSpc>
@@ -20497,7 +20635,7 @@
           <a:bodyPr wrap="square" lIns="0" tIns="0" rIns="0" bIns="0" rtlCol="0" anchor="ctr"/>
           <a:lstStyle/>
           <a:p>
-            <a:pPr marL="0" indent="0">
+            <a:pPr indent="0" marL="0">
               <a:buNone/>
             </a:pPr>
             <a:r>
@@ -20536,7 +20674,7 @@
           <a:bodyPr wrap="square" lIns="0" tIns="0" rIns="0" bIns="0" rtlCol="0" anchor="ctr"/>
           <a:lstStyle/>
           <a:p>
-            <a:pPr marL="0" indent="0">
+            <a:pPr indent="0" marL="0">
               <a:lnSpc>
                 <a:spcPct val="115000"/>
               </a:lnSpc>
@@ -20578,7 +20716,7 @@
           <a:bodyPr wrap="square" lIns="0" tIns="0" rIns="0" bIns="0" rtlCol="0" anchor="ctr"/>
           <a:lstStyle/>
           <a:p>
-            <a:pPr marL="0" indent="0">
+            <a:pPr indent="0" marL="0">
               <a:buNone/>
             </a:pPr>
             <a:r>
@@ -20617,7 +20755,7 @@
           <a:bodyPr wrap="square" lIns="0" tIns="0" rIns="0" bIns="0" rtlCol="0" anchor="ctr"/>
           <a:lstStyle/>
           <a:p>
-            <a:pPr marL="0" indent="0">
+            <a:pPr indent="0" marL="0">
               <a:lnSpc>
                 <a:spcPct val="115000"/>
               </a:lnSpc>
@@ -20659,7 +20797,7 @@
           <a:bodyPr wrap="square" lIns="0" tIns="0" rIns="0" bIns="0" rtlCol="0" anchor="ctr"/>
           <a:lstStyle/>
           <a:p>
-            <a:pPr marL="0" indent="0">
+            <a:pPr indent="0" marL="0">
               <a:buNone/>
             </a:pPr>
             <a:r>
@@ -20698,7 +20836,7 @@
           <a:bodyPr wrap="square" lIns="0" tIns="0" rIns="0" bIns="0" rtlCol="0" anchor="ctr"/>
           <a:lstStyle/>
           <a:p>
-            <a:pPr marL="0" indent="0">
+            <a:pPr indent="0" marL="0">
               <a:lnSpc>
                 <a:spcPct val="115000"/>
               </a:lnSpc>
@@ -20731,7 +20869,9 @@
             <a:ext cx="5408676" cy="4846320"/>
           </a:xfrm>
           <a:prstGeom prst="rect">
-            <a:avLst/>
+            <a:avLst>
+              <a:gd name="adj" fmla="val 1509"/>
+            </a:avLst>
           </a:prstGeom>
           <a:solidFill>
             <a:srgbClr val="0A2647"/>
@@ -20760,7 +20900,7 @@
           <a:bodyPr wrap="square" lIns="0" tIns="0" rIns="0" bIns="0" rtlCol="0" anchor="ctr"/>
           <a:lstStyle/>
           <a:p>
-            <a:pPr marL="0" indent="0">
+            <a:pPr indent="0" marL="0">
               <a:buNone/>
             </a:pPr>
             <a:r>
@@ -20799,7 +20939,7 @@
           <a:bodyPr wrap="square" lIns="0" tIns="0" rIns="0" bIns="0" rtlCol="0" anchor="ctr"/>
           <a:lstStyle/>
           <a:p>
-            <a:pPr marL="0" indent="0">
+            <a:pPr indent="0" marL="0">
               <a:buNone/>
             </a:pPr>
             <a:r>
@@ -20829,7 +20969,9 @@
             <a:ext cx="4860036" cy="685800"/>
           </a:xfrm>
           <a:prstGeom prst="rect">
-            <a:avLst/>
+            <a:avLst>
+              <a:gd name="adj" fmla="val 6667"/>
+            </a:avLst>
           </a:prstGeom>
           <a:solidFill>
             <a:srgbClr val="133B5C"/>
@@ -20863,7 +21005,7 @@
           <a:bodyPr wrap="square" lIns="0" tIns="0" rIns="0" bIns="0" rtlCol="0" anchor="ctr"/>
           <a:lstStyle/>
           <a:p>
-            <a:pPr marL="0" indent="0" algn="ctr">
+            <a:pPr algn="ctr" indent="0" marL="0">
               <a:buNone/>
             </a:pPr>
             <a:r>
@@ -20902,7 +21044,7 @@
           <a:bodyPr wrap="square" lIns="0" tIns="0" rIns="0" bIns="0" rtlCol="0" anchor="ctr"/>
           <a:lstStyle/>
           <a:p>
-            <a:pPr marL="0" indent="0">
+            <a:pPr indent="0" marL="0">
               <a:buNone/>
             </a:pPr>
             <a:r>
@@ -20941,7 +21083,7 @@
           <a:bodyPr wrap="square" lIns="0" tIns="0" rIns="0" bIns="0" rtlCol="0" anchor="ctr"/>
           <a:lstStyle/>
           <a:p>
-            <a:pPr marL="0" indent="0">
+            <a:pPr indent="0" marL="0">
               <a:lnSpc>
                 <a:spcPct val="110000"/>
               </a:lnSpc>
@@ -20983,7 +21125,7 @@
           <a:bodyPr wrap="square" lIns="0" tIns="0" rIns="0" bIns="0" rtlCol="0" anchor="ctr"/>
           <a:lstStyle/>
           <a:p>
-            <a:pPr marL="0" indent="0">
+            <a:pPr indent="0" marL="0">
               <a:buNone/>
             </a:pPr>
             <a:r>
@@ -21022,7 +21164,7 @@
           <a:bodyPr wrap="square" lIns="0" tIns="0" rIns="0" bIns="0" rtlCol="0" anchor="ctr"/>
           <a:lstStyle/>
           <a:p>
-            <a:pPr marL="0" indent="0">
+            <a:pPr indent="0" marL="0">
               <a:lnSpc>
                 <a:spcPct val="110000"/>
               </a:lnSpc>
@@ -21064,7 +21206,7 @@
           <a:bodyPr wrap="square" lIns="0" tIns="0" rIns="0" bIns="0" rtlCol="0" anchor="ctr"/>
           <a:lstStyle/>
           <a:p>
-            <a:pPr marL="0" indent="0">
+            <a:pPr indent="0" marL="0">
               <a:buNone/>
             </a:pPr>
             <a:r>
@@ -21103,7 +21245,7 @@
           <a:bodyPr wrap="square" lIns="0" tIns="0" rIns="0" bIns="0" rtlCol="0" anchor="ctr"/>
           <a:lstStyle/>
           <a:p>
-            <a:pPr marL="0" indent="0">
+            <a:pPr indent="0" marL="0">
               <a:lnSpc>
                 <a:spcPct val="110000"/>
               </a:lnSpc>
@@ -21145,7 +21287,7 @@
           <a:bodyPr wrap="square" lIns="0" tIns="0" rIns="0" bIns="0" rtlCol="0" anchor="ctr"/>
           <a:lstStyle/>
           <a:p>
-            <a:pPr marL="0" indent="0">
+            <a:pPr indent="0" marL="0">
               <a:buNone/>
             </a:pPr>
             <a:r>
@@ -21184,7 +21326,7 @@
           <a:bodyPr wrap="square" lIns="0" tIns="0" rIns="0" bIns="0" rtlCol="0" anchor="ctr"/>
           <a:lstStyle/>
           <a:p>
-            <a:pPr marL="0" indent="0">
+            <a:pPr indent="0" marL="0">
               <a:lnSpc>
                 <a:spcPct val="110000"/>
               </a:lnSpc>
@@ -21226,7 +21368,7 @@
           <a:bodyPr wrap="square" lIns="0" tIns="0" rIns="0" bIns="0" rtlCol="0" anchor="ctr"/>
           <a:lstStyle/>
           <a:p>
-            <a:pPr marL="0" indent="0">
+            <a:pPr indent="0" marL="0">
               <a:buNone/>
             </a:pPr>
             <a:r>
@@ -21265,7 +21407,7 @@
           <a:bodyPr wrap="square" lIns="0" tIns="0" rIns="0" bIns="0" rtlCol="0" anchor="ctr"/>
           <a:lstStyle/>
           <a:p>
-            <a:pPr marL="0" indent="0">
+            <a:pPr indent="0" marL="0">
               <a:lnSpc>
                 <a:spcPct val="110000"/>
               </a:lnSpc>
@@ -21307,7 +21449,7 @@
           <a:bodyPr wrap="square" rtlCol="0" anchor="ctr"/>
           <a:lstStyle/>
           <a:p>
-            <a:pPr marL="0" indent="0" algn="l">
+            <a:pPr algn="l" indent="0" marL="0">
               <a:buNone/>
             </a:pPr>
             <a:r>
@@ -21346,7 +21488,7 @@
           <a:bodyPr wrap="square" rtlCol="0" anchor="ctr"/>
           <a:lstStyle/>
           <a:p>
-            <a:pPr marL="0" indent="0" algn="r">
+            <a:pPr algn="r" indent="0" marL="0">
               <a:buNone/>
             </a:pPr>
             <a:r>
@@ -21665,299 +21807,4 @@
     </a:ext>
   </a:extLst>
 </a:theme>
-</file>
-
-<file path=ppt/theme/theme2.xml><?xml version="1.0" encoding="utf-8"?>
-<a:theme xmlns:a="http://schemas.openxmlformats.org/drawingml/2006/main" name="Office Theme">
-  <a:themeElements>
-    <a:clrScheme name="Office">
-      <a:dk1>
-        <a:sysClr val="windowText" lastClr="000000"/>
-      </a:dk1>
-      <a:lt1>
-        <a:sysClr val="window" lastClr="FFFFFF"/>
-      </a:lt1>
-      <a:dk2>
-        <a:srgbClr val="44546A"/>
-      </a:dk2>
-      <a:lt2>
-        <a:srgbClr val="E7E6E6"/>
-      </a:lt2>
-      <a:accent1>
-        <a:srgbClr val="4472C4"/>
-      </a:accent1>
-      <a:accent2>
-        <a:srgbClr val="ED7D31"/>
-      </a:accent2>
-      <a:accent3>
-        <a:srgbClr val="A5A5A5"/>
-      </a:accent3>
-      <a:accent4>
-        <a:srgbClr val="FFC000"/>
-      </a:accent4>
-      <a:accent5>
-        <a:srgbClr val="5B9BD5"/>
-      </a:accent5>
-      <a:accent6>
-        <a:srgbClr val="70AD47"/>
-      </a:accent6>
-      <a:hlink>
-        <a:srgbClr val="0563C1"/>
-      </a:hlink>
-      <a:folHlink>
-        <a:srgbClr val="954F72"/>
-      </a:folHlink>
-    </a:clrScheme>
-    <a:fontScheme name="Office">
-      <a:majorFont>
-        <a:latin typeface="Calibri Light" panose="020F0302020204030204"/>
-        <a:ea typeface=""/>
-        <a:cs typeface=""/>
-        <a:font script="Jpan" typeface="游ゴシック Light"/>
-        <a:font script="Hang" typeface="맑은 고딕"/>
-        <a:font script="Hans" typeface="等线 Light"/>
-        <a:font script="Hant" typeface="新細明體"/>
-        <a:font script="Arab" typeface="Times New Roman"/>
-        <a:font script="Hebr" typeface="Times New Roman"/>
-        <a:font script="Thai" typeface="Angsana New"/>
-        <a:font script="Ethi" typeface="Nyala"/>
-        <a:font script="Beng" typeface="Vrinda"/>
-        <a:font script="Gujr" typeface="Shruti"/>
-        <a:font script="Khmr" typeface="MoolBoran"/>
-        <a:font script="Knda" typeface="Tunga"/>
-        <a:font script="Guru" typeface="Raavi"/>
-        <a:font script="Cans" typeface="Euphemia"/>
-        <a:font script="Cher" typeface="Plantagenet Cherokee"/>
-        <a:font script="Yiii" typeface="Microsoft Yi Baiti"/>
-        <a:font script="Tibt" typeface="Microsoft Himalaya"/>
-        <a:font script="Thaa" typeface="MV Boli"/>
-        <a:font script="Deva" typeface="Mangal"/>
-        <a:font script="Telu" typeface="Gautami"/>
-        <a:font script="Taml" typeface="Latha"/>
-        <a:font script="Syrc" typeface="Estrangelo Edessa"/>
-        <a:font script="Orya" typeface="Kalinga"/>
-        <a:font script="Mlym" typeface="Kartika"/>
-        <a:font script="Laoo" typeface="DokChampa"/>
-        <a:font script="Sinh" typeface="Iskoola Pota"/>
-        <a:font script="Mong" typeface="Mongolian Baiti"/>
-        <a:font script="Viet" typeface="Times New Roman"/>
-        <a:font script="Uigh" typeface="Microsoft Uighur"/>
-        <a:font script="Geor" typeface="Sylfaen"/>
-        <a:font script="Armn" typeface="Arial"/>
-        <a:font script="Bugi" typeface="Leelawadee UI"/>
-        <a:font script="Bopo" typeface="Microsoft JhengHei"/>
-        <a:font script="Java" typeface="Javanese Text"/>
-        <a:font script="Lisu" typeface="Segoe UI"/>
-        <a:font script="Mymr" typeface="Myanmar Text"/>
-        <a:font script="Nkoo" typeface="Ebrima"/>
-        <a:font script="Olck" typeface="Nirmala UI"/>
-        <a:font script="Osma" typeface="Ebrima"/>
-        <a:font script="Phag" typeface="Phagspa"/>
-        <a:font script="Syrn" typeface="Estrangelo Edessa"/>
-        <a:font script="Syrj" typeface="Estrangelo Edessa"/>
-        <a:font script="Syre" typeface="Estrangelo Edessa"/>
-        <a:font script="Sora" typeface="Nirmala UI"/>
-        <a:font script="Tale" typeface="Microsoft Tai Le"/>
-        <a:font script="Talu" typeface="Microsoft New Tai Lue"/>
-        <a:font script="Tfng" typeface="Ebrima"/>
-      </a:majorFont>
-      <a:minorFont>
-        <a:latin typeface="Calibri" panose="020F0502020204030204"/>
-        <a:ea typeface=""/>
-        <a:cs typeface=""/>
-        <a:font script="Jpan" typeface="游ゴシック"/>
-        <a:font script="Hang" typeface="맑은 고딕"/>
-        <a:font script="Hans" typeface="等线"/>
-        <a:font script="Hant" typeface="新細明體"/>
-        <a:font script="Arab" typeface="Arial"/>
-        <a:font script="Hebr" typeface="Arial"/>
-        <a:font script="Thai" typeface="Cordia New"/>
-        <a:font script="Ethi" typeface="Nyala"/>
-        <a:font script="Beng" typeface="Vrinda"/>
-        <a:font script="Gujr" typeface="Shruti"/>
-        <a:font script="Khmr" typeface="DaunPenh"/>
-        <a:font script="Knda" typeface="Tunga"/>
-        <a:font script="Guru" typeface="Raavi"/>
-        <a:font script="Cans" typeface="Euphemia"/>
-        <a:font script="Cher" typeface="Plantagenet Cherokee"/>
-        <a:font script="Yiii" typeface="Microsoft Yi Baiti"/>
-        <a:font script="Tibt" typeface="Microsoft Himalaya"/>
-        <a:font script="Thaa" typeface="MV Boli"/>
-        <a:font script="Deva" typeface="Mangal"/>
-        <a:font script="Telu" typeface="Gautami"/>
-        <a:font script="Taml" typeface="Latha"/>
-        <a:font script="Syrc" typeface="Estrangelo Edessa"/>
-        <a:font script="Orya" typeface="Kalinga"/>
-        <a:font script="Mlym" typeface="Kartika"/>
-        <a:font script="Laoo" typeface="DokChampa"/>
-        <a:font script="Sinh" typeface="Iskoola Pota"/>
-        <a:font script="Mong" typeface="Mongolian Baiti"/>
-        <a:font script="Viet" typeface="Arial"/>
-        <a:font script="Uigh" typeface="Microsoft Uighur"/>
-        <a:font script="Geor" typeface="Sylfaen"/>
-        <a:font script="Armn" typeface="Arial"/>
-        <a:font script="Bugi" typeface="Leelawadee UI"/>
-        <a:font script="Bopo" typeface="Microsoft JhengHei"/>
-        <a:font script="Java" typeface="Javanese Text"/>
-        <a:font script="Lisu" typeface="Segoe UI"/>
-        <a:font script="Mymr" typeface="Myanmar Text"/>
-        <a:font script="Nkoo" typeface="Ebrima"/>
-        <a:font script="Olck" typeface="Nirmala UI"/>
-        <a:font script="Osma" typeface="Ebrima"/>
-        <a:font script="Phag" typeface="Phagspa"/>
-        <a:font script="Syrn" typeface="Estrangelo Edessa"/>
-        <a:font script="Syrj" typeface="Estrangelo Edessa"/>
-        <a:font script="Syre" typeface="Estrangelo Edessa"/>
-        <a:font script="Sora" typeface="Nirmala UI"/>
-        <a:font script="Tale" typeface="Microsoft Tai Le"/>
-        <a:font script="Talu" typeface="Microsoft New Tai Lue"/>
-        <a:font script="Tfng" typeface="Ebrima"/>
-      </a:minorFont>
-    </a:fontScheme>
-    <a:fmtScheme name="Office">
-      <a:fillStyleLst>
-        <a:solidFill>
-          <a:schemeClr val="phClr"/>
-        </a:solidFill>
-        <a:gradFill rotWithShape="1">
-          <a:gsLst>
-            <a:gs pos="0">
-              <a:schemeClr val="phClr">
-                <a:lumMod val="110000"/>
-                <a:satMod val="105000"/>
-                <a:tint val="67000"/>
-              </a:schemeClr>
-            </a:gs>
-            <a:gs pos="50000">
-              <a:schemeClr val="phClr">
-                <a:lumMod val="105000"/>
-                <a:satMod val="103000"/>
-                <a:tint val="73000"/>
-              </a:schemeClr>
-            </a:gs>
-            <a:gs pos="100000">
-              <a:schemeClr val="phClr">
-                <a:lumMod val="105000"/>
-                <a:satMod val="109000"/>
-                <a:tint val="81000"/>
-              </a:schemeClr>
-            </a:gs>
-          </a:gsLst>
-          <a:lin ang="5400000" scaled="0"/>
-        </a:gradFill>
-        <a:gradFill rotWithShape="1">
-          <a:gsLst>
-            <a:gs pos="0">
-              <a:schemeClr val="phClr">
-                <a:satMod val="103000"/>
-                <a:lumMod val="102000"/>
-                <a:tint val="94000"/>
-              </a:schemeClr>
-            </a:gs>
-            <a:gs pos="50000">
-              <a:schemeClr val="phClr">
-                <a:satMod val="110000"/>
-                <a:lumMod val="100000"/>
-                <a:shade val="100000"/>
-              </a:schemeClr>
-            </a:gs>
-            <a:gs pos="100000">
-              <a:schemeClr val="phClr">
-                <a:lumMod val="99000"/>
-                <a:satMod val="120000"/>
-                <a:shade val="78000"/>
-              </a:schemeClr>
-            </a:gs>
-          </a:gsLst>
-          <a:lin ang="5400000" scaled="0"/>
-        </a:gradFill>
-      </a:fillStyleLst>
-      <a:lnStyleLst>
-        <a:ln w="6350" cap="flat" cmpd="sng" algn="ctr">
-          <a:solidFill>
-            <a:schemeClr val="phClr"/>
-          </a:solidFill>
-          <a:prstDash val="solid"/>
-          <a:miter lim="800000"/>
-        </a:ln>
-        <a:ln w="12700" cap="flat" cmpd="sng" algn="ctr">
-          <a:solidFill>
-            <a:schemeClr val="phClr"/>
-          </a:solidFill>
-          <a:prstDash val="solid"/>
-          <a:miter lim="800000"/>
-        </a:ln>
-        <a:ln w="19050" cap="flat" cmpd="sng" algn="ctr">
-          <a:solidFill>
-            <a:schemeClr val="phClr"/>
-          </a:solidFill>
-          <a:prstDash val="solid"/>
-          <a:miter lim="800000"/>
-        </a:ln>
-      </a:lnStyleLst>
-      <a:effectStyleLst>
-        <a:effectStyle>
-          <a:effectLst/>
-        </a:effectStyle>
-        <a:effectStyle>
-          <a:effectLst/>
-        </a:effectStyle>
-        <a:effectStyle>
-          <a:effectLst>
-            <a:outerShdw blurRad="57150" dist="19050" dir="5400000" algn="ctr" rotWithShape="0">
-              <a:srgbClr val="000000">
-                <a:alpha val="63000"/>
-              </a:srgbClr>
-            </a:outerShdw>
-          </a:effectLst>
-        </a:effectStyle>
-      </a:effectStyleLst>
-      <a:bgFillStyleLst>
-        <a:solidFill>
-          <a:schemeClr val="phClr"/>
-        </a:solidFill>
-        <a:solidFill>
-          <a:schemeClr val="phClr">
-            <a:tint val="95000"/>
-            <a:satMod val="170000"/>
-          </a:schemeClr>
-        </a:solidFill>
-        <a:gradFill rotWithShape="1">
-          <a:gsLst>
-            <a:gs pos="0">
-              <a:schemeClr val="phClr">
-                <a:tint val="93000"/>
-                <a:satMod val="150000"/>
-                <a:shade val="98000"/>
-                <a:lumMod val="102000"/>
-              </a:schemeClr>
-            </a:gs>
-            <a:gs pos="50000">
-              <a:schemeClr val="phClr">
-                <a:tint val="98000"/>
-                <a:satMod val="130000"/>
-                <a:shade val="90000"/>
-                <a:lumMod val="103000"/>
-              </a:schemeClr>
-            </a:gs>
-            <a:gs pos="100000">
-              <a:schemeClr val="phClr">
-                <a:shade val="63000"/>
-                <a:satMod val="120000"/>
-              </a:schemeClr>
-            </a:gs>
-          </a:gsLst>
-          <a:lin ang="5400000" scaled="0"/>
-        </a:gradFill>
-      </a:bgFillStyleLst>
-    </a:fmtScheme>
-  </a:themeElements>
-  <a:objectDefaults/>
-  <a:extraClrSchemeLst/>
-  <a:extLst>
-    <a:ext uri="{05A4C25C-085E-4340-85A3-A5531E510DB2}">
-      <thm15:themeFamily xmlns:thm15="http://schemas.microsoft.com/office/thememl/2012/main" name="Office Theme" id="{62F939B6-93AF-4DB8-9C6B-D6C7DFDC589F}" vid="{4A3C46E8-61CC-4603-A589-7422A47A8E4A}"/>
-    </a:ext>
-  </a:extLst>
-</a:theme>
 </file>